--- a/Organograma_Time_Renner.pptx
+++ b/Organograma_Time_Renner.pptx
@@ -10,6 +10,8 @@
     <p:sldId id="258" r:id="rId103"/>
     <p:sldId id="259" r:id="rId104"/>
     <p:sldId id="260" r:id="rId105"/>
+    <p:sldId id="261" r:id="rId106"/>
+    <p:sldId id="262" r:id="rId107"/>
   </p:sldIdLst>
   <p:notesMasterIdLst>
     <p:notesMasterId r:id="rId3"/>
@@ -3054,7 +3056,7 @@
                 <a:ea typeface="Arial" pitchFamily="34" charset="-122"/>
                 <a:cs typeface="Arial" pitchFamily="34" charset="-120"/>
               </a:rPr>
-              <a:t>RENNER · ATENDIMENTO E PLANEJAMENTO</a:t>
+              <a:t>RENNER · ATENDIMENTO</a:t>
             </a:r>
             <a:endParaRPr lang="en-US" sz="3200" dirty="0"/>
           </a:p>
@@ -3062,32 +3064,53 @@
       </p:sp>
       <p:sp>
         <p:nvSpPr>
-          <p:cNvPr id="5" name="Text 5"/>
-          <p:cNvSpPr txBox="1"/>
-          <p:nvPr/>
-        </p:nvSpPr>
-        <p:spPr>
-          <a:xfrm>
-            <a:off x="812800" y="1295400"/>
-            <a:ext cx="6942666" cy="419100"/>
-          </a:xfrm>
-          <a:prstGeom prst="rect">
-            <a:avLst/>
-          </a:prstGeom>
-          <a:solidFill>
-            <a:srgbClr val="5E5E5E"/>
-          </a:solidFill>
-          <a:ln/>
-        </p:spPr>
-        <p:txBody>
-          <a:bodyPr wrap="square" lIns="50800" tIns="50800" rIns="50800" bIns="50800" rtlCol="0" anchor="ctr"/>
+          <p:cNvPr id="5" name="Shape 5"/>
+          <p:cNvSpPr/>
+          <p:nvPr/>
+        </p:nvSpPr>
+        <p:spPr>
+          <a:xfrm>
+            <a:off x="4169664" y="1168400"/>
+            <a:ext cx="3852672" cy="558800"/>
+          </a:xfrm>
+          <a:prstGeom prst="rect">
+            <a:avLst/>
+          </a:prstGeom>
+          <a:solidFill>
+            <a:srgbClr val="EC6A3B"/>
+          </a:solidFill>
+          <a:ln/>
+        </p:spPr>
+      </p:sp>
+      <p:sp>
+        <p:nvSpPr>
+          <p:cNvPr id="6" name="Text 6"/>
+          <p:cNvSpPr txBox="1"/>
+          <p:nvPr/>
+        </p:nvSpPr>
+        <p:spPr>
+          <a:xfrm>
+            <a:off x="4169664" y="1168400"/>
+            <a:ext cx="3852672" cy="558800"/>
+          </a:xfrm>
+          <a:prstGeom prst="rect">
+            <a:avLst/>
+          </a:prstGeom>
+          <a:noFill/>
+          <a:ln/>
+        </p:spPr>
+        <p:txBody>
+          <a:bodyPr wrap="square" lIns="50800" tIns="76200" rIns="101600" bIns="50800" rtlCol="0" anchor="ctr"/>
           <a:lstStyle/>
           <a:p>
             <a:pPr algn="ctr" indent="0" marL="0">
-              <a:buNone/>
-            </a:pPr>
-            <a:r>
-              <a:rPr lang="pt-BR" sz="1600" b="1" dirty="0">
+              <a:spcAft>
+                <a:spcPts val="200"/>
+              </a:spcAft>
+              <a:buNone/>
+            </a:pPr>
+            <a:r>
+              <a:rPr lang="pt-BR" sz="1300" b="1" dirty="0">
                 <a:solidFill>
                   <a:srgbClr val="FFFFFF"/>
                 </a:solidFill>
@@ -3095,32 +3118,50 @@
                 <a:ea typeface="Arial" pitchFamily="34" charset="-122"/>
                 <a:cs typeface="Arial" pitchFamily="34" charset="-120"/>
               </a:rPr>
-              <a:t>ATENDIMENTO</a:t>
-            </a:r>
-            <a:endParaRPr lang="pt-BR" sz="1600" dirty="0"/>
-          </a:p>
-        </p:txBody>
-      </p:sp>
-      <p:sp>
-        <p:nvSpPr>
-          <p:cNvPr id="6" name="Shape 6"/>
-          <p:cNvSpPr/>
-          <p:nvPr/>
-        </p:nvSpPr>
-        <p:spPr>
-          <a:xfrm>
-            <a:off x="812800" y="1790700"/>
-            <a:ext cx="6942666" cy="521208"/>
-          </a:xfrm>
-          <a:prstGeom prst="rect">
-            <a:avLst/>
-          </a:prstGeom>
-          <a:solidFill>
-            <a:srgbClr val="FFFFFF"/>
-          </a:solidFill>
+              <a:t>DIREÇÃO DE CONTA · CAROLINE LIMA</a:t>
+            </a:r>
+            <a:endParaRPr lang="pt-BR" sz="1300" dirty="0"/>
+          </a:p>
+          <a:p>
+            <a:pPr algn="ctr" indent="0" marL="0">
+              <a:spcAft>
+                <a:spcPts val="200"/>
+              </a:spcAft>
+              <a:buNone/>
+            </a:pPr>
+            <a:r>
+              <a:rPr lang="pt-BR" sz="1200" dirty="0">
+                <a:solidFill>
+                  <a:srgbClr val="FFFFFF"/>
+                </a:solidFill>
+                <a:latin typeface="Arial" pitchFamily="34" charset="0"/>
+                <a:ea typeface="Arial" pitchFamily="34" charset="-122"/>
+                <a:cs typeface="Arial" pitchFamily="34" charset="-120"/>
+              </a:rPr>
+              <a:t>Renner BR · Renner Latam · LRSA</a:t>
+            </a:r>
+            <a:endParaRPr lang="pt-BR" sz="1200" dirty="0"/>
+          </a:p>
+        </p:txBody>
+      </p:sp>
+      <p:sp>
+        <p:nvSpPr>
+          <p:cNvPr id="7" name="Shape 7"/>
+          <p:cNvSpPr/>
+          <p:nvPr/>
+        </p:nvSpPr>
+        <p:spPr>
+          <a:xfrm>
+            <a:off x="6096000" y="1727200"/>
+            <a:ext cx="0" cy="127000"/>
+          </a:xfrm>
+          <a:prstGeom prst="line">
+            <a:avLst/>
+          </a:prstGeom>
+          <a:noFill/>
           <a:ln w="19050">
             <a:solidFill>
-              <a:srgbClr val="5E5E5E"/>
+              <a:srgbClr val="141414"/>
             </a:solidFill>
             <a:prstDash val="solid"/>
           </a:ln>
@@ -3128,76 +3169,170 @@
       </p:sp>
       <p:sp>
         <p:nvSpPr>
-          <p:cNvPr id="7" name="Text 7"/>
-          <p:cNvSpPr txBox="1"/>
-          <p:nvPr/>
-        </p:nvSpPr>
-        <p:spPr>
-          <a:xfrm>
-            <a:off x="812800" y="1790700"/>
-            <a:ext cx="6942666" cy="521208"/>
-          </a:xfrm>
-          <a:prstGeom prst="rect">
-            <a:avLst/>
-          </a:prstGeom>
-          <a:noFill/>
-          <a:ln/>
-        </p:spPr>
-        <p:txBody>
-          <a:bodyPr wrap="square" lIns="50800" tIns="76200" rIns="101600" bIns="50800" rtlCol="0" anchor="ctr"/>
+          <p:cNvPr id="8" name="Shape 8"/>
+          <p:cNvSpPr/>
+          <p:nvPr/>
+        </p:nvSpPr>
+        <p:spPr>
+          <a:xfrm>
+            <a:off x="2076450" y="1854200"/>
+            <a:ext cx="8039100" cy="0"/>
+          </a:xfrm>
+          <a:prstGeom prst="line">
+            <a:avLst/>
+          </a:prstGeom>
+          <a:noFill/>
+          <a:ln w="19050">
+            <a:solidFill>
+              <a:srgbClr val="141414"/>
+            </a:solidFill>
+            <a:prstDash val="solid"/>
+          </a:ln>
+        </p:spPr>
+      </p:sp>
+      <p:sp>
+        <p:nvSpPr>
+          <p:cNvPr id="9" name="Shape 9"/>
+          <p:cNvSpPr/>
+          <p:nvPr/>
+        </p:nvSpPr>
+        <p:spPr>
+          <a:xfrm>
+            <a:off x="2076450" y="1854200"/>
+            <a:ext cx="0" cy="127000"/>
+          </a:xfrm>
+          <a:prstGeom prst="line">
+            <a:avLst/>
+          </a:prstGeom>
+          <a:noFill/>
+          <a:ln w="19050">
+            <a:solidFill>
+              <a:srgbClr val="141414"/>
+            </a:solidFill>
+            <a:prstDash val="solid"/>
+          </a:ln>
+        </p:spPr>
+      </p:sp>
+      <p:sp>
+        <p:nvSpPr>
+          <p:cNvPr id="10" name="Shape 10"/>
+          <p:cNvSpPr/>
+          <p:nvPr/>
+        </p:nvSpPr>
+        <p:spPr>
+          <a:xfrm>
+            <a:off x="4756150" y="1854200"/>
+            <a:ext cx="0" cy="127000"/>
+          </a:xfrm>
+          <a:prstGeom prst="line">
+            <a:avLst/>
+          </a:prstGeom>
+          <a:noFill/>
+          <a:ln w="19050">
+            <a:solidFill>
+              <a:srgbClr val="141414"/>
+            </a:solidFill>
+            <a:prstDash val="solid"/>
+          </a:ln>
+        </p:spPr>
+      </p:sp>
+      <p:sp>
+        <p:nvSpPr>
+          <p:cNvPr id="11" name="Shape 11"/>
+          <p:cNvSpPr/>
+          <p:nvPr/>
+        </p:nvSpPr>
+        <p:spPr>
+          <a:xfrm>
+            <a:off x="7435850" y="1854200"/>
+            <a:ext cx="0" cy="127000"/>
+          </a:xfrm>
+          <a:prstGeom prst="line">
+            <a:avLst/>
+          </a:prstGeom>
+          <a:noFill/>
+          <a:ln w="19050">
+            <a:solidFill>
+              <a:srgbClr val="141414"/>
+            </a:solidFill>
+            <a:prstDash val="solid"/>
+          </a:ln>
+        </p:spPr>
+      </p:sp>
+      <p:sp>
+        <p:nvSpPr>
+          <p:cNvPr id="12" name="Shape 12"/>
+          <p:cNvSpPr/>
+          <p:nvPr/>
+        </p:nvSpPr>
+        <p:spPr>
+          <a:xfrm>
+            <a:off x="10115550" y="1854200"/>
+            <a:ext cx="0" cy="127000"/>
+          </a:xfrm>
+          <a:prstGeom prst="line">
+            <a:avLst/>
+          </a:prstGeom>
+          <a:noFill/>
+          <a:ln w="19050">
+            <a:solidFill>
+              <a:srgbClr val="141414"/>
+            </a:solidFill>
+            <a:prstDash val="solid"/>
+          </a:ln>
+        </p:spPr>
+      </p:sp>
+      <p:sp>
+        <p:nvSpPr>
+          <p:cNvPr id="13" name="Text 13"/>
+          <p:cNvSpPr txBox="1"/>
+          <p:nvPr/>
+        </p:nvSpPr>
+        <p:spPr>
+          <a:xfrm>
+            <a:off x="812800" y="1981200"/>
+            <a:ext cx="2527300" cy="419100"/>
+          </a:xfrm>
+          <a:prstGeom prst="rect">
+            <a:avLst/>
+          </a:prstGeom>
+          <a:solidFill>
+            <a:srgbClr val="5E5E5E"/>
+          </a:solidFill>
+          <a:ln/>
+        </p:spPr>
+        <p:txBody>
+          <a:bodyPr wrap="square" lIns="50800" tIns="50800" rIns="50800" bIns="50800" rtlCol="0" anchor="ctr"/>
           <a:lstStyle/>
           <a:p>
             <a:pPr algn="ctr" indent="0" marL="0">
-              <a:spcAft>
-                <a:spcPts val="200"/>
-              </a:spcAft>
-              <a:buNone/>
-            </a:pPr>
-            <a:r>
-              <a:rPr lang="pt-BR" sz="1200" b="1" dirty="0">
-                <a:solidFill>
-                  <a:srgbClr val="141414"/>
-                </a:solidFill>
-                <a:latin typeface="Arial" pitchFamily="34" charset="0"/>
-                <a:ea typeface="Arial" pitchFamily="34" charset="-122"/>
-                <a:cs typeface="Arial" pitchFamily="34" charset="-120"/>
-              </a:rPr>
-              <a:t>CAROLINE LIMA</a:t>
-            </a:r>
-            <a:endParaRPr lang="pt-BR" sz="1200" dirty="0"/>
-          </a:p>
-          <a:p>
-            <a:pPr algn="ctr" indent="0" marL="0">
-              <a:spcAft>
-                <a:spcPts val="200"/>
-              </a:spcAft>
-              <a:buNone/>
-            </a:pPr>
-            <a:r>
-              <a:rPr lang="pt-BR" sz="1200" dirty="0">
-                <a:solidFill>
-                  <a:srgbClr val="5E5E5E"/>
-                </a:solidFill>
-                <a:latin typeface="Arial" pitchFamily="34" charset="0"/>
-                <a:ea typeface="Arial" pitchFamily="34" charset="-122"/>
-                <a:cs typeface="Arial" pitchFamily="34" charset="-120"/>
-              </a:rPr>
-              <a:t>Diretora de conta · BR · Latam · LRSA</a:t>
-            </a:r>
-            <a:endParaRPr lang="pt-BR" sz="1200" dirty="0"/>
-          </a:p>
-        </p:txBody>
-      </p:sp>
-      <p:sp>
-        <p:nvSpPr>
-          <p:cNvPr id="8" name="Shape 8"/>
-          <p:cNvSpPr/>
-          <p:nvPr/>
-        </p:nvSpPr>
-        <p:spPr>
-          <a:xfrm>
-            <a:off x="812800" y="2375408"/>
-            <a:ext cx="3433233" cy="521208"/>
+              <a:buNone/>
+            </a:pPr>
+            <a:r>
+              <a:rPr lang="pt-BR" sz="1600" b="1" dirty="0">
+                <a:solidFill>
+                  <a:srgbClr val="FFFFFF"/>
+                </a:solidFill>
+                <a:latin typeface="Arial" pitchFamily="34" charset="0"/>
+                <a:ea typeface="Arial" pitchFamily="34" charset="-122"/>
+                <a:cs typeface="Arial" pitchFamily="34" charset="-120"/>
+              </a:rPr>
+              <a:t>RENNER BR</a:t>
+            </a:r>
+            <a:endParaRPr lang="pt-BR" sz="1600" dirty="0"/>
+          </a:p>
+        </p:txBody>
+      </p:sp>
+      <p:sp>
+        <p:nvSpPr>
+          <p:cNvPr id="14" name="Shape 14"/>
+          <p:cNvSpPr/>
+          <p:nvPr/>
+        </p:nvSpPr>
+        <p:spPr>
+          <a:xfrm>
+            <a:off x="812800" y="2476500"/>
+            <a:ext cx="2527300" cy="521208"/>
           </a:xfrm>
           <a:prstGeom prst="rect">
             <a:avLst/>
@@ -3215,14 +3350,14 @@
       </p:sp>
       <p:sp>
         <p:nvSpPr>
-          <p:cNvPr id="9" name="Text 9"/>
-          <p:cNvSpPr txBox="1"/>
-          <p:nvPr/>
-        </p:nvSpPr>
-        <p:spPr>
-          <a:xfrm>
-            <a:off x="812800" y="2375408"/>
-            <a:ext cx="3433233" cy="521208"/>
+          <p:cNvPr id="15" name="Text 15"/>
+          <p:cNvSpPr txBox="1"/>
+          <p:nvPr/>
+        </p:nvSpPr>
+        <p:spPr>
+          <a:xfrm>
+            <a:off x="812800" y="2476500"/>
+            <a:ext cx="2527300" cy="521208"/>
           </a:xfrm>
           <a:prstGeom prst="rect">
             <a:avLst/>
@@ -3277,14 +3412,14 @@
       </p:sp>
       <p:sp>
         <p:nvSpPr>
-          <p:cNvPr id="10" name="Shape 10"/>
-          <p:cNvSpPr/>
-          <p:nvPr/>
-        </p:nvSpPr>
-        <p:spPr>
-          <a:xfrm>
-            <a:off x="4322233" y="2375408"/>
-            <a:ext cx="3433233" cy="521208"/>
+          <p:cNvPr id="16" name="Shape 16"/>
+          <p:cNvSpPr/>
+          <p:nvPr/>
+        </p:nvSpPr>
+        <p:spPr>
+          <a:xfrm>
+            <a:off x="812800" y="3061208"/>
+            <a:ext cx="2527300" cy="521208"/>
           </a:xfrm>
           <a:prstGeom prst="rect">
             <a:avLst/>
@@ -3302,14 +3437,14 @@
       </p:sp>
       <p:sp>
         <p:nvSpPr>
-          <p:cNvPr id="11" name="Text 11"/>
-          <p:cNvSpPr txBox="1"/>
-          <p:nvPr/>
-        </p:nvSpPr>
-        <p:spPr>
-          <a:xfrm>
-            <a:off x="4322233" y="2375408"/>
-            <a:ext cx="3433233" cy="521208"/>
+          <p:cNvPr id="17" name="Text 17"/>
+          <p:cNvSpPr txBox="1"/>
+          <p:nvPr/>
+        </p:nvSpPr>
+        <p:spPr>
+          <a:xfrm>
+            <a:off x="812800" y="3061208"/>
+            <a:ext cx="2527300" cy="521208"/>
           </a:xfrm>
           <a:prstGeom prst="rect">
             <a:avLst/>
@@ -3364,14 +3499,14 @@
       </p:sp>
       <p:sp>
         <p:nvSpPr>
-          <p:cNvPr id="12" name="Shape 12"/>
-          <p:cNvSpPr/>
-          <p:nvPr/>
-        </p:nvSpPr>
-        <p:spPr>
-          <a:xfrm>
-            <a:off x="812800" y="2960116"/>
-            <a:ext cx="3433233" cy="521208"/>
+          <p:cNvPr id="18" name="Shape 18"/>
+          <p:cNvSpPr/>
+          <p:nvPr/>
+        </p:nvSpPr>
+        <p:spPr>
+          <a:xfrm>
+            <a:off x="812800" y="3645916"/>
+            <a:ext cx="2527300" cy="521208"/>
           </a:xfrm>
           <a:prstGeom prst="rect">
             <a:avLst/>
@@ -3389,14 +3524,14 @@
       </p:sp>
       <p:sp>
         <p:nvSpPr>
-          <p:cNvPr id="13" name="Text 13"/>
-          <p:cNvSpPr txBox="1"/>
-          <p:nvPr/>
-        </p:nvSpPr>
-        <p:spPr>
-          <a:xfrm>
-            <a:off x="812800" y="2960116"/>
-            <a:ext cx="3433233" cy="521208"/>
+          <p:cNvPr id="19" name="Text 19"/>
+          <p:cNvSpPr txBox="1"/>
+          <p:nvPr/>
+        </p:nvSpPr>
+        <p:spPr>
+          <a:xfrm>
+            <a:off x="812800" y="3645916"/>
+            <a:ext cx="2527300" cy="521208"/>
           </a:xfrm>
           <a:prstGeom prst="rect">
             <a:avLst/>
@@ -3451,14 +3586,14 @@
       </p:sp>
       <p:sp>
         <p:nvSpPr>
-          <p:cNvPr id="14" name="Shape 14"/>
-          <p:cNvSpPr/>
-          <p:nvPr/>
-        </p:nvSpPr>
-        <p:spPr>
-          <a:xfrm>
-            <a:off x="4322233" y="2960116"/>
-            <a:ext cx="3433233" cy="521208"/>
+          <p:cNvPr id="20" name="Shape 20"/>
+          <p:cNvSpPr/>
+          <p:nvPr/>
+        </p:nvSpPr>
+        <p:spPr>
+          <a:xfrm>
+            <a:off x="812800" y="4230624"/>
+            <a:ext cx="2527300" cy="699516"/>
           </a:xfrm>
           <a:prstGeom prst="rect">
             <a:avLst/>
@@ -3476,14 +3611,14 @@
       </p:sp>
       <p:sp>
         <p:nvSpPr>
-          <p:cNvPr id="15" name="Text 15"/>
-          <p:cNvSpPr txBox="1"/>
-          <p:nvPr/>
-        </p:nvSpPr>
-        <p:spPr>
-          <a:xfrm>
-            <a:off x="4322233" y="2960116"/>
-            <a:ext cx="3433233" cy="521208"/>
+          <p:cNvPr id="21" name="Text 21"/>
+          <p:cNvSpPr txBox="1"/>
+          <p:nvPr/>
+        </p:nvSpPr>
+        <p:spPr>
+          <a:xfrm>
+            <a:off x="812800" y="4230624"/>
+            <a:ext cx="2527300" cy="699516"/>
           </a:xfrm>
           <a:prstGeom prst="rect">
             <a:avLst/>
@@ -3538,14 +3673,55 @@
       </p:sp>
       <p:sp>
         <p:nvSpPr>
-          <p:cNvPr id="16" name="Shape 16"/>
-          <p:cNvSpPr/>
-          <p:nvPr/>
-        </p:nvSpPr>
-        <p:spPr>
-          <a:xfrm>
-            <a:off x="812800" y="3544824"/>
-            <a:ext cx="3433233" cy="521208"/>
+          <p:cNvPr id="22" name="Text 22"/>
+          <p:cNvSpPr txBox="1"/>
+          <p:nvPr/>
+        </p:nvSpPr>
+        <p:spPr>
+          <a:xfrm>
+            <a:off x="3492500" y="1981200"/>
+            <a:ext cx="2527300" cy="419100"/>
+          </a:xfrm>
+          <a:prstGeom prst="rect">
+            <a:avLst/>
+          </a:prstGeom>
+          <a:solidFill>
+            <a:srgbClr val="5E5E5E"/>
+          </a:solidFill>
+          <a:ln/>
+        </p:spPr>
+        <p:txBody>
+          <a:bodyPr wrap="square" lIns="50800" tIns="50800" rIns="50800" bIns="50800" rtlCol="0" anchor="ctr"/>
+          <a:lstStyle/>
+          <a:p>
+            <a:pPr algn="ctr" indent="0" marL="0">
+              <a:buNone/>
+            </a:pPr>
+            <a:r>
+              <a:rPr lang="pt-BR" sz="1600" b="1" dirty="0">
+                <a:solidFill>
+                  <a:srgbClr val="FFFFFF"/>
+                </a:solidFill>
+                <a:latin typeface="Arial" pitchFamily="34" charset="0"/>
+                <a:ea typeface="Arial" pitchFamily="34" charset="-122"/>
+                <a:cs typeface="Arial" pitchFamily="34" charset="-120"/>
+              </a:rPr>
+              <a:t>RENNER LATAM</a:t>
+            </a:r>
+            <a:endParaRPr lang="pt-BR" sz="1600" dirty="0"/>
+          </a:p>
+        </p:txBody>
+      </p:sp>
+      <p:sp>
+        <p:nvSpPr>
+          <p:cNvPr id="23" name="Shape 23"/>
+          <p:cNvSpPr/>
+          <p:nvPr/>
+        </p:nvSpPr>
+        <p:spPr>
+          <a:xfrm>
+            <a:off x="3492500" y="2476500"/>
+            <a:ext cx="2527300" cy="521208"/>
           </a:xfrm>
           <a:prstGeom prst="rect">
             <a:avLst/>
@@ -3563,14 +3739,14 @@
       </p:sp>
       <p:sp>
         <p:nvSpPr>
-          <p:cNvPr id="17" name="Text 17"/>
-          <p:cNvSpPr txBox="1"/>
-          <p:nvPr/>
-        </p:nvSpPr>
-        <p:spPr>
-          <a:xfrm>
-            <a:off x="812800" y="3544824"/>
-            <a:ext cx="3433233" cy="521208"/>
+          <p:cNvPr id="24" name="Text 24"/>
+          <p:cNvSpPr txBox="1"/>
+          <p:nvPr/>
+        </p:nvSpPr>
+        <p:spPr>
+          <a:xfrm>
+            <a:off x="3492500" y="2476500"/>
+            <a:ext cx="2527300" cy="521208"/>
           </a:xfrm>
           <a:prstGeom prst="rect">
             <a:avLst/>
@@ -3625,14 +3801,55 @@
       </p:sp>
       <p:sp>
         <p:nvSpPr>
-          <p:cNvPr id="18" name="Shape 18"/>
-          <p:cNvSpPr/>
-          <p:nvPr/>
-        </p:nvSpPr>
-        <p:spPr>
-          <a:xfrm>
-            <a:off x="4322233" y="3544824"/>
-            <a:ext cx="3433233" cy="521208"/>
+          <p:cNvPr id="25" name="Text 25"/>
+          <p:cNvSpPr txBox="1"/>
+          <p:nvPr/>
+        </p:nvSpPr>
+        <p:spPr>
+          <a:xfrm>
+            <a:off x="6172200" y="1981200"/>
+            <a:ext cx="2527300" cy="419100"/>
+          </a:xfrm>
+          <a:prstGeom prst="rect">
+            <a:avLst/>
+          </a:prstGeom>
+          <a:solidFill>
+            <a:srgbClr val="5E5E5E"/>
+          </a:solidFill>
+          <a:ln/>
+        </p:spPr>
+        <p:txBody>
+          <a:bodyPr wrap="square" lIns="50800" tIns="50800" rIns="50800" bIns="50800" rtlCol="0" anchor="ctr"/>
+          <a:lstStyle/>
+          <a:p>
+            <a:pPr algn="ctr" indent="0" marL="0">
+              <a:buNone/>
+            </a:pPr>
+            <a:r>
+              <a:rPr lang="pt-BR" sz="1600" b="1" dirty="0">
+                <a:solidFill>
+                  <a:srgbClr val="FFFFFF"/>
+                </a:solidFill>
+                <a:latin typeface="Arial" pitchFamily="34" charset="0"/>
+                <a:ea typeface="Arial" pitchFamily="34" charset="-122"/>
+                <a:cs typeface="Arial" pitchFamily="34" charset="-120"/>
+              </a:rPr>
+              <a:t>LRSA</a:t>
+            </a:r>
+            <a:endParaRPr lang="pt-BR" sz="1600" dirty="0"/>
+          </a:p>
+        </p:txBody>
+      </p:sp>
+      <p:sp>
+        <p:nvSpPr>
+          <p:cNvPr id="26" name="Shape 26"/>
+          <p:cNvSpPr/>
+          <p:nvPr/>
+        </p:nvSpPr>
+        <p:spPr>
+          <a:xfrm>
+            <a:off x="6172200" y="2476500"/>
+            <a:ext cx="2527300" cy="521208"/>
           </a:xfrm>
           <a:prstGeom prst="rect">
             <a:avLst/>
@@ -3650,14 +3867,14 @@
       </p:sp>
       <p:sp>
         <p:nvSpPr>
-          <p:cNvPr id="19" name="Text 19"/>
-          <p:cNvSpPr txBox="1"/>
-          <p:nvPr/>
-        </p:nvSpPr>
-        <p:spPr>
-          <a:xfrm>
-            <a:off x="4322233" y="3544824"/>
-            <a:ext cx="3433233" cy="521208"/>
+          <p:cNvPr id="27" name="Text 27"/>
+          <p:cNvSpPr txBox="1"/>
+          <p:nvPr/>
+        </p:nvSpPr>
+        <p:spPr>
+          <a:xfrm>
+            <a:off x="6172200" y="2476500"/>
+            <a:ext cx="2527300" cy="521208"/>
           </a:xfrm>
           <a:prstGeom prst="rect">
             <a:avLst/>
@@ -3712,14 +3929,55 @@
       </p:sp>
       <p:sp>
         <p:nvSpPr>
-          <p:cNvPr id="20" name="Shape 20"/>
-          <p:cNvSpPr/>
-          <p:nvPr/>
-        </p:nvSpPr>
-        <p:spPr>
-          <a:xfrm>
-            <a:off x="812800" y="4129532"/>
-            <a:ext cx="3433233" cy="521208"/>
+          <p:cNvPr id="28" name="Text 28"/>
+          <p:cNvSpPr txBox="1"/>
+          <p:nvPr/>
+        </p:nvSpPr>
+        <p:spPr>
+          <a:xfrm>
+            <a:off x="8851900" y="1981200"/>
+            <a:ext cx="2527300" cy="419100"/>
+          </a:xfrm>
+          <a:prstGeom prst="rect">
+            <a:avLst/>
+          </a:prstGeom>
+          <a:solidFill>
+            <a:srgbClr val="5E5E5E"/>
+          </a:solidFill>
+          <a:ln/>
+        </p:spPr>
+        <p:txBody>
+          <a:bodyPr wrap="square" lIns="50800" tIns="50800" rIns="50800" bIns="50800" rtlCol="0" anchor="ctr"/>
+          <a:lstStyle/>
+          <a:p>
+            <a:pPr algn="ctr" indent="0" marL="0">
+              <a:buNone/>
+            </a:pPr>
+            <a:r>
+              <a:rPr lang="pt-BR" sz="1600" b="1" dirty="0">
+                <a:solidFill>
+                  <a:srgbClr val="FFFFFF"/>
+                </a:solidFill>
+                <a:latin typeface="Arial" pitchFamily="34" charset="0"/>
+                <a:ea typeface="Arial" pitchFamily="34" charset="-122"/>
+                <a:cs typeface="Arial" pitchFamily="34" charset="-120"/>
+              </a:rPr>
+              <a:t>CONTEÚDO</a:t>
+            </a:r>
+            <a:endParaRPr lang="pt-BR" sz="1600" dirty="0"/>
+          </a:p>
+        </p:txBody>
+      </p:sp>
+      <p:sp>
+        <p:nvSpPr>
+          <p:cNvPr id="29" name="Shape 29"/>
+          <p:cNvSpPr/>
+          <p:nvPr/>
+        </p:nvSpPr>
+        <p:spPr>
+          <a:xfrm>
+            <a:off x="8851900" y="2476500"/>
+            <a:ext cx="2527300" cy="699516"/>
           </a:xfrm>
           <a:prstGeom prst="rect">
             <a:avLst/>
@@ -3737,14 +3995,14 @@
       </p:sp>
       <p:sp>
         <p:nvSpPr>
-          <p:cNvPr id="21" name="Text 21"/>
-          <p:cNvSpPr txBox="1"/>
-          <p:nvPr/>
-        </p:nvSpPr>
-        <p:spPr>
-          <a:xfrm>
-            <a:off x="812800" y="4129532"/>
-            <a:ext cx="3433233" cy="521208"/>
+          <p:cNvPr id="30" name="Text 30"/>
+          <p:cNvSpPr txBox="1"/>
+          <p:nvPr/>
+        </p:nvSpPr>
+        <p:spPr>
+          <a:xfrm>
+            <a:off x="8851900" y="2476500"/>
+            <a:ext cx="2527300" cy="699516"/>
           </a:xfrm>
           <a:prstGeom prst="rect">
             <a:avLst/>
@@ -3799,14 +4057,14 @@
       </p:sp>
       <p:sp>
         <p:nvSpPr>
-          <p:cNvPr id="22" name="Shape 22"/>
-          <p:cNvSpPr/>
-          <p:nvPr/>
-        </p:nvSpPr>
-        <p:spPr>
-          <a:xfrm>
-            <a:off x="4322233" y="4129532"/>
-            <a:ext cx="3433233" cy="521208"/>
+          <p:cNvPr id="31" name="Shape 31"/>
+          <p:cNvSpPr/>
+          <p:nvPr/>
+        </p:nvSpPr>
+        <p:spPr>
+          <a:xfrm>
+            <a:off x="8851900" y="3239516"/>
+            <a:ext cx="2527300" cy="699516"/>
           </a:xfrm>
           <a:prstGeom prst="rect">
             <a:avLst/>
@@ -3824,14 +4082,14 @@
       </p:sp>
       <p:sp>
         <p:nvSpPr>
-          <p:cNvPr id="23" name="Text 23"/>
-          <p:cNvSpPr txBox="1"/>
-          <p:nvPr/>
-        </p:nvSpPr>
-        <p:spPr>
-          <a:xfrm>
-            <a:off x="4322233" y="4129532"/>
-            <a:ext cx="3433233" cy="521208"/>
+          <p:cNvPr id="32" name="Text 32"/>
+          <p:cNvSpPr txBox="1"/>
+          <p:nvPr/>
+        </p:nvSpPr>
+        <p:spPr>
+          <a:xfrm>
+            <a:off x="8851900" y="3239516"/>
+            <a:ext cx="2527300" cy="699516"/>
           </a:xfrm>
           <a:prstGeom prst="rect">
             <a:avLst/>
@@ -3886,99 +4144,30 @@
       </p:sp>
       <p:sp>
         <p:nvSpPr>
-          <p:cNvPr id="24" name="Text 24"/>
-          <p:cNvSpPr txBox="1"/>
-          <p:nvPr/>
-        </p:nvSpPr>
-        <p:spPr>
-          <a:xfrm>
-            <a:off x="7907866" y="1295400"/>
-            <a:ext cx="3471333" cy="419100"/>
-          </a:xfrm>
-          <a:prstGeom prst="rect">
-            <a:avLst/>
-          </a:prstGeom>
-          <a:solidFill>
-            <a:srgbClr val="B8393A"/>
-          </a:solidFill>
-          <a:ln/>
-        </p:spPr>
-        <p:txBody>
-          <a:bodyPr wrap="square" lIns="50800" tIns="50800" rIns="50800" bIns="50800" rtlCol="0" anchor="ctr"/>
-          <a:lstStyle/>
-          <a:p>
-            <a:pPr algn="ctr" indent="0" marL="0">
-              <a:buNone/>
-            </a:pPr>
-            <a:r>
-              <a:rPr lang="pt-BR" sz="1600" b="1" dirty="0">
-                <a:solidFill>
-                  <a:srgbClr val="FFFFFF"/>
-                </a:solidFill>
-                <a:latin typeface="Arial" pitchFamily="34" charset="0"/>
-                <a:ea typeface="Arial" pitchFamily="34" charset="-122"/>
-                <a:cs typeface="Arial" pitchFamily="34" charset="-120"/>
-              </a:rPr>
-              <a:t>PLANEJAMENTO</a:t>
-            </a:r>
-            <a:endParaRPr lang="pt-BR" sz="1600" dirty="0"/>
-          </a:p>
-        </p:txBody>
-      </p:sp>
-      <p:sp>
-        <p:nvSpPr>
-          <p:cNvPr id="25" name="Shape 25"/>
-          <p:cNvSpPr/>
-          <p:nvPr/>
-        </p:nvSpPr>
-        <p:spPr>
-          <a:xfrm>
-            <a:off x="7907866" y="1790700"/>
-            <a:ext cx="3471333" cy="521208"/>
-          </a:xfrm>
-          <a:prstGeom prst="rect">
-            <a:avLst/>
-          </a:prstGeom>
-          <a:solidFill>
-            <a:srgbClr val="FFFFFF"/>
-          </a:solidFill>
-          <a:ln w="19050">
-            <a:solidFill>
-              <a:srgbClr val="B8393A"/>
-            </a:solidFill>
-            <a:prstDash val="solid"/>
-          </a:ln>
-        </p:spPr>
-      </p:sp>
-      <p:sp>
-        <p:nvSpPr>
-          <p:cNvPr id="26" name="Text 26"/>
-          <p:cNvSpPr txBox="1"/>
-          <p:nvPr/>
-        </p:nvSpPr>
-        <p:spPr>
-          <a:xfrm>
-            <a:off x="7907866" y="1790700"/>
-            <a:ext cx="3471333" cy="521208"/>
-          </a:xfrm>
-          <a:prstGeom prst="rect">
-            <a:avLst/>
-          </a:prstGeom>
-          <a:noFill/>
-          <a:ln/>
-        </p:spPr>
-        <p:txBody>
-          <a:bodyPr wrap="square" lIns="50800" tIns="76200" rIns="101600" bIns="50800" rtlCol="0" anchor="ctr"/>
-          <a:lstStyle/>
-          <a:p>
-            <a:pPr algn="ctr" indent="0" marL="0">
-              <a:spcAft>
-                <a:spcPts val="200"/>
-              </a:spcAft>
-              <a:buNone/>
-            </a:pPr>
-            <a:r>
-              <a:rPr lang="pt-BR" sz="1200" b="1" dirty="0">
+          <p:cNvPr id="33" name="Text 33"/>
+          <p:cNvSpPr txBox="1"/>
+          <p:nvPr/>
+        </p:nvSpPr>
+        <p:spPr>
+          <a:xfrm>
+            <a:off x="9474200" y="6311900"/>
+            <a:ext cx="1905000" cy="228600"/>
+          </a:xfrm>
+          <a:prstGeom prst="rect">
+            <a:avLst/>
+          </a:prstGeom>
+          <a:noFill/>
+          <a:ln/>
+        </p:spPr>
+        <p:txBody>
+          <a:bodyPr wrap="square" lIns="0" tIns="0" rIns="0" bIns="0" rtlCol="0" anchor="ctr"/>
+          <a:lstStyle/>
+          <a:p>
+            <a:pPr algn="l" indent="0" marL="0">
+              <a:buNone/>
+            </a:pPr>
+            <a:r>
+              <a:rPr lang="pt-BR" sz="1200" dirty="0">
                 <a:solidFill>
                   <a:srgbClr val="141414"/>
                 </a:solidFill>
@@ -3986,42 +4175,22 @@
                 <a:ea typeface="Arial" pitchFamily="34" charset="-122"/>
                 <a:cs typeface="Arial" pitchFamily="34" charset="-120"/>
               </a:rPr>
-              <a:t>EDUARDO FLORES</a:t>
-            </a:r>
-            <a:endParaRPr lang="pt-BR" sz="1200" dirty="0"/>
-          </a:p>
-          <a:p>
-            <a:pPr algn="ctr" indent="0" marL="0">
-              <a:spcAft>
-                <a:spcPts val="200"/>
-              </a:spcAft>
-              <a:buNone/>
-            </a:pPr>
-            <a:r>
-              <a:rPr lang="pt-BR" sz="1200" dirty="0">
-                <a:solidFill>
-                  <a:srgbClr val="5E5E5E"/>
-                </a:solidFill>
-                <a:latin typeface="Arial" pitchFamily="34" charset="0"/>
-                <a:ea typeface="Arial" pitchFamily="34" charset="-122"/>
-                <a:cs typeface="Arial" pitchFamily="34" charset="-120"/>
-              </a:rPr>
-              <a:t>VP de planejamento · BR · Latam · LRSA</a:t>
-            </a:r>
-            <a:endParaRPr lang="pt-BR" sz="1200" dirty="0"/>
-          </a:p>
-        </p:txBody>
-      </p:sp>
-      <p:sp>
-        <p:nvSpPr>
-          <p:cNvPr id="27" name="Shape 27"/>
-          <p:cNvSpPr/>
-          <p:nvPr/>
-        </p:nvSpPr>
-        <p:spPr>
-          <a:xfrm>
-            <a:off x="9643532" y="2311908"/>
-            <a:ext cx="0" cy="152400"/>
+              <a:t>Liderança (responde a)</a:t>
+            </a:r>
+            <a:endParaRPr lang="pt-BR" sz="1200" dirty="0"/>
+          </a:p>
+        </p:txBody>
+      </p:sp>
+      <p:sp>
+        <p:nvSpPr>
+          <p:cNvPr id="34" name="Shape 34"/>
+          <p:cNvSpPr/>
+          <p:nvPr/>
+        </p:nvSpPr>
+        <p:spPr>
+          <a:xfrm>
+            <a:off x="9042400" y="6426200"/>
+            <a:ext cx="355600" cy="0"/>
           </a:xfrm>
           <a:prstGeom prst="line">
             <a:avLst/>
@@ -4037,330 +4206,7 @@
       </p:sp>
       <p:sp>
         <p:nvSpPr>
-          <p:cNvPr id="28" name="Shape 28"/>
-          <p:cNvSpPr/>
-          <p:nvPr/>
-        </p:nvSpPr>
-        <p:spPr>
-          <a:xfrm>
-            <a:off x="7907866" y="2464308"/>
-            <a:ext cx="3471333" cy="521208"/>
-          </a:xfrm>
-          <a:prstGeom prst="rect">
-            <a:avLst/>
-          </a:prstGeom>
-          <a:solidFill>
-            <a:srgbClr val="FFFFFF"/>
-          </a:solidFill>
-          <a:ln w="19050">
-            <a:solidFill>
-              <a:srgbClr val="B8393A"/>
-            </a:solidFill>
-            <a:prstDash val="solid"/>
-          </a:ln>
-        </p:spPr>
-      </p:sp>
-      <p:sp>
-        <p:nvSpPr>
-          <p:cNvPr id="29" name="Text 29"/>
-          <p:cNvSpPr txBox="1"/>
-          <p:nvPr/>
-        </p:nvSpPr>
-        <p:spPr>
-          <a:xfrm>
-            <a:off x="7907866" y="2464308"/>
-            <a:ext cx="3471333" cy="521208"/>
-          </a:xfrm>
-          <a:prstGeom prst="rect">
-            <a:avLst/>
-          </a:prstGeom>
-          <a:noFill/>
-          <a:ln/>
-        </p:spPr>
-        <p:txBody>
-          <a:bodyPr wrap="square" lIns="50800" tIns="76200" rIns="101600" bIns="50800" rtlCol="0" anchor="ctr"/>
-          <a:lstStyle/>
-          <a:p>
-            <a:pPr algn="ctr" indent="0" marL="0">
-              <a:spcAft>
-                <a:spcPts val="200"/>
-              </a:spcAft>
-              <a:buNone/>
-            </a:pPr>
-            <a:r>
-              <a:rPr lang="pt-BR" sz="1200" b="1" dirty="0">
-                <a:solidFill>
-                  <a:srgbClr val="141414"/>
-                </a:solidFill>
-                <a:latin typeface="Arial" pitchFamily="34" charset="0"/>
-                <a:ea typeface="Arial" pitchFamily="34" charset="-122"/>
-                <a:cs typeface="Arial" pitchFamily="34" charset="-120"/>
-              </a:rPr>
-              <a:t>PAOLA PASCOALE</a:t>
-            </a:r>
-            <a:endParaRPr lang="pt-BR" sz="1200" dirty="0"/>
-          </a:p>
-          <a:p>
-            <a:pPr algn="ctr" indent="0" marL="0">
-              <a:spcAft>
-                <a:spcPts val="200"/>
-              </a:spcAft>
-              <a:buNone/>
-            </a:pPr>
-            <a:r>
-              <a:rPr lang="pt-BR" sz="1200" dirty="0">
-                <a:solidFill>
-                  <a:srgbClr val="5E5E5E"/>
-                </a:solidFill>
-                <a:latin typeface="Arial" pitchFamily="34" charset="0"/>
-                <a:ea typeface="Arial" pitchFamily="34" charset="-122"/>
-                <a:cs typeface="Arial" pitchFamily="34" charset="-120"/>
-              </a:rPr>
-              <a:t>Head de planejamento · BR · Latam · LRSA</a:t>
-            </a:r>
-            <a:endParaRPr lang="pt-BR" sz="1200" dirty="0"/>
-          </a:p>
-        </p:txBody>
-      </p:sp>
-      <p:sp>
-        <p:nvSpPr>
-          <p:cNvPr id="30" name="Shape 30"/>
-          <p:cNvSpPr/>
-          <p:nvPr/>
-        </p:nvSpPr>
-        <p:spPr>
-          <a:xfrm>
-            <a:off x="7907866" y="3049016"/>
-            <a:ext cx="3471333" cy="699516"/>
-          </a:xfrm>
-          <a:prstGeom prst="rect">
-            <a:avLst/>
-          </a:prstGeom>
-          <a:solidFill>
-            <a:srgbClr val="FFFFFF"/>
-          </a:solidFill>
-          <a:ln w="12700">
-            <a:solidFill>
-              <a:srgbClr val="E3E1DE"/>
-            </a:solidFill>
-            <a:prstDash val="solid"/>
-          </a:ln>
-        </p:spPr>
-      </p:sp>
-      <p:sp>
-        <p:nvSpPr>
-          <p:cNvPr id="31" name="Text 31"/>
-          <p:cNvSpPr txBox="1"/>
-          <p:nvPr/>
-        </p:nvSpPr>
-        <p:spPr>
-          <a:xfrm>
-            <a:off x="7907866" y="3049016"/>
-            <a:ext cx="3471333" cy="699516"/>
-          </a:xfrm>
-          <a:prstGeom prst="rect">
-            <a:avLst/>
-          </a:prstGeom>
-          <a:noFill/>
-          <a:ln/>
-        </p:spPr>
-        <p:txBody>
-          <a:bodyPr wrap="square" lIns="50800" tIns="76200" rIns="101600" bIns="50800" rtlCol="0" anchor="ctr"/>
-          <a:lstStyle/>
-          <a:p>
-            <a:pPr algn="l" indent="0" marL="0">
-              <a:spcAft>
-                <a:spcPts val="200"/>
-              </a:spcAft>
-              <a:buNone/>
-            </a:pPr>
-            <a:r>
-              <a:rPr lang="pt-BR" sz="1200" b="1" dirty="0">
-                <a:solidFill>
-                  <a:srgbClr val="141414"/>
-                </a:solidFill>
-                <a:latin typeface="Arial" pitchFamily="34" charset="0"/>
-                <a:ea typeface="Arial" pitchFamily="34" charset="-122"/>
-                <a:cs typeface="Arial" pitchFamily="34" charset="-120"/>
-              </a:rPr>
-              <a:t>ENIO XAVIER</a:t>
-            </a:r>
-            <a:endParaRPr lang="pt-BR" sz="1200" dirty="0"/>
-          </a:p>
-          <a:p>
-            <a:pPr algn="l" indent="0" marL="0">
-              <a:spcAft>
-                <a:spcPts val="200"/>
-              </a:spcAft>
-              <a:buNone/>
-            </a:pPr>
-            <a:r>
-              <a:rPr lang="pt-BR" sz="1200" dirty="0">
-                <a:solidFill>
-                  <a:srgbClr val="5E5E5E"/>
-                </a:solidFill>
-                <a:latin typeface="Arial" pitchFamily="34" charset="0"/>
-                <a:ea typeface="Arial" pitchFamily="34" charset="-122"/>
-                <a:cs typeface="Arial" pitchFamily="34" charset="-120"/>
-              </a:rPr>
-              <a:t>Executivo de planejamento · BR · Latam · LRSA</a:t>
-            </a:r>
-            <a:endParaRPr lang="pt-BR" sz="1200" dirty="0"/>
-          </a:p>
-        </p:txBody>
-      </p:sp>
-      <p:sp>
-        <p:nvSpPr>
-          <p:cNvPr id="32" name="Shape 32"/>
-          <p:cNvSpPr/>
-          <p:nvPr/>
-        </p:nvSpPr>
-        <p:spPr>
-          <a:xfrm>
-            <a:off x="7907866" y="3812032"/>
-            <a:ext cx="3471333" cy="699516"/>
-          </a:xfrm>
-          <a:prstGeom prst="rect">
-            <a:avLst/>
-          </a:prstGeom>
-          <a:solidFill>
-            <a:srgbClr val="FFFFFF"/>
-          </a:solidFill>
-          <a:ln w="12700">
-            <a:solidFill>
-              <a:srgbClr val="E3E1DE"/>
-            </a:solidFill>
-            <a:prstDash val="solid"/>
-          </a:ln>
-        </p:spPr>
-      </p:sp>
-      <p:sp>
-        <p:nvSpPr>
-          <p:cNvPr id="33" name="Text 33"/>
-          <p:cNvSpPr txBox="1"/>
-          <p:nvPr/>
-        </p:nvSpPr>
-        <p:spPr>
-          <a:xfrm>
-            <a:off x="7907866" y="3812032"/>
-            <a:ext cx="3471333" cy="699516"/>
-          </a:xfrm>
-          <a:prstGeom prst="rect">
-            <a:avLst/>
-          </a:prstGeom>
-          <a:noFill/>
-          <a:ln/>
-        </p:spPr>
-        <p:txBody>
-          <a:bodyPr wrap="square" lIns="50800" tIns="76200" rIns="101600" bIns="50800" rtlCol="0" anchor="ctr"/>
-          <a:lstStyle/>
-          <a:p>
-            <a:pPr algn="l" indent="0" marL="0">
-              <a:spcAft>
-                <a:spcPts val="200"/>
-              </a:spcAft>
-              <a:buNone/>
-            </a:pPr>
-            <a:r>
-              <a:rPr lang="pt-BR" sz="1200" b="1" dirty="0">
-                <a:solidFill>
-                  <a:srgbClr val="141414"/>
-                </a:solidFill>
-                <a:latin typeface="Arial" pitchFamily="34" charset="0"/>
-                <a:ea typeface="Arial" pitchFamily="34" charset="-122"/>
-                <a:cs typeface="Arial" pitchFamily="34" charset="-120"/>
-              </a:rPr>
-              <a:t>LUIZA MENEZES</a:t>
-            </a:r>
-            <a:endParaRPr lang="pt-BR" sz="1200" dirty="0"/>
-          </a:p>
-          <a:p>
-            <a:pPr algn="l" indent="0" marL="0">
-              <a:spcAft>
-                <a:spcPts val="200"/>
-              </a:spcAft>
-              <a:buNone/>
-            </a:pPr>
-            <a:r>
-              <a:rPr lang="pt-BR" sz="1200" dirty="0">
-                <a:solidFill>
-                  <a:srgbClr val="5E5E5E"/>
-                </a:solidFill>
-                <a:latin typeface="Arial" pitchFamily="34" charset="0"/>
-                <a:ea typeface="Arial" pitchFamily="34" charset="-122"/>
-                <a:cs typeface="Arial" pitchFamily="34" charset="-120"/>
-              </a:rPr>
-              <a:t>Assistente de planejamento · BR · Latam · LRSA</a:t>
-            </a:r>
-            <a:endParaRPr lang="pt-BR" sz="1200" dirty="0"/>
-          </a:p>
-        </p:txBody>
-      </p:sp>
-      <p:sp>
-        <p:nvSpPr>
-          <p:cNvPr id="34" name="Text 34"/>
-          <p:cNvSpPr txBox="1"/>
-          <p:nvPr/>
-        </p:nvSpPr>
-        <p:spPr>
-          <a:xfrm>
-            <a:off x="9474200" y="6311900"/>
-            <a:ext cx="1905000" cy="228600"/>
-          </a:xfrm>
-          <a:prstGeom prst="rect">
-            <a:avLst/>
-          </a:prstGeom>
-          <a:noFill/>
-          <a:ln/>
-        </p:spPr>
-        <p:txBody>
-          <a:bodyPr wrap="square" lIns="0" tIns="0" rIns="0" bIns="0" rtlCol="0" anchor="ctr"/>
-          <a:lstStyle/>
-          <a:p>
-            <a:pPr algn="l" indent="0" marL="0">
-              <a:buNone/>
-            </a:pPr>
-            <a:r>
-              <a:rPr lang="pt-BR" sz="1200" dirty="0">
-                <a:solidFill>
-                  <a:srgbClr val="141414"/>
-                </a:solidFill>
-                <a:latin typeface="Arial" pitchFamily="34" charset="0"/>
-                <a:ea typeface="Arial" pitchFamily="34" charset="-122"/>
-                <a:cs typeface="Arial" pitchFamily="34" charset="-120"/>
-              </a:rPr>
-              <a:t>Liderança (responde a)</a:t>
-            </a:r>
-            <a:endParaRPr lang="pt-BR" sz="1200" dirty="0"/>
-          </a:p>
-        </p:txBody>
-      </p:sp>
-      <p:sp>
-        <p:nvSpPr>
-          <p:cNvPr id="35" name="Shape 35"/>
-          <p:cNvSpPr/>
-          <p:nvPr/>
-        </p:nvSpPr>
-        <p:spPr>
-          <a:xfrm>
-            <a:off x="9042400" y="6426200"/>
-            <a:ext cx="355600" cy="0"/>
-          </a:xfrm>
-          <a:prstGeom prst="line">
-            <a:avLst/>
-          </a:prstGeom>
-          <a:noFill/>
-          <a:ln w="19050">
-            <a:solidFill>
-              <a:srgbClr val="141414"/>
-            </a:solidFill>
-            <a:prstDash val="solid"/>
-          </a:ln>
-        </p:spPr>
-      </p:sp>
-      <p:sp>
-        <p:nvSpPr>
-          <p:cNvPr id="36" name="Text 36"/>
+          <p:cNvPr id="35" name="Text 35"/>
           <p:cNvSpPr txBox="1"/>
           <p:nvPr/>
         </p:nvSpPr>
@@ -4568,7 +4414,7 @@
                 <a:ea typeface="Arial" pitchFamily="34" charset="-122"/>
                 <a:cs typeface="Arial" pitchFamily="34" charset="-120"/>
               </a:rPr>
-              <a:t>RENNER · MÍDIA E ANALYTICS</a:t>
+              <a:t>RENNER · PLANEJAMENTO</a:t>
             </a:r>
             <a:endParaRPr lang="en-US" sz="3200" dirty="0"/>
           </a:p>
@@ -4576,32 +4422,53 @@
       </p:sp>
       <p:sp>
         <p:nvSpPr>
-          <p:cNvPr id="5" name="Text 5"/>
-          <p:cNvSpPr txBox="1"/>
-          <p:nvPr/>
-        </p:nvSpPr>
-        <p:spPr>
-          <a:xfrm>
-            <a:off x="812800" y="1295400"/>
-            <a:ext cx="5207000" cy="419100"/>
-          </a:xfrm>
-          <a:prstGeom prst="rect">
-            <a:avLst/>
-          </a:prstGeom>
-          <a:solidFill>
-            <a:srgbClr val="7C2722"/>
-          </a:solidFill>
-          <a:ln/>
-        </p:spPr>
-        <p:txBody>
-          <a:bodyPr wrap="square" lIns="50800" tIns="50800" rIns="50800" bIns="50800" rtlCol="0" anchor="ctr"/>
+          <p:cNvPr id="5" name="Shape 5"/>
+          <p:cNvSpPr/>
+          <p:nvPr/>
+        </p:nvSpPr>
+        <p:spPr>
+          <a:xfrm>
+            <a:off x="4006215" y="1168400"/>
+            <a:ext cx="4179570" cy="558800"/>
+          </a:xfrm>
+          <a:prstGeom prst="rect">
+            <a:avLst/>
+          </a:prstGeom>
+          <a:solidFill>
+            <a:srgbClr val="EC6A3B"/>
+          </a:solidFill>
+          <a:ln/>
+        </p:spPr>
+      </p:sp>
+      <p:sp>
+        <p:nvSpPr>
+          <p:cNvPr id="6" name="Text 6"/>
+          <p:cNvSpPr txBox="1"/>
+          <p:nvPr/>
+        </p:nvSpPr>
+        <p:spPr>
+          <a:xfrm>
+            <a:off x="4006215" y="1168400"/>
+            <a:ext cx="4179570" cy="558800"/>
+          </a:xfrm>
+          <a:prstGeom prst="rect">
+            <a:avLst/>
+          </a:prstGeom>
+          <a:noFill/>
+          <a:ln/>
+        </p:spPr>
+        <p:txBody>
+          <a:bodyPr wrap="square" lIns="50800" tIns="76200" rIns="101600" bIns="50800" rtlCol="0" anchor="ctr"/>
           <a:lstStyle/>
           <a:p>
             <a:pPr algn="ctr" indent="0" marL="0">
-              <a:buNone/>
-            </a:pPr>
-            <a:r>
-              <a:rPr lang="pt-BR" sz="1600" b="1" dirty="0">
+              <a:spcAft>
+                <a:spcPts val="200"/>
+              </a:spcAft>
+              <a:buNone/>
+            </a:pPr>
+            <a:r>
+              <a:rPr lang="pt-BR" sz="1300" b="1" dirty="0">
                 <a:solidFill>
                   <a:srgbClr val="FFFFFF"/>
                 </a:solidFill>
@@ -4609,57 +4476,10 @@
                 <a:ea typeface="Arial" pitchFamily="34" charset="-122"/>
                 <a:cs typeface="Arial" pitchFamily="34" charset="-120"/>
               </a:rPr>
-              <a:t>MÍDIA</a:t>
-            </a:r>
-            <a:endParaRPr lang="pt-BR" sz="1600" dirty="0"/>
-          </a:p>
-        </p:txBody>
-      </p:sp>
-      <p:sp>
-        <p:nvSpPr>
-          <p:cNvPr id="6" name="Shape 6"/>
-          <p:cNvSpPr/>
-          <p:nvPr/>
-        </p:nvSpPr>
-        <p:spPr>
-          <a:xfrm>
-            <a:off x="812800" y="1790700"/>
-            <a:ext cx="5207000" cy="521208"/>
-          </a:xfrm>
-          <a:prstGeom prst="rect">
-            <a:avLst/>
-          </a:prstGeom>
-          <a:solidFill>
-            <a:srgbClr val="FFFFFF"/>
-          </a:solidFill>
-          <a:ln w="19050">
-            <a:solidFill>
-              <a:srgbClr val="7C2722"/>
-            </a:solidFill>
-            <a:prstDash val="solid"/>
-          </a:ln>
-        </p:spPr>
-      </p:sp>
-      <p:sp>
-        <p:nvSpPr>
-          <p:cNvPr id="7" name="Text 7"/>
-          <p:cNvSpPr txBox="1"/>
-          <p:nvPr/>
-        </p:nvSpPr>
-        <p:spPr>
-          <a:xfrm>
-            <a:off x="812800" y="1790700"/>
-            <a:ext cx="5207000" cy="521208"/>
-          </a:xfrm>
-          <a:prstGeom prst="rect">
-            <a:avLst/>
-          </a:prstGeom>
-          <a:noFill/>
-          <a:ln/>
-        </p:spPr>
-        <p:txBody>
-          <a:bodyPr wrap="square" lIns="50800" tIns="76200" rIns="101600" bIns="50800" rtlCol="0" anchor="ctr"/>
-          <a:lstStyle/>
+              <a:t>VP DE PLANEJAMENTO · EDUARDO FLORES</a:t>
+            </a:r>
+            <a:endParaRPr lang="pt-BR" sz="1300" dirty="0"/>
+          </a:p>
           <a:p>
             <a:pPr algn="ctr" indent="0" marL="0">
               <a:spcAft>
@@ -4668,50 +4488,30 @@
               <a:buNone/>
             </a:pPr>
             <a:r>
-              <a:rPr lang="pt-BR" sz="1200" b="1" dirty="0">
-                <a:solidFill>
-                  <a:srgbClr val="141414"/>
-                </a:solidFill>
-                <a:latin typeface="Arial" pitchFamily="34" charset="0"/>
-                <a:ea typeface="Arial" pitchFamily="34" charset="-122"/>
-                <a:cs typeface="Arial" pitchFamily="34" charset="-120"/>
-              </a:rPr>
-              <a:t>SIMONE MAGON</a:t>
-            </a:r>
-            <a:endParaRPr lang="pt-BR" sz="1200" dirty="0"/>
-          </a:p>
-          <a:p>
-            <a:pPr algn="ctr" indent="0" marL="0">
-              <a:spcAft>
-                <a:spcPts val="200"/>
-              </a:spcAft>
-              <a:buNone/>
-            </a:pPr>
-            <a:r>
               <a:rPr lang="pt-BR" sz="1200" dirty="0">
                 <a:solidFill>
-                  <a:srgbClr val="5E5E5E"/>
-                </a:solidFill>
-                <a:latin typeface="Arial" pitchFamily="34" charset="0"/>
-                <a:ea typeface="Arial" pitchFamily="34" charset="-122"/>
-                <a:cs typeface="Arial" pitchFamily="34" charset="-120"/>
-              </a:rPr>
-              <a:t>Diretora de mídia · BR · Latam · LRSA</a:t>
-            </a:r>
-            <a:endParaRPr lang="pt-BR" sz="1200" dirty="0"/>
-          </a:p>
-        </p:txBody>
-      </p:sp>
-      <p:sp>
-        <p:nvSpPr>
-          <p:cNvPr id="8" name="Shape 8"/>
-          <p:cNvSpPr/>
-          <p:nvPr/>
-        </p:nvSpPr>
-        <p:spPr>
-          <a:xfrm>
-            <a:off x="3416300" y="2311908"/>
-            <a:ext cx="0" cy="152400"/>
+                  <a:srgbClr val="FFFFFF"/>
+                </a:solidFill>
+                <a:latin typeface="Arial" pitchFamily="34" charset="0"/>
+                <a:ea typeface="Arial" pitchFamily="34" charset="-122"/>
+                <a:cs typeface="Arial" pitchFamily="34" charset="-120"/>
+              </a:rPr>
+              <a:t>Renner BR · Renner Latam · LRSA</a:t>
+            </a:r>
+            <a:endParaRPr lang="pt-BR" sz="1200" dirty="0"/>
+          </a:p>
+        </p:txBody>
+      </p:sp>
+      <p:sp>
+        <p:nvSpPr>
+          <p:cNvPr id="7" name="Shape 7"/>
+          <p:cNvSpPr/>
+          <p:nvPr/>
+        </p:nvSpPr>
+        <p:spPr>
+          <a:xfrm>
+            <a:off x="6096000" y="1727200"/>
+            <a:ext cx="0" cy="101600"/>
           </a:xfrm>
           <a:prstGeom prst="line">
             <a:avLst/>
@@ -4727,24 +4527,104 @@
       </p:sp>
       <p:sp>
         <p:nvSpPr>
-          <p:cNvPr id="9" name="Shape 9"/>
-          <p:cNvSpPr/>
-          <p:nvPr/>
-        </p:nvSpPr>
-        <p:spPr>
-          <a:xfrm>
-            <a:off x="812800" y="2464308"/>
-            <a:ext cx="5207000" cy="521208"/>
-          </a:xfrm>
-          <a:prstGeom prst="rect">
-            <a:avLst/>
-          </a:prstGeom>
-          <a:solidFill>
-            <a:srgbClr val="FFFFFF"/>
-          </a:solidFill>
+          <p:cNvPr id="8" name="Shape 8"/>
+          <p:cNvSpPr/>
+          <p:nvPr/>
+        </p:nvSpPr>
+        <p:spPr>
+          <a:xfrm>
+            <a:off x="4328160" y="1828800"/>
+            <a:ext cx="3535680" cy="558800"/>
+          </a:xfrm>
+          <a:prstGeom prst="rect">
+            <a:avLst/>
+          </a:prstGeom>
+          <a:solidFill>
+            <a:srgbClr val="EFEEEC"/>
+          </a:solidFill>
+          <a:ln/>
+        </p:spPr>
+      </p:sp>
+      <p:sp>
+        <p:nvSpPr>
+          <p:cNvPr id="9" name="Text 9"/>
+          <p:cNvSpPr txBox="1"/>
+          <p:nvPr/>
+        </p:nvSpPr>
+        <p:spPr>
+          <a:xfrm>
+            <a:off x="4328160" y="1828800"/>
+            <a:ext cx="3535680" cy="558800"/>
+          </a:xfrm>
+          <a:prstGeom prst="rect">
+            <a:avLst/>
+          </a:prstGeom>
+          <a:noFill/>
+          <a:ln/>
+        </p:spPr>
+        <p:txBody>
+          <a:bodyPr wrap="square" lIns="50800" tIns="76200" rIns="101600" bIns="50800" rtlCol="0" anchor="ctr"/>
+          <a:lstStyle/>
+          <a:p>
+            <a:pPr algn="ctr" indent="0" marL="0">
+              <a:spcAft>
+                <a:spcPts val="200"/>
+              </a:spcAft>
+              <a:buNone/>
+            </a:pPr>
+            <a:r>
+              <a:rPr lang="pt-BR" sz="1300" b="1" dirty="0">
+                <a:solidFill>
+                  <a:srgbClr val="141414"/>
+                </a:solidFill>
+                <a:latin typeface="Arial" pitchFamily="34" charset="0"/>
+                <a:ea typeface="Arial" pitchFamily="34" charset="-122"/>
+                <a:cs typeface="Arial" pitchFamily="34" charset="-120"/>
+              </a:rPr>
+              <a:t>PAOLA PASCOALE</a:t>
+            </a:r>
+            <a:endParaRPr lang="pt-BR" sz="1300" dirty="0"/>
+          </a:p>
+          <a:p>
+            <a:pPr algn="ctr" indent="0" marL="0">
+              <a:spcAft>
+                <a:spcPts val="200"/>
+              </a:spcAft>
+              <a:buNone/>
+            </a:pPr>
+            <a:r>
+              <a:rPr lang="pt-BR" sz="1200" dirty="0">
+                <a:solidFill>
+                  <a:srgbClr val="5E5E5E"/>
+                </a:solidFill>
+                <a:latin typeface="Arial" pitchFamily="34" charset="0"/>
+                <a:ea typeface="Arial" pitchFamily="34" charset="-122"/>
+                <a:cs typeface="Arial" pitchFamily="34" charset="-120"/>
+              </a:rPr>
+              <a:t>Head de planejamento · BR · Latam · LRSA</a:t>
+            </a:r>
+            <a:endParaRPr lang="pt-BR" sz="1200" dirty="0"/>
+          </a:p>
+        </p:txBody>
+      </p:sp>
+      <p:sp>
+        <p:nvSpPr>
+          <p:cNvPr id="10" name="Shape 10"/>
+          <p:cNvSpPr/>
+          <p:nvPr/>
+        </p:nvSpPr>
+        <p:spPr>
+          <a:xfrm>
+            <a:off x="6096000" y="2387600"/>
+            <a:ext cx="0" cy="127000"/>
+          </a:xfrm>
+          <a:prstGeom prst="line">
+            <a:avLst/>
+          </a:prstGeom>
+          <a:noFill/>
           <a:ln w="19050">
             <a:solidFill>
-              <a:srgbClr val="7C2722"/>
+              <a:srgbClr val="141414"/>
             </a:solidFill>
             <a:prstDash val="solid"/>
           </a:ln>
@@ -4752,76 +4632,101 @@
       </p:sp>
       <p:sp>
         <p:nvSpPr>
-          <p:cNvPr id="10" name="Text 10"/>
-          <p:cNvSpPr txBox="1"/>
-          <p:nvPr/>
-        </p:nvSpPr>
-        <p:spPr>
-          <a:xfrm>
-            <a:off x="812800" y="2464308"/>
-            <a:ext cx="5207000" cy="521208"/>
-          </a:xfrm>
-          <a:prstGeom prst="rect">
-            <a:avLst/>
-          </a:prstGeom>
-          <a:noFill/>
-          <a:ln/>
-        </p:spPr>
-        <p:txBody>
-          <a:bodyPr wrap="square" lIns="50800" tIns="76200" rIns="101600" bIns="50800" rtlCol="0" anchor="ctr"/>
+          <p:cNvPr id="11" name="Shape 11"/>
+          <p:cNvSpPr/>
+          <p:nvPr/>
+        </p:nvSpPr>
+        <p:spPr>
+          <a:xfrm>
+            <a:off x="6096000" y="2514600"/>
+            <a:ext cx="0" cy="0"/>
+          </a:xfrm>
+          <a:prstGeom prst="line">
+            <a:avLst/>
+          </a:prstGeom>
+          <a:noFill/>
+          <a:ln w="19050">
+            <a:solidFill>
+              <a:srgbClr val="141414"/>
+            </a:solidFill>
+            <a:prstDash val="solid"/>
+          </a:ln>
+        </p:spPr>
+      </p:sp>
+      <p:sp>
+        <p:nvSpPr>
+          <p:cNvPr id="12" name="Shape 12"/>
+          <p:cNvSpPr/>
+          <p:nvPr/>
+        </p:nvSpPr>
+        <p:spPr>
+          <a:xfrm>
+            <a:off x="6096000" y="2514600"/>
+            <a:ext cx="0" cy="127000"/>
+          </a:xfrm>
+          <a:prstGeom prst="line">
+            <a:avLst/>
+          </a:prstGeom>
+          <a:noFill/>
+          <a:ln w="19050">
+            <a:solidFill>
+              <a:srgbClr val="141414"/>
+            </a:solidFill>
+            <a:prstDash val="solid"/>
+          </a:ln>
+        </p:spPr>
+      </p:sp>
+      <p:sp>
+        <p:nvSpPr>
+          <p:cNvPr id="13" name="Text 13"/>
+          <p:cNvSpPr txBox="1"/>
+          <p:nvPr/>
+        </p:nvSpPr>
+        <p:spPr>
+          <a:xfrm>
+            <a:off x="2926080" y="2641600"/>
+            <a:ext cx="6339840" cy="419100"/>
+          </a:xfrm>
+          <a:prstGeom prst="rect">
+            <a:avLst/>
+          </a:prstGeom>
+          <a:solidFill>
+            <a:srgbClr val="B8393A"/>
+          </a:solidFill>
+          <a:ln/>
+        </p:spPr>
+        <p:txBody>
+          <a:bodyPr wrap="square" lIns="50800" tIns="50800" rIns="50800" bIns="50800" rtlCol="0" anchor="ctr"/>
           <a:lstStyle/>
           <a:p>
             <a:pPr algn="ctr" indent="0" marL="0">
-              <a:spcAft>
-                <a:spcPts val="200"/>
-              </a:spcAft>
-              <a:buNone/>
-            </a:pPr>
-            <a:r>
-              <a:rPr lang="pt-BR" sz="1200" b="1" dirty="0">
-                <a:solidFill>
-                  <a:srgbClr val="141414"/>
-                </a:solidFill>
-                <a:latin typeface="Arial" pitchFamily="34" charset="0"/>
-                <a:ea typeface="Arial" pitchFamily="34" charset="-122"/>
-                <a:cs typeface="Arial" pitchFamily="34" charset="-120"/>
-              </a:rPr>
-              <a:t>PALOMA KUSSLER</a:t>
-            </a:r>
-            <a:endParaRPr lang="pt-BR" sz="1200" dirty="0"/>
-          </a:p>
-          <a:p>
-            <a:pPr algn="ctr" indent="0" marL="0">
-              <a:spcAft>
-                <a:spcPts val="200"/>
-              </a:spcAft>
-              <a:buNone/>
-            </a:pPr>
-            <a:r>
-              <a:rPr lang="pt-BR" sz="1200" dirty="0">
-                <a:solidFill>
-                  <a:srgbClr val="5E5E5E"/>
-                </a:solidFill>
-                <a:latin typeface="Arial" pitchFamily="34" charset="0"/>
-                <a:ea typeface="Arial" pitchFamily="34" charset="-122"/>
-                <a:cs typeface="Arial" pitchFamily="34" charset="-120"/>
-              </a:rPr>
-              <a:t>Head de mídia · toda a frente digital</a:t>
-            </a:r>
-            <a:endParaRPr lang="pt-BR" sz="1200" dirty="0"/>
-          </a:p>
-        </p:txBody>
-      </p:sp>
-      <p:sp>
-        <p:nvSpPr>
-          <p:cNvPr id="11" name="Shape 11"/>
-          <p:cNvSpPr/>
-          <p:nvPr/>
-        </p:nvSpPr>
-        <p:spPr>
-          <a:xfrm>
-            <a:off x="812800" y="3049016"/>
-            <a:ext cx="2565400" cy="521208"/>
+              <a:buNone/>
+            </a:pPr>
+            <a:r>
+              <a:rPr lang="pt-BR" sz="1600" b="1" dirty="0">
+                <a:solidFill>
+                  <a:srgbClr val="FFFFFF"/>
+                </a:solidFill>
+                <a:latin typeface="Arial" pitchFamily="34" charset="0"/>
+                <a:ea typeface="Arial" pitchFamily="34" charset="-122"/>
+                <a:cs typeface="Arial" pitchFamily="34" charset="-120"/>
+              </a:rPr>
+              <a:t>PLANEJAMENTO</a:t>
+            </a:r>
+            <a:endParaRPr lang="pt-BR" sz="1600" dirty="0"/>
+          </a:p>
+        </p:txBody>
+      </p:sp>
+      <p:sp>
+        <p:nvSpPr>
+          <p:cNvPr id="14" name="Shape 14"/>
+          <p:cNvSpPr/>
+          <p:nvPr/>
+        </p:nvSpPr>
+        <p:spPr>
+          <a:xfrm>
+            <a:off x="2926080" y="3136900"/>
+            <a:ext cx="3131820" cy="699516"/>
           </a:xfrm>
           <a:prstGeom prst="rect">
             <a:avLst/>
@@ -4839,14 +4744,14 @@
       </p:sp>
       <p:sp>
         <p:nvSpPr>
-          <p:cNvPr id="12" name="Text 12"/>
-          <p:cNvSpPr txBox="1"/>
-          <p:nvPr/>
-        </p:nvSpPr>
-        <p:spPr>
-          <a:xfrm>
-            <a:off x="812800" y="3049016"/>
-            <a:ext cx="2565400" cy="521208"/>
+          <p:cNvPr id="15" name="Text 15"/>
+          <p:cNvSpPr txBox="1"/>
+          <p:nvPr/>
+        </p:nvSpPr>
+        <p:spPr>
+          <a:xfrm>
+            <a:off x="2926080" y="3136900"/>
+            <a:ext cx="3131820" cy="699516"/>
           </a:xfrm>
           <a:prstGeom prst="rect">
             <a:avLst/>
@@ -4873,7 +4778,7 @@
                 <a:ea typeface="Arial" pitchFamily="34" charset="-122"/>
                 <a:cs typeface="Arial" pitchFamily="34" charset="-120"/>
               </a:rPr>
-              <a:t>LEANDRO FREITAS</a:t>
+              <a:t>ENIO XAVIER</a:t>
             </a:r>
             <a:endParaRPr lang="pt-BR" sz="1200" dirty="0"/>
           </a:p>
@@ -4893,22 +4798,22 @@
                 <a:ea typeface="Arial" pitchFamily="34" charset="-122"/>
                 <a:cs typeface="Arial" pitchFamily="34" charset="-120"/>
               </a:rPr>
-              <a:t>Planejador de mídia · BR</a:t>
-            </a:r>
-            <a:endParaRPr lang="pt-BR" sz="1200" dirty="0"/>
-          </a:p>
-        </p:txBody>
-      </p:sp>
-      <p:sp>
-        <p:nvSpPr>
-          <p:cNvPr id="13" name="Shape 13"/>
-          <p:cNvSpPr/>
-          <p:nvPr/>
-        </p:nvSpPr>
-        <p:spPr>
-          <a:xfrm>
-            <a:off x="3454400" y="3049016"/>
-            <a:ext cx="2565400" cy="521208"/>
+              <a:t>Executivo de planejamento · BR · Latam · LRSA</a:t>
+            </a:r>
+            <a:endParaRPr lang="pt-BR" sz="1200" dirty="0"/>
+          </a:p>
+        </p:txBody>
+      </p:sp>
+      <p:sp>
+        <p:nvSpPr>
+          <p:cNvPr id="16" name="Shape 16"/>
+          <p:cNvSpPr/>
+          <p:nvPr/>
+        </p:nvSpPr>
+        <p:spPr>
+          <a:xfrm>
+            <a:off x="6134100" y="3136900"/>
+            <a:ext cx="3131820" cy="699516"/>
           </a:xfrm>
           <a:prstGeom prst="rect">
             <a:avLst/>
@@ -4926,14 +4831,14 @@
       </p:sp>
       <p:sp>
         <p:nvSpPr>
-          <p:cNvPr id="14" name="Text 14"/>
-          <p:cNvSpPr txBox="1"/>
-          <p:nvPr/>
-        </p:nvSpPr>
-        <p:spPr>
-          <a:xfrm>
-            <a:off x="3454400" y="3049016"/>
-            <a:ext cx="2565400" cy="521208"/>
+          <p:cNvPr id="17" name="Text 17"/>
+          <p:cNvSpPr txBox="1"/>
+          <p:nvPr/>
+        </p:nvSpPr>
+        <p:spPr>
+          <a:xfrm>
+            <a:off x="6134100" y="3136900"/>
+            <a:ext cx="3131820" cy="699516"/>
           </a:xfrm>
           <a:prstGeom prst="rect">
             <a:avLst/>
@@ -4960,7 +4865,7 @@
                 <a:ea typeface="Arial" pitchFamily="34" charset="-122"/>
                 <a:cs typeface="Arial" pitchFamily="34" charset="-120"/>
               </a:rPr>
-              <a:t>GABRIEL SOARES</a:t>
+              <a:t>LUIZA MENEZES</a:t>
             </a:r>
             <a:endParaRPr lang="pt-BR" sz="1200" dirty="0"/>
           </a:p>
@@ -4980,66 +4885,38 @@
                 <a:ea typeface="Arial" pitchFamily="34" charset="-122"/>
                 <a:cs typeface="Arial" pitchFamily="34" charset="-120"/>
               </a:rPr>
-              <a:t>Planejador de mídia · BR</a:t>
-            </a:r>
-            <a:endParaRPr lang="pt-BR" sz="1200" dirty="0"/>
-          </a:p>
-        </p:txBody>
-      </p:sp>
-      <p:sp>
-        <p:nvSpPr>
-          <p:cNvPr id="15" name="Shape 15"/>
-          <p:cNvSpPr/>
-          <p:nvPr/>
-        </p:nvSpPr>
-        <p:spPr>
-          <a:xfrm>
-            <a:off x="812800" y="3633724"/>
-            <a:ext cx="2565400" cy="699516"/>
-          </a:xfrm>
-          <a:prstGeom prst="rect">
-            <a:avLst/>
-          </a:prstGeom>
-          <a:solidFill>
-            <a:srgbClr val="FFFFFF"/>
-          </a:solidFill>
-          <a:ln w="12700">
-            <a:solidFill>
-              <a:srgbClr val="E3E1DE"/>
-            </a:solidFill>
-            <a:prstDash val="solid"/>
-          </a:ln>
-        </p:spPr>
-      </p:sp>
-      <p:sp>
-        <p:nvSpPr>
-          <p:cNvPr id="16" name="Text 16"/>
-          <p:cNvSpPr txBox="1"/>
-          <p:nvPr/>
-        </p:nvSpPr>
-        <p:spPr>
-          <a:xfrm>
-            <a:off x="812800" y="3633724"/>
-            <a:ext cx="2565400" cy="699516"/>
-          </a:xfrm>
-          <a:prstGeom prst="rect">
-            <a:avLst/>
-          </a:prstGeom>
-          <a:noFill/>
-          <a:ln/>
-        </p:spPr>
-        <p:txBody>
-          <a:bodyPr wrap="square" lIns="50800" tIns="76200" rIns="101600" bIns="50800" rtlCol="0" anchor="ctr"/>
-          <a:lstStyle/>
-          <a:p>
-            <a:pPr algn="l" indent="0" marL="0">
-              <a:spcAft>
-                <a:spcPts val="200"/>
-              </a:spcAft>
-              <a:buNone/>
-            </a:pPr>
-            <a:r>
-              <a:rPr lang="pt-BR" sz="1200" b="1" dirty="0">
+              <a:t>Assistente de planejamento · BR · Latam · LRSA</a:t>
+            </a:r>
+            <a:endParaRPr lang="pt-BR" sz="1200" dirty="0"/>
+          </a:p>
+        </p:txBody>
+      </p:sp>
+      <p:sp>
+        <p:nvSpPr>
+          <p:cNvPr id="18" name="Text 18"/>
+          <p:cNvSpPr txBox="1"/>
+          <p:nvPr/>
+        </p:nvSpPr>
+        <p:spPr>
+          <a:xfrm>
+            <a:off x="9474200" y="6311900"/>
+            <a:ext cx="1905000" cy="228600"/>
+          </a:xfrm>
+          <a:prstGeom prst="rect">
+            <a:avLst/>
+          </a:prstGeom>
+          <a:noFill/>
+          <a:ln/>
+        </p:spPr>
+        <p:txBody>
+          <a:bodyPr wrap="square" lIns="0" tIns="0" rIns="0" bIns="0" rtlCol="0" anchor="ctr"/>
+          <a:lstStyle/>
+          <a:p>
+            <a:pPr algn="l" indent="0" marL="0">
+              <a:buNone/>
+            </a:pPr>
+            <a:r>
+              <a:rPr lang="pt-BR" sz="1200" dirty="0">
                 <a:solidFill>
                   <a:srgbClr val="141414"/>
                 </a:solidFill>
@@ -5047,114 +4924,7 @@
                 <a:ea typeface="Arial" pitchFamily="34" charset="-122"/>
                 <a:cs typeface="Arial" pitchFamily="34" charset="-120"/>
               </a:rPr>
-              <a:t>JULYE ALMEIDA</a:t>
-            </a:r>
-            <a:endParaRPr lang="pt-BR" sz="1200" dirty="0"/>
-          </a:p>
-          <a:p>
-            <a:pPr algn="l" indent="0" marL="0">
-              <a:spcAft>
-                <a:spcPts val="200"/>
-              </a:spcAft>
-              <a:buNone/>
-            </a:pPr>
-            <a:r>
-              <a:rPr lang="pt-BR" sz="1200" dirty="0">
-                <a:solidFill>
-                  <a:srgbClr val="5E5E5E"/>
-                </a:solidFill>
-                <a:latin typeface="Arial" pitchFamily="34" charset="0"/>
-                <a:ea typeface="Arial" pitchFamily="34" charset="-122"/>
-                <a:cs typeface="Arial" pitchFamily="34" charset="-120"/>
-              </a:rPr>
-              <a:t>Planejadora de mídia · BR</a:t>
-            </a:r>
-            <a:endParaRPr lang="pt-BR" sz="1200" dirty="0"/>
-          </a:p>
-        </p:txBody>
-      </p:sp>
-      <p:sp>
-        <p:nvSpPr>
-          <p:cNvPr id="17" name="Shape 17"/>
-          <p:cNvSpPr/>
-          <p:nvPr/>
-        </p:nvSpPr>
-        <p:spPr>
-          <a:xfrm>
-            <a:off x="3454400" y="3633724"/>
-            <a:ext cx="2565400" cy="699516"/>
-          </a:xfrm>
-          <a:prstGeom prst="rect">
-            <a:avLst/>
-          </a:prstGeom>
-          <a:solidFill>
-            <a:srgbClr val="FFFFFF"/>
-          </a:solidFill>
-          <a:ln w="12700">
-            <a:solidFill>
-              <a:srgbClr val="E3E1DE"/>
-            </a:solidFill>
-            <a:prstDash val="solid"/>
-          </a:ln>
-        </p:spPr>
-      </p:sp>
-      <p:sp>
-        <p:nvSpPr>
-          <p:cNvPr id="18" name="Text 18"/>
-          <p:cNvSpPr txBox="1"/>
-          <p:nvPr/>
-        </p:nvSpPr>
-        <p:spPr>
-          <a:xfrm>
-            <a:off x="3454400" y="3633724"/>
-            <a:ext cx="2565400" cy="699516"/>
-          </a:xfrm>
-          <a:prstGeom prst="rect">
-            <a:avLst/>
-          </a:prstGeom>
-          <a:noFill/>
-          <a:ln/>
-        </p:spPr>
-        <p:txBody>
-          <a:bodyPr wrap="square" lIns="50800" tIns="76200" rIns="101600" bIns="50800" rtlCol="0" anchor="ctr"/>
-          <a:lstStyle/>
-          <a:p>
-            <a:pPr algn="l" indent="0" marL="0">
-              <a:spcAft>
-                <a:spcPts val="200"/>
-              </a:spcAft>
-              <a:buNone/>
-            </a:pPr>
-            <a:r>
-              <a:rPr lang="pt-BR" sz="1200" b="1" dirty="0">
-                <a:solidFill>
-                  <a:srgbClr val="141414"/>
-                </a:solidFill>
-                <a:latin typeface="Arial" pitchFamily="34" charset="0"/>
-                <a:ea typeface="Arial" pitchFamily="34" charset="-122"/>
-                <a:cs typeface="Arial" pitchFamily="34" charset="-120"/>
-              </a:rPr>
-              <a:t>FERNANDA AZEVEDO</a:t>
-            </a:r>
-            <a:endParaRPr lang="pt-BR" sz="1200" dirty="0"/>
-          </a:p>
-          <a:p>
-            <a:pPr algn="l" indent="0" marL="0">
-              <a:spcAft>
-                <a:spcPts val="200"/>
-              </a:spcAft>
-              <a:buNone/>
-            </a:pPr>
-            <a:r>
-              <a:rPr lang="pt-BR" sz="1200" dirty="0">
-                <a:solidFill>
-                  <a:srgbClr val="5E5E5E"/>
-                </a:solidFill>
-                <a:latin typeface="Arial" pitchFamily="34" charset="0"/>
-                <a:ea typeface="Arial" pitchFamily="34" charset="-122"/>
-                <a:cs typeface="Arial" pitchFamily="34" charset="-120"/>
-              </a:rPr>
-              <a:t>Planejadora de mídia · BR · Latam</a:t>
+              <a:t>Liderança (responde a)</a:t>
             </a:r>
             <a:endParaRPr lang="pt-BR" sz="1200" dirty="0"/>
           </a:p>
@@ -5168,143 +4938,13 @@
         </p:nvSpPr>
         <p:spPr>
           <a:xfrm>
-            <a:off x="812800" y="4396740"/>
-            <a:ext cx="2565400" cy="699516"/>
-          </a:xfrm>
-          <a:prstGeom prst="rect">
-            <a:avLst/>
-          </a:prstGeom>
-          <a:solidFill>
-            <a:srgbClr val="FFFFFF"/>
-          </a:solidFill>
-          <a:ln w="12700">
-            <a:solidFill>
-              <a:srgbClr val="E3E1DE"/>
-            </a:solidFill>
-            <a:prstDash val="solid"/>
-          </a:ln>
-        </p:spPr>
-      </p:sp>
-      <p:sp>
-        <p:nvSpPr>
-          <p:cNvPr id="20" name="Text 20"/>
-          <p:cNvSpPr txBox="1"/>
-          <p:nvPr/>
-        </p:nvSpPr>
-        <p:spPr>
-          <a:xfrm>
-            <a:off x="812800" y="4396740"/>
-            <a:ext cx="2565400" cy="699516"/>
-          </a:xfrm>
-          <a:prstGeom prst="rect">
-            <a:avLst/>
-          </a:prstGeom>
-          <a:noFill/>
-          <a:ln/>
-        </p:spPr>
-        <p:txBody>
-          <a:bodyPr wrap="square" lIns="50800" tIns="76200" rIns="101600" bIns="50800" rtlCol="0" anchor="ctr"/>
-          <a:lstStyle/>
-          <a:p>
-            <a:pPr algn="l" indent="0" marL="0">
-              <a:spcAft>
-                <a:spcPts val="200"/>
-              </a:spcAft>
-              <a:buNone/>
-            </a:pPr>
-            <a:r>
-              <a:rPr lang="pt-BR" sz="1200" b="1" dirty="0">
-                <a:solidFill>
-                  <a:srgbClr val="141414"/>
-                </a:solidFill>
-                <a:latin typeface="Arial" pitchFamily="34" charset="0"/>
-                <a:ea typeface="Arial" pitchFamily="34" charset="-122"/>
-                <a:cs typeface="Arial" pitchFamily="34" charset="-120"/>
-              </a:rPr>
-              <a:t>CARLA AZEVEDO</a:t>
-            </a:r>
-            <a:endParaRPr lang="pt-BR" sz="1200" dirty="0"/>
-          </a:p>
-          <a:p>
-            <a:pPr algn="l" indent="0" marL="0">
-              <a:spcAft>
-                <a:spcPts val="200"/>
-              </a:spcAft>
-              <a:buNone/>
-            </a:pPr>
-            <a:r>
-              <a:rPr lang="pt-BR" sz="1200" dirty="0">
-                <a:solidFill>
-                  <a:srgbClr val="5E5E5E"/>
-                </a:solidFill>
-                <a:latin typeface="Arial" pitchFamily="34" charset="0"/>
-                <a:ea typeface="Arial" pitchFamily="34" charset="-122"/>
-                <a:cs typeface="Arial" pitchFamily="34" charset="-120"/>
-              </a:rPr>
-              <a:t>Planejadora de mídia · toda a frente offline</a:t>
-            </a:r>
-            <a:endParaRPr lang="pt-BR" sz="1200" dirty="0"/>
-          </a:p>
-        </p:txBody>
-      </p:sp>
-      <p:sp>
-        <p:nvSpPr>
-          <p:cNvPr id="21" name="Text 21"/>
-          <p:cNvSpPr txBox="1"/>
-          <p:nvPr/>
-        </p:nvSpPr>
-        <p:spPr>
-          <a:xfrm>
-            <a:off x="6172200" y="1295400"/>
-            <a:ext cx="5207000" cy="419100"/>
-          </a:xfrm>
-          <a:prstGeom prst="rect">
-            <a:avLst/>
-          </a:prstGeom>
-          <a:solidFill>
-            <a:srgbClr val="141414"/>
-          </a:solidFill>
-          <a:ln/>
-        </p:spPr>
-        <p:txBody>
-          <a:bodyPr wrap="square" lIns="50800" tIns="50800" rIns="50800" bIns="50800" rtlCol="0" anchor="ctr"/>
-          <a:lstStyle/>
-          <a:p>
-            <a:pPr algn="ctr" indent="0" marL="0">
-              <a:buNone/>
-            </a:pPr>
-            <a:r>
-              <a:rPr lang="pt-BR" sz="1600" b="1" dirty="0">
-                <a:solidFill>
-                  <a:srgbClr val="FFFFFF"/>
-                </a:solidFill>
-                <a:latin typeface="Arial" pitchFamily="34" charset="0"/>
-                <a:ea typeface="Arial" pitchFamily="34" charset="-122"/>
-                <a:cs typeface="Arial" pitchFamily="34" charset="-120"/>
-              </a:rPr>
-              <a:t>ANALYTICS E CRM</a:t>
-            </a:r>
-            <a:endParaRPr lang="pt-BR" sz="1600" dirty="0"/>
-          </a:p>
-        </p:txBody>
-      </p:sp>
-      <p:sp>
-        <p:nvSpPr>
-          <p:cNvPr id="22" name="Shape 22"/>
-          <p:cNvSpPr/>
-          <p:nvPr/>
-        </p:nvSpPr>
-        <p:spPr>
-          <a:xfrm>
-            <a:off x="6172200" y="1790700"/>
-            <a:ext cx="5207000" cy="521208"/>
-          </a:xfrm>
-          <a:prstGeom prst="rect">
-            <a:avLst/>
-          </a:prstGeom>
-          <a:solidFill>
-            <a:srgbClr val="FFFFFF"/>
-          </a:solidFill>
+            <a:off x="9042400" y="6426200"/>
+            <a:ext cx="355600" cy="0"/>
+          </a:xfrm>
+          <a:prstGeom prst="line">
+            <a:avLst/>
+          </a:prstGeom>
+          <a:noFill/>
           <a:ln w="19050">
             <a:solidFill>
               <a:srgbClr val="141414"/>
@@ -5315,873 +4955,7 @@
       </p:sp>
       <p:sp>
         <p:nvSpPr>
-          <p:cNvPr id="23" name="Text 23"/>
-          <p:cNvSpPr txBox="1"/>
-          <p:nvPr/>
-        </p:nvSpPr>
-        <p:spPr>
-          <a:xfrm>
-            <a:off x="6172200" y="1790700"/>
-            <a:ext cx="5207000" cy="521208"/>
-          </a:xfrm>
-          <a:prstGeom prst="rect">
-            <a:avLst/>
-          </a:prstGeom>
-          <a:noFill/>
-          <a:ln/>
-        </p:spPr>
-        <p:txBody>
-          <a:bodyPr wrap="square" lIns="50800" tIns="76200" rIns="101600" bIns="50800" rtlCol="0" anchor="ctr"/>
-          <a:lstStyle/>
-          <a:p>
-            <a:pPr algn="ctr" indent="0" marL="0">
-              <a:spcAft>
-                <a:spcPts val="200"/>
-              </a:spcAft>
-              <a:buNone/>
-            </a:pPr>
-            <a:r>
-              <a:rPr lang="pt-BR" sz="1200" b="1" dirty="0">
-                <a:solidFill>
-                  <a:srgbClr val="141414"/>
-                </a:solidFill>
-                <a:latin typeface="Arial" pitchFamily="34" charset="0"/>
-                <a:ea typeface="Arial" pitchFamily="34" charset="-122"/>
-                <a:cs typeface="Arial" pitchFamily="34" charset="-120"/>
-              </a:rPr>
-              <a:t>LUCAS DINIZ</a:t>
-            </a:r>
-            <a:endParaRPr lang="pt-BR" sz="1200" dirty="0"/>
-          </a:p>
-          <a:p>
-            <a:pPr algn="ctr" indent="0" marL="0">
-              <a:spcAft>
-                <a:spcPts val="200"/>
-              </a:spcAft>
-              <a:buNone/>
-            </a:pPr>
-            <a:r>
-              <a:rPr lang="pt-BR" sz="1200" dirty="0">
-                <a:solidFill>
-                  <a:srgbClr val="5E5E5E"/>
-                </a:solidFill>
-                <a:latin typeface="Arial" pitchFamily="34" charset="0"/>
-                <a:ea typeface="Arial" pitchFamily="34" charset="-122"/>
-                <a:cs typeface="Arial" pitchFamily="34" charset="-120"/>
-              </a:rPr>
-              <a:t>Diretor de analytics e CRM · BR · Latam · LRSA</a:t>
-            </a:r>
-            <a:endParaRPr lang="pt-BR" sz="1200" dirty="0"/>
-          </a:p>
-        </p:txBody>
-      </p:sp>
-      <p:sp>
-        <p:nvSpPr>
-          <p:cNvPr id="24" name="Shape 24"/>
-          <p:cNvSpPr/>
-          <p:nvPr/>
-        </p:nvSpPr>
-        <p:spPr>
-          <a:xfrm>
-            <a:off x="8775700" y="2311908"/>
-            <a:ext cx="0" cy="152400"/>
-          </a:xfrm>
-          <a:prstGeom prst="line">
-            <a:avLst/>
-          </a:prstGeom>
-          <a:noFill/>
-          <a:ln w="19050">
-            <a:solidFill>
-              <a:srgbClr val="141414"/>
-            </a:solidFill>
-            <a:prstDash val="solid"/>
-          </a:ln>
-        </p:spPr>
-      </p:sp>
-      <p:sp>
-        <p:nvSpPr>
-          <p:cNvPr id="25" name="Shape 25"/>
-          <p:cNvSpPr/>
-          <p:nvPr/>
-        </p:nvSpPr>
-        <p:spPr>
-          <a:xfrm>
-            <a:off x="6172200" y="2464308"/>
-            <a:ext cx="5207000" cy="521208"/>
-          </a:xfrm>
-          <a:prstGeom prst="rect">
-            <a:avLst/>
-          </a:prstGeom>
-          <a:solidFill>
-            <a:srgbClr val="FFFFFF"/>
-          </a:solidFill>
-          <a:ln w="19050">
-            <a:solidFill>
-              <a:srgbClr val="141414"/>
-            </a:solidFill>
-            <a:prstDash val="solid"/>
-          </a:ln>
-        </p:spPr>
-      </p:sp>
-      <p:sp>
-        <p:nvSpPr>
-          <p:cNvPr id="26" name="Text 26"/>
-          <p:cNvSpPr txBox="1"/>
-          <p:nvPr/>
-        </p:nvSpPr>
-        <p:spPr>
-          <a:xfrm>
-            <a:off x="6172200" y="2464308"/>
-            <a:ext cx="5207000" cy="521208"/>
-          </a:xfrm>
-          <a:prstGeom prst="rect">
-            <a:avLst/>
-          </a:prstGeom>
-          <a:noFill/>
-          <a:ln/>
-        </p:spPr>
-        <p:txBody>
-          <a:bodyPr wrap="square" lIns="50800" tIns="76200" rIns="101600" bIns="50800" rtlCol="0" anchor="ctr"/>
-          <a:lstStyle/>
-          <a:p>
-            <a:pPr algn="ctr" indent="0" marL="0">
-              <a:spcAft>
-                <a:spcPts val="200"/>
-              </a:spcAft>
-              <a:buNone/>
-            </a:pPr>
-            <a:r>
-              <a:rPr lang="pt-BR" sz="1200" b="1" dirty="0">
-                <a:solidFill>
-                  <a:srgbClr val="141414"/>
-                </a:solidFill>
-                <a:latin typeface="Arial" pitchFamily="34" charset="0"/>
-                <a:ea typeface="Arial" pitchFamily="34" charset="-122"/>
-                <a:cs typeface="Arial" pitchFamily="34" charset="-120"/>
-              </a:rPr>
-              <a:t>JOÃO MALOSSI</a:t>
-            </a:r>
-            <a:endParaRPr lang="pt-BR" sz="1200" dirty="0"/>
-          </a:p>
-          <a:p>
-            <a:pPr algn="ctr" indent="0" marL="0">
-              <a:spcAft>
-                <a:spcPts val="200"/>
-              </a:spcAft>
-              <a:buNone/>
-            </a:pPr>
-            <a:r>
-              <a:rPr lang="pt-BR" sz="1200" dirty="0">
-                <a:solidFill>
-                  <a:srgbClr val="5E5E5E"/>
-                </a:solidFill>
-                <a:latin typeface="Arial" pitchFamily="34" charset="0"/>
-                <a:ea typeface="Arial" pitchFamily="34" charset="-122"/>
-                <a:cs typeface="Arial" pitchFamily="34" charset="-120"/>
-              </a:rPr>
-              <a:t>Head de BI · BR · Latam</a:t>
-            </a:r>
-            <a:endParaRPr lang="pt-BR" sz="1200" dirty="0"/>
-          </a:p>
-        </p:txBody>
-      </p:sp>
-      <p:sp>
-        <p:nvSpPr>
-          <p:cNvPr id="27" name="Shape 27"/>
-          <p:cNvSpPr/>
-          <p:nvPr/>
-        </p:nvSpPr>
-        <p:spPr>
-          <a:xfrm>
-            <a:off x="8775700" y="2985516"/>
-            <a:ext cx="0" cy="152400"/>
-          </a:xfrm>
-          <a:prstGeom prst="line">
-            <a:avLst/>
-          </a:prstGeom>
-          <a:noFill/>
-          <a:ln w="19050">
-            <a:solidFill>
-              <a:srgbClr val="141414"/>
-            </a:solidFill>
-            <a:prstDash val="solid"/>
-          </a:ln>
-        </p:spPr>
-      </p:sp>
-      <p:sp>
-        <p:nvSpPr>
-          <p:cNvPr id="28" name="Shape 28"/>
-          <p:cNvSpPr/>
-          <p:nvPr/>
-        </p:nvSpPr>
-        <p:spPr>
-          <a:xfrm>
-            <a:off x="6172200" y="3137916"/>
-            <a:ext cx="5207000" cy="521208"/>
-          </a:xfrm>
-          <a:prstGeom prst="rect">
-            <a:avLst/>
-          </a:prstGeom>
-          <a:solidFill>
-            <a:srgbClr val="FFFFFF"/>
-          </a:solidFill>
-          <a:ln w="19050">
-            <a:solidFill>
-              <a:srgbClr val="141414"/>
-            </a:solidFill>
-            <a:prstDash val="solid"/>
-          </a:ln>
-        </p:spPr>
-      </p:sp>
-      <p:sp>
-        <p:nvSpPr>
-          <p:cNvPr id="29" name="Text 29"/>
-          <p:cNvSpPr txBox="1"/>
-          <p:nvPr/>
-        </p:nvSpPr>
-        <p:spPr>
-          <a:xfrm>
-            <a:off x="6172200" y="3137916"/>
-            <a:ext cx="5207000" cy="521208"/>
-          </a:xfrm>
-          <a:prstGeom prst="rect">
-            <a:avLst/>
-          </a:prstGeom>
-          <a:noFill/>
-          <a:ln/>
-        </p:spPr>
-        <p:txBody>
-          <a:bodyPr wrap="square" lIns="50800" tIns="76200" rIns="101600" bIns="50800" rtlCol="0" anchor="ctr"/>
-          <a:lstStyle/>
-          <a:p>
-            <a:pPr algn="ctr" indent="0" marL="0">
-              <a:spcAft>
-                <a:spcPts val="200"/>
-              </a:spcAft>
-              <a:buNone/>
-            </a:pPr>
-            <a:r>
-              <a:rPr lang="pt-BR" sz="1200" b="1" dirty="0">
-                <a:solidFill>
-                  <a:srgbClr val="141414"/>
-                </a:solidFill>
-                <a:latin typeface="Arial" pitchFamily="34" charset="0"/>
-                <a:ea typeface="Arial" pitchFamily="34" charset="-122"/>
-                <a:cs typeface="Arial" pitchFamily="34" charset="-120"/>
-              </a:rPr>
-              <a:t>EDUARDA FRIEDRICH</a:t>
-            </a:r>
-            <a:endParaRPr lang="pt-BR" sz="1200" dirty="0"/>
-          </a:p>
-          <a:p>
-            <a:pPr algn="ctr" indent="0" marL="0">
-              <a:spcAft>
-                <a:spcPts val="200"/>
-              </a:spcAft>
-              <a:buNone/>
-            </a:pPr>
-            <a:r>
-              <a:rPr lang="pt-BR" sz="1200" dirty="0">
-                <a:solidFill>
-                  <a:srgbClr val="5E5E5E"/>
-                </a:solidFill>
-                <a:latin typeface="Arial" pitchFamily="34" charset="0"/>
-                <a:ea typeface="Arial" pitchFamily="34" charset="-122"/>
-                <a:cs typeface="Arial" pitchFamily="34" charset="-120"/>
-              </a:rPr>
-              <a:t>Líder de BI · BR · Latam · LRSA</a:t>
-            </a:r>
-            <a:endParaRPr lang="pt-BR" sz="1200" dirty="0"/>
-          </a:p>
-        </p:txBody>
-      </p:sp>
-      <p:sp>
-        <p:nvSpPr>
-          <p:cNvPr id="30" name="Shape 30"/>
-          <p:cNvSpPr/>
-          <p:nvPr/>
-        </p:nvSpPr>
-        <p:spPr>
-          <a:xfrm>
-            <a:off x="6172200" y="3722624"/>
-            <a:ext cx="2565400" cy="699516"/>
-          </a:xfrm>
-          <a:prstGeom prst="rect">
-            <a:avLst/>
-          </a:prstGeom>
-          <a:solidFill>
-            <a:srgbClr val="FFFFFF"/>
-          </a:solidFill>
-          <a:ln w="12700">
-            <a:solidFill>
-              <a:srgbClr val="E3E1DE"/>
-            </a:solidFill>
-            <a:prstDash val="solid"/>
-          </a:ln>
-        </p:spPr>
-      </p:sp>
-      <p:sp>
-        <p:nvSpPr>
-          <p:cNvPr id="31" name="Text 31"/>
-          <p:cNvSpPr txBox="1"/>
-          <p:nvPr/>
-        </p:nvSpPr>
-        <p:spPr>
-          <a:xfrm>
-            <a:off x="6172200" y="3722624"/>
-            <a:ext cx="2565400" cy="699516"/>
-          </a:xfrm>
-          <a:prstGeom prst="rect">
-            <a:avLst/>
-          </a:prstGeom>
-          <a:noFill/>
-          <a:ln/>
-        </p:spPr>
-        <p:txBody>
-          <a:bodyPr wrap="square" lIns="50800" tIns="76200" rIns="101600" bIns="50800" rtlCol="0" anchor="ctr"/>
-          <a:lstStyle/>
-          <a:p>
-            <a:pPr algn="l" indent="0" marL="0">
-              <a:spcAft>
-                <a:spcPts val="200"/>
-              </a:spcAft>
-              <a:buNone/>
-            </a:pPr>
-            <a:r>
-              <a:rPr lang="pt-BR" sz="1200" b="1" dirty="0">
-                <a:solidFill>
-                  <a:srgbClr val="141414"/>
-                </a:solidFill>
-                <a:latin typeface="Arial" pitchFamily="34" charset="0"/>
-                <a:ea typeface="Arial" pitchFamily="34" charset="-122"/>
-                <a:cs typeface="Arial" pitchFamily="34" charset="-120"/>
-              </a:rPr>
-              <a:t>THAMARA BASTOS OLIVEIRA</a:t>
-            </a:r>
-            <a:endParaRPr lang="pt-BR" sz="1200" dirty="0"/>
-          </a:p>
-          <a:p>
-            <a:pPr algn="l" indent="0" marL="0">
-              <a:spcAft>
-                <a:spcPts val="200"/>
-              </a:spcAft>
-              <a:buNone/>
-            </a:pPr>
-            <a:r>
-              <a:rPr lang="pt-BR" sz="1200" dirty="0">
-                <a:solidFill>
-                  <a:srgbClr val="5E5E5E"/>
-                </a:solidFill>
-                <a:latin typeface="Arial" pitchFamily="34" charset="0"/>
-                <a:ea typeface="Arial" pitchFamily="34" charset="-122"/>
-                <a:cs typeface="Arial" pitchFamily="34" charset="-120"/>
-              </a:rPr>
-              <a:t>Especialista de analytics · BR · Latam · LRSA</a:t>
-            </a:r>
-            <a:endParaRPr lang="pt-BR" sz="1200" dirty="0"/>
-          </a:p>
-        </p:txBody>
-      </p:sp>
-      <p:sp>
-        <p:nvSpPr>
-          <p:cNvPr id="32" name="Shape 32"/>
-          <p:cNvSpPr/>
-          <p:nvPr/>
-        </p:nvSpPr>
-        <p:spPr>
-          <a:xfrm>
-            <a:off x="8813800" y="3722624"/>
-            <a:ext cx="2565400" cy="699516"/>
-          </a:xfrm>
-          <a:prstGeom prst="rect">
-            <a:avLst/>
-          </a:prstGeom>
-          <a:solidFill>
-            <a:srgbClr val="FFFFFF"/>
-          </a:solidFill>
-          <a:ln w="12700">
-            <a:solidFill>
-              <a:srgbClr val="E3E1DE"/>
-            </a:solidFill>
-            <a:prstDash val="solid"/>
-          </a:ln>
-        </p:spPr>
-      </p:sp>
-      <p:sp>
-        <p:nvSpPr>
-          <p:cNvPr id="33" name="Text 33"/>
-          <p:cNvSpPr txBox="1"/>
-          <p:nvPr/>
-        </p:nvSpPr>
-        <p:spPr>
-          <a:xfrm>
-            <a:off x="8813800" y="3722624"/>
-            <a:ext cx="2565400" cy="699516"/>
-          </a:xfrm>
-          <a:prstGeom prst="rect">
-            <a:avLst/>
-          </a:prstGeom>
-          <a:noFill/>
-          <a:ln/>
-        </p:spPr>
-        <p:txBody>
-          <a:bodyPr wrap="square" lIns="50800" tIns="76200" rIns="101600" bIns="50800" rtlCol="0" anchor="ctr"/>
-          <a:lstStyle/>
-          <a:p>
-            <a:pPr algn="l" indent="0" marL="0">
-              <a:spcAft>
-                <a:spcPts val="200"/>
-              </a:spcAft>
-              <a:buNone/>
-            </a:pPr>
-            <a:r>
-              <a:rPr lang="pt-BR" sz="1200" b="1" dirty="0">
-                <a:solidFill>
-                  <a:srgbClr val="141414"/>
-                </a:solidFill>
-                <a:latin typeface="Arial" pitchFamily="34" charset="0"/>
-                <a:ea typeface="Arial" pitchFamily="34" charset="-122"/>
-                <a:cs typeface="Arial" pitchFamily="34" charset="-120"/>
-              </a:rPr>
-              <a:t>KEVI PEGORARO</a:t>
-            </a:r>
-            <a:endParaRPr lang="pt-BR" sz="1200" dirty="0"/>
-          </a:p>
-          <a:p>
-            <a:pPr algn="l" indent="0" marL="0">
-              <a:spcAft>
-                <a:spcPts val="200"/>
-              </a:spcAft>
-              <a:buNone/>
-            </a:pPr>
-            <a:r>
-              <a:rPr lang="pt-BR" sz="1200" dirty="0">
-                <a:solidFill>
-                  <a:srgbClr val="5E5E5E"/>
-                </a:solidFill>
-                <a:latin typeface="Arial" pitchFamily="34" charset="0"/>
-                <a:ea typeface="Arial" pitchFamily="34" charset="-122"/>
-                <a:cs typeface="Arial" pitchFamily="34" charset="-120"/>
-              </a:rPr>
-              <a:t>Cientista de dados · BR · Latam</a:t>
-            </a:r>
-            <a:endParaRPr lang="pt-BR" sz="1200" dirty="0"/>
-          </a:p>
-        </p:txBody>
-      </p:sp>
-      <p:sp>
-        <p:nvSpPr>
-          <p:cNvPr id="34" name="Shape 34"/>
-          <p:cNvSpPr/>
-          <p:nvPr/>
-        </p:nvSpPr>
-        <p:spPr>
-          <a:xfrm>
-            <a:off x="6172200" y="4485640"/>
-            <a:ext cx="2565400" cy="521208"/>
-          </a:xfrm>
-          <a:prstGeom prst="rect">
-            <a:avLst/>
-          </a:prstGeom>
-          <a:solidFill>
-            <a:srgbClr val="FFFFFF"/>
-          </a:solidFill>
-          <a:ln w="12700">
-            <a:solidFill>
-              <a:srgbClr val="E3E1DE"/>
-            </a:solidFill>
-            <a:prstDash val="solid"/>
-          </a:ln>
-        </p:spPr>
-      </p:sp>
-      <p:sp>
-        <p:nvSpPr>
-          <p:cNvPr id="35" name="Text 35"/>
-          <p:cNvSpPr txBox="1"/>
-          <p:nvPr/>
-        </p:nvSpPr>
-        <p:spPr>
-          <a:xfrm>
-            <a:off x="6172200" y="4485640"/>
-            <a:ext cx="2565400" cy="521208"/>
-          </a:xfrm>
-          <a:prstGeom prst="rect">
-            <a:avLst/>
-          </a:prstGeom>
-          <a:noFill/>
-          <a:ln/>
-        </p:spPr>
-        <p:txBody>
-          <a:bodyPr wrap="square" lIns="50800" tIns="76200" rIns="101600" bIns="50800" rtlCol="0" anchor="ctr"/>
-          <a:lstStyle/>
-          <a:p>
-            <a:pPr algn="l" indent="0" marL="0">
-              <a:spcAft>
-                <a:spcPts val="200"/>
-              </a:spcAft>
-              <a:buNone/>
-            </a:pPr>
-            <a:r>
-              <a:rPr lang="pt-BR" sz="1200" b="1" dirty="0">
-                <a:solidFill>
-                  <a:srgbClr val="141414"/>
-                </a:solidFill>
-                <a:latin typeface="Arial" pitchFamily="34" charset="0"/>
-                <a:ea typeface="Arial" pitchFamily="34" charset="-122"/>
-                <a:cs typeface="Arial" pitchFamily="34" charset="-120"/>
-              </a:rPr>
-              <a:t>ISABELA CANAL</a:t>
-            </a:r>
-            <a:endParaRPr lang="pt-BR" sz="1200" dirty="0"/>
-          </a:p>
-          <a:p>
-            <a:pPr algn="l" indent="0" marL="0">
-              <a:spcAft>
-                <a:spcPts val="200"/>
-              </a:spcAft>
-              <a:buNone/>
-            </a:pPr>
-            <a:r>
-              <a:rPr lang="pt-BR" sz="1200" dirty="0">
-                <a:solidFill>
-                  <a:srgbClr val="5E5E5E"/>
-                </a:solidFill>
-                <a:latin typeface="Arial" pitchFamily="34" charset="0"/>
-                <a:ea typeface="Arial" pitchFamily="34" charset="-122"/>
-                <a:cs typeface="Arial" pitchFamily="34" charset="-120"/>
-              </a:rPr>
-              <a:t>Analista de BI · BR · Latam</a:t>
-            </a:r>
-            <a:endParaRPr lang="pt-BR" sz="1200" dirty="0"/>
-          </a:p>
-        </p:txBody>
-      </p:sp>
-      <p:sp>
-        <p:nvSpPr>
-          <p:cNvPr id="36" name="Shape 36"/>
-          <p:cNvSpPr/>
-          <p:nvPr/>
-        </p:nvSpPr>
-        <p:spPr>
-          <a:xfrm>
-            <a:off x="8813800" y="4485640"/>
-            <a:ext cx="2565400" cy="521208"/>
-          </a:xfrm>
-          <a:prstGeom prst="rect">
-            <a:avLst/>
-          </a:prstGeom>
-          <a:solidFill>
-            <a:srgbClr val="FFFFFF"/>
-          </a:solidFill>
-          <a:ln w="12700">
-            <a:solidFill>
-              <a:srgbClr val="E3E1DE"/>
-            </a:solidFill>
-            <a:prstDash val="solid"/>
-          </a:ln>
-        </p:spPr>
-      </p:sp>
-      <p:sp>
-        <p:nvSpPr>
-          <p:cNvPr id="37" name="Text 37"/>
-          <p:cNvSpPr txBox="1"/>
-          <p:nvPr/>
-        </p:nvSpPr>
-        <p:spPr>
-          <a:xfrm>
-            <a:off x="8813800" y="4485640"/>
-            <a:ext cx="2565400" cy="521208"/>
-          </a:xfrm>
-          <a:prstGeom prst="rect">
-            <a:avLst/>
-          </a:prstGeom>
-          <a:noFill/>
-          <a:ln/>
-        </p:spPr>
-        <p:txBody>
-          <a:bodyPr wrap="square" lIns="50800" tIns="76200" rIns="101600" bIns="50800" rtlCol="0" anchor="ctr"/>
-          <a:lstStyle/>
-          <a:p>
-            <a:pPr algn="l" indent="0" marL="0">
-              <a:spcAft>
-                <a:spcPts val="200"/>
-              </a:spcAft>
-              <a:buNone/>
-            </a:pPr>
-            <a:r>
-              <a:rPr lang="pt-BR" sz="1200" b="1" dirty="0">
-                <a:solidFill>
-                  <a:srgbClr val="141414"/>
-                </a:solidFill>
-                <a:latin typeface="Arial" pitchFamily="34" charset="0"/>
-                <a:ea typeface="Arial" pitchFamily="34" charset="-122"/>
-                <a:cs typeface="Arial" pitchFamily="34" charset="-120"/>
-              </a:rPr>
-              <a:t>AMANDA OLIVEIRA</a:t>
-            </a:r>
-            <a:endParaRPr lang="pt-BR" sz="1200" dirty="0"/>
-          </a:p>
-          <a:p>
-            <a:pPr algn="l" indent="0" marL="0">
-              <a:spcAft>
-                <a:spcPts val="200"/>
-              </a:spcAft>
-              <a:buNone/>
-            </a:pPr>
-            <a:r>
-              <a:rPr lang="pt-BR" sz="1200" dirty="0">
-                <a:solidFill>
-                  <a:srgbClr val="5E5E5E"/>
-                </a:solidFill>
-                <a:latin typeface="Arial" pitchFamily="34" charset="0"/>
-                <a:ea typeface="Arial" pitchFamily="34" charset="-122"/>
-                <a:cs typeface="Arial" pitchFamily="34" charset="-120"/>
-              </a:rPr>
-              <a:t>Analista de BI · BR · Latam</a:t>
-            </a:r>
-            <a:endParaRPr lang="pt-BR" sz="1200" dirty="0"/>
-          </a:p>
-        </p:txBody>
-      </p:sp>
-      <p:sp>
-        <p:nvSpPr>
-          <p:cNvPr id="38" name="Shape 38"/>
-          <p:cNvSpPr/>
-          <p:nvPr/>
-        </p:nvSpPr>
-        <p:spPr>
-          <a:xfrm>
-            <a:off x="6172200" y="5070348"/>
-            <a:ext cx="2565400" cy="521208"/>
-          </a:xfrm>
-          <a:prstGeom prst="rect">
-            <a:avLst/>
-          </a:prstGeom>
-          <a:solidFill>
-            <a:srgbClr val="FFFFFF"/>
-          </a:solidFill>
-          <a:ln w="12700">
-            <a:solidFill>
-              <a:srgbClr val="E3E1DE"/>
-            </a:solidFill>
-            <a:prstDash val="solid"/>
-          </a:ln>
-        </p:spPr>
-      </p:sp>
-      <p:sp>
-        <p:nvSpPr>
-          <p:cNvPr id="39" name="Text 39"/>
-          <p:cNvSpPr txBox="1"/>
-          <p:nvPr/>
-        </p:nvSpPr>
-        <p:spPr>
-          <a:xfrm>
-            <a:off x="6172200" y="5070348"/>
-            <a:ext cx="2565400" cy="521208"/>
-          </a:xfrm>
-          <a:prstGeom prst="rect">
-            <a:avLst/>
-          </a:prstGeom>
-          <a:noFill/>
-          <a:ln/>
-        </p:spPr>
-        <p:txBody>
-          <a:bodyPr wrap="square" lIns="50800" tIns="76200" rIns="101600" bIns="50800" rtlCol="0" anchor="ctr"/>
-          <a:lstStyle/>
-          <a:p>
-            <a:pPr algn="l" indent="0" marL="0">
-              <a:spcAft>
-                <a:spcPts val="200"/>
-              </a:spcAft>
-              <a:buNone/>
-            </a:pPr>
-            <a:r>
-              <a:rPr lang="pt-BR" sz="1200" b="1" dirty="0">
-                <a:solidFill>
-                  <a:srgbClr val="141414"/>
-                </a:solidFill>
-                <a:latin typeface="Arial" pitchFamily="34" charset="0"/>
-                <a:ea typeface="Arial" pitchFamily="34" charset="-122"/>
-                <a:cs typeface="Arial" pitchFamily="34" charset="-120"/>
-              </a:rPr>
-              <a:t>JÚLIA DIAS</a:t>
-            </a:r>
-            <a:endParaRPr lang="pt-BR" sz="1200" dirty="0"/>
-          </a:p>
-          <a:p>
-            <a:pPr algn="l" indent="0" marL="0">
-              <a:spcAft>
-                <a:spcPts val="200"/>
-              </a:spcAft>
-              <a:buNone/>
-            </a:pPr>
-            <a:r>
-              <a:rPr lang="pt-BR" sz="1200" dirty="0">
-                <a:solidFill>
-                  <a:srgbClr val="5E5E5E"/>
-                </a:solidFill>
-                <a:latin typeface="Arial" pitchFamily="34" charset="0"/>
-                <a:ea typeface="Arial" pitchFamily="34" charset="-122"/>
-                <a:cs typeface="Arial" pitchFamily="34" charset="-120"/>
-              </a:rPr>
-              <a:t>Assistente de BI · BR · Latam</a:t>
-            </a:r>
-            <a:endParaRPr lang="pt-BR" sz="1200" dirty="0"/>
-          </a:p>
-        </p:txBody>
-      </p:sp>
-      <p:sp>
-        <p:nvSpPr>
-          <p:cNvPr id="40" name="Shape 40"/>
-          <p:cNvSpPr/>
-          <p:nvPr/>
-        </p:nvSpPr>
-        <p:spPr>
-          <a:xfrm>
-            <a:off x="8813800" y="5070348"/>
-            <a:ext cx="2565400" cy="521208"/>
-          </a:xfrm>
-          <a:prstGeom prst="rect">
-            <a:avLst/>
-          </a:prstGeom>
-          <a:solidFill>
-            <a:srgbClr val="FFFFFF"/>
-          </a:solidFill>
-          <a:ln w="12700">
-            <a:solidFill>
-              <a:srgbClr val="E3E1DE"/>
-            </a:solidFill>
-            <a:prstDash val="solid"/>
-          </a:ln>
-        </p:spPr>
-      </p:sp>
-      <p:sp>
-        <p:nvSpPr>
-          <p:cNvPr id="41" name="Text 41"/>
-          <p:cNvSpPr txBox="1"/>
-          <p:nvPr/>
-        </p:nvSpPr>
-        <p:spPr>
-          <a:xfrm>
-            <a:off x="8813800" y="5070348"/>
-            <a:ext cx="2565400" cy="521208"/>
-          </a:xfrm>
-          <a:prstGeom prst="rect">
-            <a:avLst/>
-          </a:prstGeom>
-          <a:noFill/>
-          <a:ln/>
-        </p:spPr>
-        <p:txBody>
-          <a:bodyPr wrap="square" lIns="50800" tIns="76200" rIns="101600" bIns="50800" rtlCol="0" anchor="ctr"/>
-          <a:lstStyle/>
-          <a:p>
-            <a:pPr algn="l" indent="0" marL="0">
-              <a:spcAft>
-                <a:spcPts val="200"/>
-              </a:spcAft>
-              <a:buNone/>
-            </a:pPr>
-            <a:r>
-              <a:rPr lang="pt-BR" sz="1200" b="1" dirty="0">
-                <a:solidFill>
-                  <a:srgbClr val="141414"/>
-                </a:solidFill>
-                <a:latin typeface="Arial" pitchFamily="34" charset="0"/>
-                <a:ea typeface="Arial" pitchFamily="34" charset="-122"/>
-                <a:cs typeface="Arial" pitchFamily="34" charset="-120"/>
-              </a:rPr>
-              <a:t>EDUARDO SCHOTKIS</a:t>
-            </a:r>
-            <a:endParaRPr lang="pt-BR" sz="1200" dirty="0"/>
-          </a:p>
-          <a:p>
-            <a:pPr algn="l" indent="0" marL="0">
-              <a:spcAft>
-                <a:spcPts val="200"/>
-              </a:spcAft>
-              <a:buNone/>
-            </a:pPr>
-            <a:r>
-              <a:rPr lang="pt-BR" sz="1200" dirty="0">
-                <a:solidFill>
-                  <a:srgbClr val="5E5E5E"/>
-                </a:solidFill>
-                <a:latin typeface="Arial" pitchFamily="34" charset="0"/>
-                <a:ea typeface="Arial" pitchFamily="34" charset="-122"/>
-                <a:cs typeface="Arial" pitchFamily="34" charset="-120"/>
-              </a:rPr>
-              <a:t>Assistente de BI · BR · Latam</a:t>
-            </a:r>
-            <a:endParaRPr lang="pt-BR" sz="1200" dirty="0"/>
-          </a:p>
-        </p:txBody>
-      </p:sp>
-      <p:sp>
-        <p:nvSpPr>
-          <p:cNvPr id="42" name="Text 42"/>
-          <p:cNvSpPr txBox="1"/>
-          <p:nvPr/>
-        </p:nvSpPr>
-        <p:spPr>
-          <a:xfrm>
-            <a:off x="9474200" y="6311900"/>
-            <a:ext cx="1905000" cy="228600"/>
-          </a:xfrm>
-          <a:prstGeom prst="rect">
-            <a:avLst/>
-          </a:prstGeom>
-          <a:noFill/>
-          <a:ln/>
-        </p:spPr>
-        <p:txBody>
-          <a:bodyPr wrap="square" lIns="0" tIns="0" rIns="0" bIns="0" rtlCol="0" anchor="ctr"/>
-          <a:lstStyle/>
-          <a:p>
-            <a:pPr algn="l" indent="0" marL="0">
-              <a:buNone/>
-            </a:pPr>
-            <a:r>
-              <a:rPr lang="pt-BR" sz="1200" dirty="0">
-                <a:solidFill>
-                  <a:srgbClr val="141414"/>
-                </a:solidFill>
-                <a:latin typeface="Arial" pitchFamily="34" charset="0"/>
-                <a:ea typeface="Arial" pitchFamily="34" charset="-122"/>
-                <a:cs typeface="Arial" pitchFamily="34" charset="-120"/>
-              </a:rPr>
-              <a:t>Liderança (responde a)</a:t>
-            </a:r>
-            <a:endParaRPr lang="pt-BR" sz="1200" dirty="0"/>
-          </a:p>
-        </p:txBody>
-      </p:sp>
-      <p:sp>
-        <p:nvSpPr>
-          <p:cNvPr id="43" name="Shape 43"/>
-          <p:cNvSpPr/>
-          <p:nvPr/>
-        </p:nvSpPr>
-        <p:spPr>
-          <a:xfrm>
-            <a:off x="9042400" y="6426200"/>
-            <a:ext cx="355600" cy="0"/>
-          </a:xfrm>
-          <a:prstGeom prst="line">
-            <a:avLst/>
-          </a:prstGeom>
-          <a:noFill/>
-          <a:ln w="19050">
-            <a:solidFill>
-              <a:srgbClr val="141414"/>
-            </a:solidFill>
-            <a:prstDash val="solid"/>
-          </a:ln>
-        </p:spPr>
-      </p:sp>
-      <p:sp>
-        <p:nvSpPr>
-          <p:cNvPr id="44" name="Text 44"/>
+          <p:cNvPr id="20" name="Text 20"/>
           <p:cNvSpPr txBox="1"/>
           <p:nvPr/>
         </p:nvSpPr>
@@ -6389,7 +5163,7 @@
                 <a:ea typeface="Arial" pitchFamily="34" charset="-122"/>
                 <a:cs typeface="Arial" pitchFamily="34" charset="-120"/>
               </a:rPr>
-              <a:t>RENNER · CRIAÇÃO</a:t>
+              <a:t>RENNER · MÍDIA</a:t>
             </a:r>
             <a:endParaRPr lang="en-US" sz="3200" dirty="0"/>
           </a:p>
@@ -6403,8 +5177,8 @@
         </p:nvSpPr>
         <p:spPr>
           <a:xfrm>
-            <a:off x="4333113" y="1168400"/>
-            <a:ext cx="3525774" cy="558800"/>
+            <a:off x="4224147" y="1168400"/>
+            <a:ext cx="3743706" cy="558800"/>
           </a:xfrm>
           <a:prstGeom prst="rect">
             <a:avLst/>
@@ -6423,8 +5197,8 @@
         </p:nvSpPr>
         <p:spPr>
           <a:xfrm>
-            <a:off x="4333113" y="1168400"/>
-            <a:ext cx="3525774" cy="558800"/>
+            <a:off x="4224147" y="1168400"/>
+            <a:ext cx="3743706" cy="558800"/>
           </a:xfrm>
           <a:prstGeom prst="rect">
             <a:avLst/>
@@ -6451,7 +5225,7 @@
                 <a:ea typeface="Arial" pitchFamily="34" charset="-122"/>
                 <a:cs typeface="Arial" pitchFamily="34" charset="-120"/>
               </a:rPr>
-              <a:t>VP DE CRIAÇÃO · RODRIGO PINTO</a:t>
+              <a:t>DIREÇÃO DE MÍDIA · SIMONE MAGON</a:t>
             </a:r>
             <a:endParaRPr lang="pt-BR" sz="1300" dirty="0"/>
           </a:p>
@@ -6471,7 +5245,7 @@
                 <a:ea typeface="Arial" pitchFamily="34" charset="-122"/>
                 <a:cs typeface="Arial" pitchFamily="34" charset="-120"/>
               </a:rPr>
-              <a:t>BR · Latam · LRSA</a:t>
+              <a:t>Renner BR · Renner Latam · LRSA</a:t>
             </a:r>
             <a:endParaRPr lang="pt-BR" sz="1200" dirty="0"/>
           </a:p>
@@ -6508,8 +5282,8 @@
         </p:nvSpPr>
         <p:spPr>
           <a:xfrm>
-            <a:off x="3931920" y="1828800"/>
-            <a:ext cx="4328160" cy="558800"/>
+            <a:off x="4445000" y="1828800"/>
+            <a:ext cx="3302000" cy="558800"/>
           </a:xfrm>
           <a:prstGeom prst="rect">
             <a:avLst/>
@@ -6528,8 +5302,8 @@
         </p:nvSpPr>
         <p:spPr>
           <a:xfrm>
-            <a:off x="3931920" y="1828800"/>
-            <a:ext cx="4328160" cy="558800"/>
+            <a:off x="4445000" y="1828800"/>
+            <a:ext cx="3302000" cy="558800"/>
           </a:xfrm>
           <a:prstGeom prst="rect">
             <a:avLst/>
@@ -6556,7 +5330,7 @@
                 <a:ea typeface="Arial" pitchFamily="34" charset="-122"/>
                 <a:cs typeface="Arial" pitchFamily="34" charset="-120"/>
               </a:rPr>
-              <a:t>DEH BASTOS</a:t>
+              <a:t>PALOMA KUSSLER</a:t>
             </a:r>
             <a:endParaRPr lang="pt-BR" sz="1300" dirty="0"/>
           </a:p>
@@ -6576,7 +5350,7 @@
                 <a:ea typeface="Arial" pitchFamily="34" charset="-122"/>
                 <a:cs typeface="Arial" pitchFamily="34" charset="-120"/>
               </a:rPr>
-              <a:t>Diretora de criação e conteúdo · BR · Latam · LRSA</a:t>
+              <a:t>Head de mídia · toda a frente digital</a:t>
             </a:r>
             <a:endParaRPr lang="pt-BR" sz="1200" dirty="0"/>
           </a:p>
@@ -6613,8 +5387,8 @@
         </p:nvSpPr>
         <p:spPr>
           <a:xfrm>
-            <a:off x="2548466" y="2514600"/>
-            <a:ext cx="5359400" cy="0"/>
+            <a:off x="6096000" y="2514600"/>
+            <a:ext cx="0" cy="0"/>
           </a:xfrm>
           <a:prstGeom prst="line">
             <a:avLst/>
@@ -6636,7 +5410,7 @@
         </p:nvSpPr>
         <p:spPr>
           <a:xfrm>
-            <a:off x="2548466" y="2514600"/>
+            <a:off x="6096000" y="2514600"/>
             <a:ext cx="0" cy="127000"/>
           </a:xfrm>
           <a:prstGeom prst="line">
@@ -6653,14 +5427,529 @@
       </p:sp>
       <p:sp>
         <p:nvSpPr>
-          <p:cNvPr id="13" name="Shape 13"/>
-          <p:cNvSpPr/>
-          <p:nvPr/>
-        </p:nvSpPr>
-        <p:spPr>
-          <a:xfrm>
-            <a:off x="7907866" y="2514600"/>
-            <a:ext cx="0" cy="127000"/>
+          <p:cNvPr id="13" name="Text 13"/>
+          <p:cNvSpPr txBox="1"/>
+          <p:nvPr/>
+        </p:nvSpPr>
+        <p:spPr>
+          <a:xfrm>
+            <a:off x="812800" y="2641600"/>
+            <a:ext cx="10566400" cy="419100"/>
+          </a:xfrm>
+          <a:prstGeom prst="rect">
+            <a:avLst/>
+          </a:prstGeom>
+          <a:solidFill>
+            <a:srgbClr val="7C2722"/>
+          </a:solidFill>
+          <a:ln/>
+        </p:spPr>
+        <p:txBody>
+          <a:bodyPr wrap="square" lIns="50800" tIns="50800" rIns="50800" bIns="50800" rtlCol="0" anchor="ctr"/>
+          <a:lstStyle/>
+          <a:p>
+            <a:pPr algn="ctr" indent="0" marL="0">
+              <a:buNone/>
+            </a:pPr>
+            <a:r>
+              <a:rPr lang="pt-BR" sz="1600" b="1" dirty="0">
+                <a:solidFill>
+                  <a:srgbClr val="FFFFFF"/>
+                </a:solidFill>
+                <a:latin typeface="Arial" pitchFamily="34" charset="0"/>
+                <a:ea typeface="Arial" pitchFamily="34" charset="-122"/>
+                <a:cs typeface="Arial" pitchFamily="34" charset="-120"/>
+              </a:rPr>
+              <a:t>PLANEJAMENTO DE MÍDIA</a:t>
+            </a:r>
+            <a:endParaRPr lang="pt-BR" sz="1600" dirty="0"/>
+          </a:p>
+        </p:txBody>
+      </p:sp>
+      <p:sp>
+        <p:nvSpPr>
+          <p:cNvPr id="14" name="Shape 14"/>
+          <p:cNvSpPr/>
+          <p:nvPr/>
+        </p:nvSpPr>
+        <p:spPr>
+          <a:xfrm>
+            <a:off x="812800" y="3136900"/>
+            <a:ext cx="3471333" cy="521208"/>
+          </a:xfrm>
+          <a:prstGeom prst="rect">
+            <a:avLst/>
+          </a:prstGeom>
+          <a:solidFill>
+            <a:srgbClr val="FFFFFF"/>
+          </a:solidFill>
+          <a:ln w="12700">
+            <a:solidFill>
+              <a:srgbClr val="E3E1DE"/>
+            </a:solidFill>
+            <a:prstDash val="solid"/>
+          </a:ln>
+        </p:spPr>
+      </p:sp>
+      <p:sp>
+        <p:nvSpPr>
+          <p:cNvPr id="15" name="Text 15"/>
+          <p:cNvSpPr txBox="1"/>
+          <p:nvPr/>
+        </p:nvSpPr>
+        <p:spPr>
+          <a:xfrm>
+            <a:off x="812800" y="3136900"/>
+            <a:ext cx="3471333" cy="521208"/>
+          </a:xfrm>
+          <a:prstGeom prst="rect">
+            <a:avLst/>
+          </a:prstGeom>
+          <a:noFill/>
+          <a:ln/>
+        </p:spPr>
+        <p:txBody>
+          <a:bodyPr wrap="square" lIns="50800" tIns="76200" rIns="101600" bIns="50800" rtlCol="0" anchor="ctr"/>
+          <a:lstStyle/>
+          <a:p>
+            <a:pPr algn="l" indent="0" marL="0">
+              <a:spcAft>
+                <a:spcPts val="200"/>
+              </a:spcAft>
+              <a:buNone/>
+            </a:pPr>
+            <a:r>
+              <a:rPr lang="pt-BR" sz="1200" b="1" dirty="0">
+                <a:solidFill>
+                  <a:srgbClr val="141414"/>
+                </a:solidFill>
+                <a:latin typeface="Arial" pitchFamily="34" charset="0"/>
+                <a:ea typeface="Arial" pitchFamily="34" charset="-122"/>
+                <a:cs typeface="Arial" pitchFamily="34" charset="-120"/>
+              </a:rPr>
+              <a:t>LEANDRO FREITAS</a:t>
+            </a:r>
+            <a:endParaRPr lang="pt-BR" sz="1200" dirty="0"/>
+          </a:p>
+          <a:p>
+            <a:pPr algn="l" indent="0" marL="0">
+              <a:spcAft>
+                <a:spcPts val="200"/>
+              </a:spcAft>
+              <a:buNone/>
+            </a:pPr>
+            <a:r>
+              <a:rPr lang="pt-BR" sz="1200" dirty="0">
+                <a:solidFill>
+                  <a:srgbClr val="5E5E5E"/>
+                </a:solidFill>
+                <a:latin typeface="Arial" pitchFamily="34" charset="0"/>
+                <a:ea typeface="Arial" pitchFamily="34" charset="-122"/>
+                <a:cs typeface="Arial" pitchFamily="34" charset="-120"/>
+              </a:rPr>
+              <a:t>Planejador de mídia · BR</a:t>
+            </a:r>
+            <a:endParaRPr lang="pt-BR" sz="1200" dirty="0"/>
+          </a:p>
+        </p:txBody>
+      </p:sp>
+      <p:sp>
+        <p:nvSpPr>
+          <p:cNvPr id="16" name="Shape 16"/>
+          <p:cNvSpPr/>
+          <p:nvPr/>
+        </p:nvSpPr>
+        <p:spPr>
+          <a:xfrm>
+            <a:off x="4360333" y="3136900"/>
+            <a:ext cx="3471333" cy="521208"/>
+          </a:xfrm>
+          <a:prstGeom prst="rect">
+            <a:avLst/>
+          </a:prstGeom>
+          <a:solidFill>
+            <a:srgbClr val="FFFFFF"/>
+          </a:solidFill>
+          <a:ln w="12700">
+            <a:solidFill>
+              <a:srgbClr val="E3E1DE"/>
+            </a:solidFill>
+            <a:prstDash val="solid"/>
+          </a:ln>
+        </p:spPr>
+      </p:sp>
+      <p:sp>
+        <p:nvSpPr>
+          <p:cNvPr id="17" name="Text 17"/>
+          <p:cNvSpPr txBox="1"/>
+          <p:nvPr/>
+        </p:nvSpPr>
+        <p:spPr>
+          <a:xfrm>
+            <a:off x="4360333" y="3136900"/>
+            <a:ext cx="3471333" cy="521208"/>
+          </a:xfrm>
+          <a:prstGeom prst="rect">
+            <a:avLst/>
+          </a:prstGeom>
+          <a:noFill/>
+          <a:ln/>
+        </p:spPr>
+        <p:txBody>
+          <a:bodyPr wrap="square" lIns="50800" tIns="76200" rIns="101600" bIns="50800" rtlCol="0" anchor="ctr"/>
+          <a:lstStyle/>
+          <a:p>
+            <a:pPr algn="l" indent="0" marL="0">
+              <a:spcAft>
+                <a:spcPts val="200"/>
+              </a:spcAft>
+              <a:buNone/>
+            </a:pPr>
+            <a:r>
+              <a:rPr lang="pt-BR" sz="1200" b="1" dirty="0">
+                <a:solidFill>
+                  <a:srgbClr val="141414"/>
+                </a:solidFill>
+                <a:latin typeface="Arial" pitchFamily="34" charset="0"/>
+                <a:ea typeface="Arial" pitchFamily="34" charset="-122"/>
+                <a:cs typeface="Arial" pitchFamily="34" charset="-120"/>
+              </a:rPr>
+              <a:t>GABRIEL SOARES</a:t>
+            </a:r>
+            <a:endParaRPr lang="pt-BR" sz="1200" dirty="0"/>
+          </a:p>
+          <a:p>
+            <a:pPr algn="l" indent="0" marL="0">
+              <a:spcAft>
+                <a:spcPts val="200"/>
+              </a:spcAft>
+              <a:buNone/>
+            </a:pPr>
+            <a:r>
+              <a:rPr lang="pt-BR" sz="1200" dirty="0">
+                <a:solidFill>
+                  <a:srgbClr val="5E5E5E"/>
+                </a:solidFill>
+                <a:latin typeface="Arial" pitchFamily="34" charset="0"/>
+                <a:ea typeface="Arial" pitchFamily="34" charset="-122"/>
+                <a:cs typeface="Arial" pitchFamily="34" charset="-120"/>
+              </a:rPr>
+              <a:t>Planejador de mídia · BR</a:t>
+            </a:r>
+            <a:endParaRPr lang="pt-BR" sz="1200" dirty="0"/>
+          </a:p>
+        </p:txBody>
+      </p:sp>
+      <p:sp>
+        <p:nvSpPr>
+          <p:cNvPr id="18" name="Shape 18"/>
+          <p:cNvSpPr/>
+          <p:nvPr/>
+        </p:nvSpPr>
+        <p:spPr>
+          <a:xfrm>
+            <a:off x="7907866" y="3136900"/>
+            <a:ext cx="3471333" cy="521208"/>
+          </a:xfrm>
+          <a:prstGeom prst="rect">
+            <a:avLst/>
+          </a:prstGeom>
+          <a:solidFill>
+            <a:srgbClr val="FFFFFF"/>
+          </a:solidFill>
+          <a:ln w="12700">
+            <a:solidFill>
+              <a:srgbClr val="E3E1DE"/>
+            </a:solidFill>
+            <a:prstDash val="solid"/>
+          </a:ln>
+        </p:spPr>
+      </p:sp>
+      <p:sp>
+        <p:nvSpPr>
+          <p:cNvPr id="19" name="Text 19"/>
+          <p:cNvSpPr txBox="1"/>
+          <p:nvPr/>
+        </p:nvSpPr>
+        <p:spPr>
+          <a:xfrm>
+            <a:off x="7907866" y="3136900"/>
+            <a:ext cx="3471333" cy="521208"/>
+          </a:xfrm>
+          <a:prstGeom prst="rect">
+            <a:avLst/>
+          </a:prstGeom>
+          <a:noFill/>
+          <a:ln/>
+        </p:spPr>
+        <p:txBody>
+          <a:bodyPr wrap="square" lIns="50800" tIns="76200" rIns="101600" bIns="50800" rtlCol="0" anchor="ctr"/>
+          <a:lstStyle/>
+          <a:p>
+            <a:pPr algn="l" indent="0" marL="0">
+              <a:spcAft>
+                <a:spcPts val="200"/>
+              </a:spcAft>
+              <a:buNone/>
+            </a:pPr>
+            <a:r>
+              <a:rPr lang="pt-BR" sz="1200" b="1" dirty="0">
+                <a:solidFill>
+                  <a:srgbClr val="141414"/>
+                </a:solidFill>
+                <a:latin typeface="Arial" pitchFamily="34" charset="0"/>
+                <a:ea typeface="Arial" pitchFamily="34" charset="-122"/>
+                <a:cs typeface="Arial" pitchFamily="34" charset="-120"/>
+              </a:rPr>
+              <a:t>JULYE ALMEIDA</a:t>
+            </a:r>
+            <a:endParaRPr lang="pt-BR" sz="1200" dirty="0"/>
+          </a:p>
+          <a:p>
+            <a:pPr algn="l" indent="0" marL="0">
+              <a:spcAft>
+                <a:spcPts val="200"/>
+              </a:spcAft>
+              <a:buNone/>
+            </a:pPr>
+            <a:r>
+              <a:rPr lang="pt-BR" sz="1200" dirty="0">
+                <a:solidFill>
+                  <a:srgbClr val="5E5E5E"/>
+                </a:solidFill>
+                <a:latin typeface="Arial" pitchFamily="34" charset="0"/>
+                <a:ea typeface="Arial" pitchFamily="34" charset="-122"/>
+                <a:cs typeface="Arial" pitchFamily="34" charset="-120"/>
+              </a:rPr>
+              <a:t>Planejadora de mídia · BR</a:t>
+            </a:r>
+            <a:endParaRPr lang="pt-BR" sz="1200" dirty="0"/>
+          </a:p>
+        </p:txBody>
+      </p:sp>
+      <p:sp>
+        <p:nvSpPr>
+          <p:cNvPr id="20" name="Shape 20"/>
+          <p:cNvSpPr/>
+          <p:nvPr/>
+        </p:nvSpPr>
+        <p:spPr>
+          <a:xfrm>
+            <a:off x="812800" y="3721608"/>
+            <a:ext cx="3471333" cy="699516"/>
+          </a:xfrm>
+          <a:prstGeom prst="rect">
+            <a:avLst/>
+          </a:prstGeom>
+          <a:solidFill>
+            <a:srgbClr val="FFFFFF"/>
+          </a:solidFill>
+          <a:ln w="12700">
+            <a:solidFill>
+              <a:srgbClr val="E3E1DE"/>
+            </a:solidFill>
+            <a:prstDash val="solid"/>
+          </a:ln>
+        </p:spPr>
+      </p:sp>
+      <p:sp>
+        <p:nvSpPr>
+          <p:cNvPr id="21" name="Text 21"/>
+          <p:cNvSpPr txBox="1"/>
+          <p:nvPr/>
+        </p:nvSpPr>
+        <p:spPr>
+          <a:xfrm>
+            <a:off x="812800" y="3721608"/>
+            <a:ext cx="3471333" cy="699516"/>
+          </a:xfrm>
+          <a:prstGeom prst="rect">
+            <a:avLst/>
+          </a:prstGeom>
+          <a:noFill/>
+          <a:ln/>
+        </p:spPr>
+        <p:txBody>
+          <a:bodyPr wrap="square" lIns="50800" tIns="76200" rIns="101600" bIns="50800" rtlCol="0" anchor="ctr"/>
+          <a:lstStyle/>
+          <a:p>
+            <a:pPr algn="l" indent="0" marL="0">
+              <a:spcAft>
+                <a:spcPts val="200"/>
+              </a:spcAft>
+              <a:buNone/>
+            </a:pPr>
+            <a:r>
+              <a:rPr lang="pt-BR" sz="1200" b="1" dirty="0">
+                <a:solidFill>
+                  <a:srgbClr val="141414"/>
+                </a:solidFill>
+                <a:latin typeface="Arial" pitchFamily="34" charset="0"/>
+                <a:ea typeface="Arial" pitchFamily="34" charset="-122"/>
+                <a:cs typeface="Arial" pitchFamily="34" charset="-120"/>
+              </a:rPr>
+              <a:t>FERNANDA AZEVEDO</a:t>
+            </a:r>
+            <a:endParaRPr lang="pt-BR" sz="1200" dirty="0"/>
+          </a:p>
+          <a:p>
+            <a:pPr algn="l" indent="0" marL="0">
+              <a:spcAft>
+                <a:spcPts val="200"/>
+              </a:spcAft>
+              <a:buNone/>
+            </a:pPr>
+            <a:r>
+              <a:rPr lang="pt-BR" sz="1200" dirty="0">
+                <a:solidFill>
+                  <a:srgbClr val="5E5E5E"/>
+                </a:solidFill>
+                <a:latin typeface="Arial" pitchFamily="34" charset="0"/>
+                <a:ea typeface="Arial" pitchFamily="34" charset="-122"/>
+                <a:cs typeface="Arial" pitchFamily="34" charset="-120"/>
+              </a:rPr>
+              <a:t>Planejadora de mídia · BR · Latam</a:t>
+            </a:r>
+            <a:endParaRPr lang="pt-BR" sz="1200" dirty="0"/>
+          </a:p>
+        </p:txBody>
+      </p:sp>
+      <p:sp>
+        <p:nvSpPr>
+          <p:cNvPr id="22" name="Shape 22"/>
+          <p:cNvSpPr/>
+          <p:nvPr/>
+        </p:nvSpPr>
+        <p:spPr>
+          <a:xfrm>
+            <a:off x="4360333" y="3721608"/>
+            <a:ext cx="3471333" cy="699516"/>
+          </a:xfrm>
+          <a:prstGeom prst="rect">
+            <a:avLst/>
+          </a:prstGeom>
+          <a:solidFill>
+            <a:srgbClr val="FFFFFF"/>
+          </a:solidFill>
+          <a:ln w="12700">
+            <a:solidFill>
+              <a:srgbClr val="E3E1DE"/>
+            </a:solidFill>
+            <a:prstDash val="solid"/>
+          </a:ln>
+        </p:spPr>
+      </p:sp>
+      <p:sp>
+        <p:nvSpPr>
+          <p:cNvPr id="23" name="Text 23"/>
+          <p:cNvSpPr txBox="1"/>
+          <p:nvPr/>
+        </p:nvSpPr>
+        <p:spPr>
+          <a:xfrm>
+            <a:off x="4360333" y="3721608"/>
+            <a:ext cx="3471333" cy="699516"/>
+          </a:xfrm>
+          <a:prstGeom prst="rect">
+            <a:avLst/>
+          </a:prstGeom>
+          <a:noFill/>
+          <a:ln/>
+        </p:spPr>
+        <p:txBody>
+          <a:bodyPr wrap="square" lIns="50800" tIns="76200" rIns="101600" bIns="50800" rtlCol="0" anchor="ctr"/>
+          <a:lstStyle/>
+          <a:p>
+            <a:pPr algn="l" indent="0" marL="0">
+              <a:spcAft>
+                <a:spcPts val="200"/>
+              </a:spcAft>
+              <a:buNone/>
+            </a:pPr>
+            <a:r>
+              <a:rPr lang="pt-BR" sz="1200" b="1" dirty="0">
+                <a:solidFill>
+                  <a:srgbClr val="141414"/>
+                </a:solidFill>
+                <a:latin typeface="Arial" pitchFamily="34" charset="0"/>
+                <a:ea typeface="Arial" pitchFamily="34" charset="-122"/>
+                <a:cs typeface="Arial" pitchFamily="34" charset="-120"/>
+              </a:rPr>
+              <a:t>CARLA AZEVEDO</a:t>
+            </a:r>
+            <a:endParaRPr lang="pt-BR" sz="1200" dirty="0"/>
+          </a:p>
+          <a:p>
+            <a:pPr algn="l" indent="0" marL="0">
+              <a:spcAft>
+                <a:spcPts val="200"/>
+              </a:spcAft>
+              <a:buNone/>
+            </a:pPr>
+            <a:r>
+              <a:rPr lang="pt-BR" sz="1200" dirty="0">
+                <a:solidFill>
+                  <a:srgbClr val="5E5E5E"/>
+                </a:solidFill>
+                <a:latin typeface="Arial" pitchFamily="34" charset="0"/>
+                <a:ea typeface="Arial" pitchFamily="34" charset="-122"/>
+                <a:cs typeface="Arial" pitchFamily="34" charset="-120"/>
+              </a:rPr>
+              <a:t>Planejadora de mídia · toda a frente offline</a:t>
+            </a:r>
+            <a:endParaRPr lang="pt-BR" sz="1200" dirty="0"/>
+          </a:p>
+        </p:txBody>
+      </p:sp>
+      <p:sp>
+        <p:nvSpPr>
+          <p:cNvPr id="24" name="Text 24"/>
+          <p:cNvSpPr txBox="1"/>
+          <p:nvPr/>
+        </p:nvSpPr>
+        <p:spPr>
+          <a:xfrm>
+            <a:off x="9474200" y="6311900"/>
+            <a:ext cx="1905000" cy="228600"/>
+          </a:xfrm>
+          <a:prstGeom prst="rect">
+            <a:avLst/>
+          </a:prstGeom>
+          <a:noFill/>
+          <a:ln/>
+        </p:spPr>
+        <p:txBody>
+          <a:bodyPr wrap="square" lIns="0" tIns="0" rIns="0" bIns="0" rtlCol="0" anchor="ctr"/>
+          <a:lstStyle/>
+          <a:p>
+            <a:pPr algn="l" indent="0" marL="0">
+              <a:buNone/>
+            </a:pPr>
+            <a:r>
+              <a:rPr lang="pt-BR" sz="1200" dirty="0">
+                <a:solidFill>
+                  <a:srgbClr val="141414"/>
+                </a:solidFill>
+                <a:latin typeface="Arial" pitchFamily="34" charset="0"/>
+                <a:ea typeface="Arial" pitchFamily="34" charset="-122"/>
+                <a:cs typeface="Arial" pitchFamily="34" charset="-120"/>
+              </a:rPr>
+              <a:t>Liderança (responde a)</a:t>
+            </a:r>
+            <a:endParaRPr lang="pt-BR" sz="1200" dirty="0"/>
+          </a:p>
+        </p:txBody>
+      </p:sp>
+      <p:sp>
+        <p:nvSpPr>
+          <p:cNvPr id="25" name="Shape 25"/>
+          <p:cNvSpPr/>
+          <p:nvPr/>
+        </p:nvSpPr>
+        <p:spPr>
+          <a:xfrm>
+            <a:off x="9042400" y="6426200"/>
+            <a:ext cx="355600" cy="0"/>
           </a:xfrm>
           <a:prstGeom prst="line">
             <a:avLst/>
@@ -6676,1195 +5965,7 @@
       </p:sp>
       <p:sp>
         <p:nvSpPr>
-          <p:cNvPr id="14" name="Text 14"/>
-          <p:cNvSpPr txBox="1"/>
-          <p:nvPr/>
-        </p:nvSpPr>
-        <p:spPr>
-          <a:xfrm>
-            <a:off x="812800" y="2641600"/>
-            <a:ext cx="3471333" cy="419100"/>
-          </a:xfrm>
-          <a:prstGeom prst="rect">
-            <a:avLst/>
-          </a:prstGeom>
-          <a:solidFill>
-            <a:srgbClr val="141414"/>
-          </a:solidFill>
-          <a:ln/>
-        </p:spPr>
-        <p:txBody>
-          <a:bodyPr wrap="square" lIns="50800" tIns="50800" rIns="50800" bIns="50800" rtlCol="0" anchor="ctr"/>
-          <a:lstStyle/>
-          <a:p>
-            <a:pPr algn="ctr" indent="0" marL="0">
-              <a:buNone/>
-            </a:pPr>
-            <a:r>
-              <a:rPr lang="pt-BR" sz="1600" b="1" dirty="0">
-                <a:solidFill>
-                  <a:srgbClr val="FFFFFF"/>
-                </a:solidFill>
-                <a:latin typeface="Arial" pitchFamily="34" charset="0"/>
-                <a:ea typeface="Arial" pitchFamily="34" charset="-122"/>
-                <a:cs typeface="Arial" pitchFamily="34" charset="-120"/>
-              </a:rPr>
-              <a:t>PDVX</a:t>
-            </a:r>
-            <a:endParaRPr lang="pt-BR" sz="1600" dirty="0"/>
-          </a:p>
-        </p:txBody>
-      </p:sp>
-      <p:sp>
-        <p:nvSpPr>
-          <p:cNvPr id="15" name="Shape 15"/>
-          <p:cNvSpPr/>
-          <p:nvPr/>
-        </p:nvSpPr>
-        <p:spPr>
-          <a:xfrm>
-            <a:off x="812800" y="3136900"/>
-            <a:ext cx="3471333" cy="521208"/>
-          </a:xfrm>
-          <a:prstGeom prst="rect">
-            <a:avLst/>
-          </a:prstGeom>
-          <a:solidFill>
-            <a:srgbClr val="FFFFFF"/>
-          </a:solidFill>
-          <a:ln w="19050">
-            <a:solidFill>
-              <a:srgbClr val="141414"/>
-            </a:solidFill>
-            <a:prstDash val="solid"/>
-          </a:ln>
-        </p:spPr>
-      </p:sp>
-      <p:sp>
-        <p:nvSpPr>
-          <p:cNvPr id="16" name="Text 16"/>
-          <p:cNvSpPr txBox="1"/>
-          <p:nvPr/>
-        </p:nvSpPr>
-        <p:spPr>
-          <a:xfrm>
-            <a:off x="812800" y="3136900"/>
-            <a:ext cx="3471333" cy="521208"/>
-          </a:xfrm>
-          <a:prstGeom prst="rect">
-            <a:avLst/>
-          </a:prstGeom>
-          <a:noFill/>
-          <a:ln/>
-        </p:spPr>
-        <p:txBody>
-          <a:bodyPr wrap="square" lIns="50800" tIns="76200" rIns="101600" bIns="50800" rtlCol="0" anchor="ctr"/>
-          <a:lstStyle/>
-          <a:p>
-            <a:pPr algn="ctr" indent="0" marL="0">
-              <a:spcAft>
-                <a:spcPts val="200"/>
-              </a:spcAft>
-              <a:buNone/>
-            </a:pPr>
-            <a:r>
-              <a:rPr lang="pt-BR" sz="1200" b="1" dirty="0">
-                <a:solidFill>
-                  <a:srgbClr val="141414"/>
-                </a:solidFill>
-                <a:latin typeface="Arial" pitchFamily="34" charset="0"/>
-                <a:ea typeface="Arial" pitchFamily="34" charset="-122"/>
-                <a:cs typeface="Arial" pitchFamily="34" charset="-120"/>
-              </a:rPr>
-              <a:t>ISMAEL GOLI</a:t>
-            </a:r>
-            <a:endParaRPr lang="pt-BR" sz="1200" dirty="0"/>
-          </a:p>
-          <a:p>
-            <a:pPr algn="ctr" indent="0" marL="0">
-              <a:spcAft>
-                <a:spcPts val="200"/>
-              </a:spcAft>
-              <a:buNone/>
-            </a:pPr>
-            <a:r>
-              <a:rPr lang="pt-BR" sz="1200" dirty="0">
-                <a:solidFill>
-                  <a:srgbClr val="5E5E5E"/>
-                </a:solidFill>
-                <a:latin typeface="Arial" pitchFamily="34" charset="0"/>
-                <a:ea typeface="Arial" pitchFamily="34" charset="-122"/>
-                <a:cs typeface="Arial" pitchFamily="34" charset="-120"/>
-              </a:rPr>
-              <a:t>Head de PDVX · BR · Latam</a:t>
-            </a:r>
-            <a:endParaRPr lang="pt-BR" sz="1200" dirty="0"/>
-          </a:p>
-        </p:txBody>
-      </p:sp>
-      <p:sp>
-        <p:nvSpPr>
-          <p:cNvPr id="17" name="Shape 17"/>
-          <p:cNvSpPr/>
-          <p:nvPr/>
-        </p:nvSpPr>
-        <p:spPr>
-          <a:xfrm>
-            <a:off x="812800" y="3721608"/>
-            <a:ext cx="3471333" cy="521208"/>
-          </a:xfrm>
-          <a:prstGeom prst="rect">
-            <a:avLst/>
-          </a:prstGeom>
-          <a:solidFill>
-            <a:srgbClr val="FFFFFF"/>
-          </a:solidFill>
-          <a:ln w="12700">
-            <a:solidFill>
-              <a:srgbClr val="E3E1DE"/>
-            </a:solidFill>
-            <a:prstDash val="solid"/>
-          </a:ln>
-        </p:spPr>
-      </p:sp>
-      <p:sp>
-        <p:nvSpPr>
-          <p:cNvPr id="18" name="Text 18"/>
-          <p:cNvSpPr txBox="1"/>
-          <p:nvPr/>
-        </p:nvSpPr>
-        <p:spPr>
-          <a:xfrm>
-            <a:off x="812800" y="3721608"/>
-            <a:ext cx="3471333" cy="521208"/>
-          </a:xfrm>
-          <a:prstGeom prst="rect">
-            <a:avLst/>
-          </a:prstGeom>
-          <a:noFill/>
-          <a:ln/>
-        </p:spPr>
-        <p:txBody>
-          <a:bodyPr wrap="square" lIns="50800" tIns="76200" rIns="101600" bIns="50800" rtlCol="0" anchor="ctr"/>
-          <a:lstStyle/>
-          <a:p>
-            <a:pPr algn="l" indent="0" marL="0">
-              <a:spcAft>
-                <a:spcPts val="200"/>
-              </a:spcAft>
-              <a:buNone/>
-            </a:pPr>
-            <a:r>
-              <a:rPr lang="pt-BR" sz="1200" b="1" dirty="0">
-                <a:solidFill>
-                  <a:srgbClr val="141414"/>
-                </a:solidFill>
-                <a:latin typeface="Arial" pitchFamily="34" charset="0"/>
-                <a:ea typeface="Arial" pitchFamily="34" charset="-122"/>
-                <a:cs typeface="Arial" pitchFamily="34" charset="-120"/>
-              </a:rPr>
-              <a:t>BIANCA JANOWSKI</a:t>
-            </a:r>
-            <a:endParaRPr lang="pt-BR" sz="1200" dirty="0"/>
-          </a:p>
-          <a:p>
-            <a:pPr algn="l" indent="0" marL="0">
-              <a:spcAft>
-                <a:spcPts val="200"/>
-              </a:spcAft>
-              <a:buNone/>
-            </a:pPr>
-            <a:r>
-              <a:rPr lang="pt-BR" sz="1200" dirty="0">
-                <a:solidFill>
-                  <a:srgbClr val="5E5E5E"/>
-                </a:solidFill>
-                <a:latin typeface="Arial" pitchFamily="34" charset="0"/>
-                <a:ea typeface="Arial" pitchFamily="34" charset="-122"/>
-                <a:cs typeface="Arial" pitchFamily="34" charset="-120"/>
-              </a:rPr>
-              <a:t>Designer sênior · BR · Latam</a:t>
-            </a:r>
-            <a:endParaRPr lang="pt-BR" sz="1200" dirty="0"/>
-          </a:p>
-        </p:txBody>
-      </p:sp>
-      <p:sp>
-        <p:nvSpPr>
-          <p:cNvPr id="19" name="Shape 19"/>
-          <p:cNvSpPr/>
-          <p:nvPr/>
-        </p:nvSpPr>
-        <p:spPr>
-          <a:xfrm>
-            <a:off x="812800" y="4306316"/>
-            <a:ext cx="3471333" cy="521208"/>
-          </a:xfrm>
-          <a:prstGeom prst="rect">
-            <a:avLst/>
-          </a:prstGeom>
-          <a:solidFill>
-            <a:srgbClr val="FFFFFF"/>
-          </a:solidFill>
-          <a:ln w="12700">
-            <a:solidFill>
-              <a:srgbClr val="E3E1DE"/>
-            </a:solidFill>
-            <a:prstDash val="solid"/>
-          </a:ln>
-        </p:spPr>
-      </p:sp>
-      <p:sp>
-        <p:nvSpPr>
-          <p:cNvPr id="20" name="Text 20"/>
-          <p:cNvSpPr txBox="1"/>
-          <p:nvPr/>
-        </p:nvSpPr>
-        <p:spPr>
-          <a:xfrm>
-            <a:off x="812800" y="4306316"/>
-            <a:ext cx="3471333" cy="521208"/>
-          </a:xfrm>
-          <a:prstGeom prst="rect">
-            <a:avLst/>
-          </a:prstGeom>
-          <a:noFill/>
-          <a:ln/>
-        </p:spPr>
-        <p:txBody>
-          <a:bodyPr wrap="square" lIns="50800" tIns="76200" rIns="101600" bIns="50800" rtlCol="0" anchor="ctr"/>
-          <a:lstStyle/>
-          <a:p>
-            <a:pPr algn="l" indent="0" marL="0">
-              <a:spcAft>
-                <a:spcPts val="200"/>
-              </a:spcAft>
-              <a:buNone/>
-            </a:pPr>
-            <a:r>
-              <a:rPr lang="pt-BR" sz="1200" b="1" dirty="0">
-                <a:solidFill>
-                  <a:srgbClr val="141414"/>
-                </a:solidFill>
-                <a:latin typeface="Arial" pitchFamily="34" charset="0"/>
-                <a:ea typeface="Arial" pitchFamily="34" charset="-122"/>
-                <a:cs typeface="Arial" pitchFamily="34" charset="-120"/>
-              </a:rPr>
-              <a:t>JOSÉ PORTELA</a:t>
-            </a:r>
-            <a:endParaRPr lang="pt-BR" sz="1200" dirty="0"/>
-          </a:p>
-          <a:p>
-            <a:pPr algn="l" indent="0" marL="0">
-              <a:spcAft>
-                <a:spcPts val="200"/>
-              </a:spcAft>
-              <a:buNone/>
-            </a:pPr>
-            <a:r>
-              <a:rPr lang="pt-BR" sz="1200" dirty="0">
-                <a:solidFill>
-                  <a:srgbClr val="5E5E5E"/>
-                </a:solidFill>
-                <a:latin typeface="Arial" pitchFamily="34" charset="0"/>
-                <a:ea typeface="Arial" pitchFamily="34" charset="-122"/>
-                <a:cs typeface="Arial" pitchFamily="34" charset="-120"/>
-              </a:rPr>
-              <a:t>Designer sênior · BR · Latam</a:t>
-            </a:r>
-            <a:endParaRPr lang="pt-BR" sz="1200" dirty="0"/>
-          </a:p>
-        </p:txBody>
-      </p:sp>
-      <p:sp>
-        <p:nvSpPr>
-          <p:cNvPr id="21" name="Text 21"/>
-          <p:cNvSpPr txBox="1"/>
-          <p:nvPr/>
-        </p:nvSpPr>
-        <p:spPr>
-          <a:xfrm>
-            <a:off x="4436533" y="2641600"/>
-            <a:ext cx="6942666" cy="419100"/>
-          </a:xfrm>
-          <a:prstGeom prst="rect">
-            <a:avLst/>
-          </a:prstGeom>
-          <a:solidFill>
-            <a:srgbClr val="EC6A3B"/>
-          </a:solidFill>
-          <a:ln/>
-        </p:spPr>
-        <p:txBody>
-          <a:bodyPr wrap="square" lIns="50800" tIns="50800" rIns="50800" bIns="50800" rtlCol="0" anchor="ctr"/>
-          <a:lstStyle/>
-          <a:p>
-            <a:pPr algn="ctr" indent="0" marL="0">
-              <a:buNone/>
-            </a:pPr>
-            <a:r>
-              <a:rPr lang="pt-BR" sz="1600" b="1" dirty="0">
-                <a:solidFill>
-                  <a:srgbClr val="FFFFFF"/>
-                </a:solidFill>
-                <a:latin typeface="Arial" pitchFamily="34" charset="0"/>
-                <a:ea typeface="Arial" pitchFamily="34" charset="-122"/>
-                <a:cs typeface="Arial" pitchFamily="34" charset="-120"/>
-              </a:rPr>
-              <a:t>CRIAÇÃO</a:t>
-            </a:r>
-            <a:endParaRPr lang="pt-BR" sz="1600" dirty="0"/>
-          </a:p>
-        </p:txBody>
-      </p:sp>
-      <p:sp>
-        <p:nvSpPr>
-          <p:cNvPr id="22" name="Shape 22"/>
-          <p:cNvSpPr/>
-          <p:nvPr/>
-        </p:nvSpPr>
-        <p:spPr>
-          <a:xfrm>
-            <a:off x="4436533" y="3136900"/>
-            <a:ext cx="6942666" cy="521208"/>
-          </a:xfrm>
-          <a:prstGeom prst="rect">
-            <a:avLst/>
-          </a:prstGeom>
-          <a:solidFill>
-            <a:srgbClr val="FFFFFF"/>
-          </a:solidFill>
-          <a:ln w="19050">
-            <a:solidFill>
-              <a:srgbClr val="EC6A3B"/>
-            </a:solidFill>
-            <a:prstDash val="solid"/>
-          </a:ln>
-        </p:spPr>
-      </p:sp>
-      <p:sp>
-        <p:nvSpPr>
-          <p:cNvPr id="23" name="Text 23"/>
-          <p:cNvSpPr txBox="1"/>
-          <p:nvPr/>
-        </p:nvSpPr>
-        <p:spPr>
-          <a:xfrm>
-            <a:off x="4436533" y="3136900"/>
-            <a:ext cx="6942666" cy="521208"/>
-          </a:xfrm>
-          <a:prstGeom prst="rect">
-            <a:avLst/>
-          </a:prstGeom>
-          <a:noFill/>
-          <a:ln/>
-        </p:spPr>
-        <p:txBody>
-          <a:bodyPr wrap="square" lIns="50800" tIns="76200" rIns="101600" bIns="50800" rtlCol="0" anchor="ctr"/>
-          <a:lstStyle/>
-          <a:p>
-            <a:pPr algn="ctr" indent="0" marL="0">
-              <a:spcAft>
-                <a:spcPts val="200"/>
-              </a:spcAft>
-              <a:buNone/>
-            </a:pPr>
-            <a:r>
-              <a:rPr lang="pt-BR" sz="1200" b="1" dirty="0">
-                <a:solidFill>
-                  <a:srgbClr val="141414"/>
-                </a:solidFill>
-                <a:latin typeface="Arial" pitchFamily="34" charset="0"/>
-                <a:ea typeface="Arial" pitchFamily="34" charset="-122"/>
-                <a:cs typeface="Arial" pitchFamily="34" charset="-120"/>
-              </a:rPr>
-              <a:t>RENATA MALINOSK</a:t>
-            </a:r>
-            <a:endParaRPr lang="pt-BR" sz="1200" dirty="0"/>
-          </a:p>
-          <a:p>
-            <a:pPr algn="ctr" indent="0" marL="0">
-              <a:spcAft>
-                <a:spcPts val="200"/>
-              </a:spcAft>
-              <a:buNone/>
-            </a:pPr>
-            <a:r>
-              <a:rPr lang="pt-BR" sz="1200" dirty="0">
-                <a:solidFill>
-                  <a:srgbClr val="5E5E5E"/>
-                </a:solidFill>
-                <a:latin typeface="Arial" pitchFamily="34" charset="0"/>
-                <a:ea typeface="Arial" pitchFamily="34" charset="-122"/>
-                <a:cs typeface="Arial" pitchFamily="34" charset="-120"/>
-              </a:rPr>
-              <a:t>Gerente de criação · BR · Latam · LRSA</a:t>
-            </a:r>
-            <a:endParaRPr lang="pt-BR" sz="1200" dirty="0"/>
-          </a:p>
-        </p:txBody>
-      </p:sp>
-      <p:sp>
-        <p:nvSpPr>
-          <p:cNvPr id="24" name="Shape 24"/>
-          <p:cNvSpPr/>
-          <p:nvPr/>
-        </p:nvSpPr>
-        <p:spPr>
-          <a:xfrm>
-            <a:off x="4436533" y="3721608"/>
-            <a:ext cx="3433233" cy="521208"/>
-          </a:xfrm>
-          <a:prstGeom prst="rect">
-            <a:avLst/>
-          </a:prstGeom>
-          <a:solidFill>
-            <a:srgbClr val="FFFFFF"/>
-          </a:solidFill>
-          <a:ln w="12700">
-            <a:solidFill>
-              <a:srgbClr val="E3E1DE"/>
-            </a:solidFill>
-            <a:prstDash val="solid"/>
-          </a:ln>
-        </p:spPr>
-      </p:sp>
-      <p:sp>
-        <p:nvSpPr>
-          <p:cNvPr id="25" name="Text 25"/>
-          <p:cNvSpPr txBox="1"/>
-          <p:nvPr/>
-        </p:nvSpPr>
-        <p:spPr>
-          <a:xfrm>
-            <a:off x="4436533" y="3721608"/>
-            <a:ext cx="3433233" cy="521208"/>
-          </a:xfrm>
-          <a:prstGeom prst="rect">
-            <a:avLst/>
-          </a:prstGeom>
-          <a:noFill/>
-          <a:ln/>
-        </p:spPr>
-        <p:txBody>
-          <a:bodyPr wrap="square" lIns="50800" tIns="76200" rIns="101600" bIns="50800" rtlCol="0" anchor="ctr"/>
-          <a:lstStyle/>
-          <a:p>
-            <a:pPr algn="l" indent="0" marL="0">
-              <a:spcAft>
-                <a:spcPts val="200"/>
-              </a:spcAft>
-              <a:buNone/>
-            </a:pPr>
-            <a:r>
-              <a:rPr lang="pt-BR" sz="1200" b="1" dirty="0">
-                <a:solidFill>
-                  <a:srgbClr val="141414"/>
-                </a:solidFill>
-                <a:latin typeface="Arial" pitchFamily="34" charset="0"/>
-                <a:ea typeface="Arial" pitchFamily="34" charset="-122"/>
-                <a:cs typeface="Arial" pitchFamily="34" charset="-120"/>
-              </a:rPr>
-              <a:t>PEDRO CORTELETTI</a:t>
-            </a:r>
-            <a:endParaRPr lang="pt-BR" sz="1200" dirty="0"/>
-          </a:p>
-          <a:p>
-            <a:pPr algn="l" indent="0" marL="0">
-              <a:spcAft>
-                <a:spcPts val="200"/>
-              </a:spcAft>
-              <a:buNone/>
-            </a:pPr>
-            <a:r>
-              <a:rPr lang="pt-BR" sz="1200" dirty="0">
-                <a:solidFill>
-                  <a:srgbClr val="5E5E5E"/>
-                </a:solidFill>
-                <a:latin typeface="Arial" pitchFamily="34" charset="0"/>
-                <a:ea typeface="Arial" pitchFamily="34" charset="-122"/>
-                <a:cs typeface="Arial" pitchFamily="34" charset="-120"/>
-              </a:rPr>
-              <a:t>D.A. sênior · BR · Latam · LRSA</a:t>
-            </a:r>
-            <a:endParaRPr lang="pt-BR" sz="1200" dirty="0"/>
-          </a:p>
-        </p:txBody>
-      </p:sp>
-      <p:sp>
-        <p:nvSpPr>
-          <p:cNvPr id="26" name="Shape 26"/>
-          <p:cNvSpPr/>
-          <p:nvPr/>
-        </p:nvSpPr>
-        <p:spPr>
-          <a:xfrm>
-            <a:off x="7945966" y="3721608"/>
-            <a:ext cx="3433233" cy="521208"/>
-          </a:xfrm>
-          <a:prstGeom prst="rect">
-            <a:avLst/>
-          </a:prstGeom>
-          <a:solidFill>
-            <a:srgbClr val="FFFFFF"/>
-          </a:solidFill>
-          <a:ln w="12700">
-            <a:solidFill>
-              <a:srgbClr val="E3E1DE"/>
-            </a:solidFill>
-            <a:prstDash val="solid"/>
-          </a:ln>
-        </p:spPr>
-      </p:sp>
-      <p:sp>
-        <p:nvSpPr>
-          <p:cNvPr id="27" name="Text 27"/>
-          <p:cNvSpPr txBox="1"/>
-          <p:nvPr/>
-        </p:nvSpPr>
-        <p:spPr>
-          <a:xfrm>
-            <a:off x="7945966" y="3721608"/>
-            <a:ext cx="3433233" cy="521208"/>
-          </a:xfrm>
-          <a:prstGeom prst="rect">
-            <a:avLst/>
-          </a:prstGeom>
-          <a:noFill/>
-          <a:ln/>
-        </p:spPr>
-        <p:txBody>
-          <a:bodyPr wrap="square" lIns="50800" tIns="76200" rIns="101600" bIns="50800" rtlCol="0" anchor="ctr"/>
-          <a:lstStyle/>
-          <a:p>
-            <a:pPr algn="l" indent="0" marL="0">
-              <a:spcAft>
-                <a:spcPts val="200"/>
-              </a:spcAft>
-              <a:buNone/>
-            </a:pPr>
-            <a:r>
-              <a:rPr lang="pt-BR" sz="1200" b="1" dirty="0">
-                <a:solidFill>
-                  <a:srgbClr val="141414"/>
-                </a:solidFill>
-                <a:latin typeface="Arial" pitchFamily="34" charset="0"/>
-                <a:ea typeface="Arial" pitchFamily="34" charset="-122"/>
-                <a:cs typeface="Arial" pitchFamily="34" charset="-120"/>
-              </a:rPr>
-              <a:t>SAMUEL SALAMON</a:t>
-            </a:r>
-            <a:endParaRPr lang="pt-BR" sz="1200" dirty="0"/>
-          </a:p>
-          <a:p>
-            <a:pPr algn="l" indent="0" marL="0">
-              <a:spcAft>
-                <a:spcPts val="200"/>
-              </a:spcAft>
-              <a:buNone/>
-            </a:pPr>
-            <a:r>
-              <a:rPr lang="pt-BR" sz="1200" dirty="0">
-                <a:solidFill>
-                  <a:srgbClr val="5E5E5E"/>
-                </a:solidFill>
-                <a:latin typeface="Arial" pitchFamily="34" charset="0"/>
-                <a:ea typeface="Arial" pitchFamily="34" charset="-122"/>
-                <a:cs typeface="Arial" pitchFamily="34" charset="-120"/>
-              </a:rPr>
-              <a:t>Motion / D.A. pleno · BR · Latam · LRSA</a:t>
-            </a:r>
-            <a:endParaRPr lang="pt-BR" sz="1200" dirty="0"/>
-          </a:p>
-        </p:txBody>
-      </p:sp>
-      <p:sp>
-        <p:nvSpPr>
-          <p:cNvPr id="28" name="Shape 28"/>
-          <p:cNvSpPr/>
-          <p:nvPr/>
-        </p:nvSpPr>
-        <p:spPr>
-          <a:xfrm>
-            <a:off x="4436533" y="4306316"/>
-            <a:ext cx="3433233" cy="521208"/>
-          </a:xfrm>
-          <a:prstGeom prst="rect">
-            <a:avLst/>
-          </a:prstGeom>
-          <a:solidFill>
-            <a:srgbClr val="FFFFFF"/>
-          </a:solidFill>
-          <a:ln w="12700">
-            <a:solidFill>
-              <a:srgbClr val="E3E1DE"/>
-            </a:solidFill>
-            <a:prstDash val="solid"/>
-          </a:ln>
-        </p:spPr>
-      </p:sp>
-      <p:sp>
-        <p:nvSpPr>
-          <p:cNvPr id="29" name="Text 29"/>
-          <p:cNvSpPr txBox="1"/>
-          <p:nvPr/>
-        </p:nvSpPr>
-        <p:spPr>
-          <a:xfrm>
-            <a:off x="4436533" y="4306316"/>
-            <a:ext cx="3433233" cy="521208"/>
-          </a:xfrm>
-          <a:prstGeom prst="rect">
-            <a:avLst/>
-          </a:prstGeom>
-          <a:noFill/>
-          <a:ln/>
-        </p:spPr>
-        <p:txBody>
-          <a:bodyPr wrap="square" lIns="50800" tIns="76200" rIns="101600" bIns="50800" rtlCol="0" anchor="ctr"/>
-          <a:lstStyle/>
-          <a:p>
-            <a:pPr algn="l" indent="0" marL="0">
-              <a:spcAft>
-                <a:spcPts val="200"/>
-              </a:spcAft>
-              <a:buNone/>
-            </a:pPr>
-            <a:r>
-              <a:rPr lang="pt-BR" sz="1200" b="1" dirty="0">
-                <a:solidFill>
-                  <a:srgbClr val="141414"/>
-                </a:solidFill>
-                <a:latin typeface="Arial" pitchFamily="34" charset="0"/>
-                <a:ea typeface="Arial" pitchFamily="34" charset="-122"/>
-                <a:cs typeface="Arial" pitchFamily="34" charset="-120"/>
-              </a:rPr>
-              <a:t>IAGO FRANCISCO</a:t>
-            </a:r>
-            <a:endParaRPr lang="pt-BR" sz="1200" dirty="0"/>
-          </a:p>
-          <a:p>
-            <a:pPr algn="l" indent="0" marL="0">
-              <a:spcAft>
-                <a:spcPts val="200"/>
-              </a:spcAft>
-              <a:buNone/>
-            </a:pPr>
-            <a:r>
-              <a:rPr lang="pt-BR" sz="1200" dirty="0">
-                <a:solidFill>
-                  <a:srgbClr val="5E5E5E"/>
-                </a:solidFill>
-                <a:latin typeface="Arial" pitchFamily="34" charset="0"/>
-                <a:ea typeface="Arial" pitchFamily="34" charset="-122"/>
-                <a:cs typeface="Arial" pitchFamily="34" charset="-120"/>
-              </a:rPr>
-              <a:t>D.A. freela · BR · Latam · LRSA</a:t>
-            </a:r>
-            <a:endParaRPr lang="pt-BR" sz="1200" dirty="0"/>
-          </a:p>
-        </p:txBody>
-      </p:sp>
-      <p:sp>
-        <p:nvSpPr>
-          <p:cNvPr id="30" name="Shape 30"/>
-          <p:cNvSpPr/>
-          <p:nvPr/>
-        </p:nvSpPr>
-        <p:spPr>
-          <a:xfrm>
-            <a:off x="7945966" y="4306316"/>
-            <a:ext cx="3433233" cy="521208"/>
-          </a:xfrm>
-          <a:prstGeom prst="rect">
-            <a:avLst/>
-          </a:prstGeom>
-          <a:solidFill>
-            <a:srgbClr val="FFFFFF"/>
-          </a:solidFill>
-          <a:ln w="12700">
-            <a:solidFill>
-              <a:srgbClr val="E3E1DE"/>
-            </a:solidFill>
-            <a:prstDash val="solid"/>
-          </a:ln>
-        </p:spPr>
-      </p:sp>
-      <p:sp>
-        <p:nvSpPr>
-          <p:cNvPr id="31" name="Text 31"/>
-          <p:cNvSpPr txBox="1"/>
-          <p:nvPr/>
-        </p:nvSpPr>
-        <p:spPr>
-          <a:xfrm>
-            <a:off x="7945966" y="4306316"/>
-            <a:ext cx="3433233" cy="521208"/>
-          </a:xfrm>
-          <a:prstGeom prst="rect">
-            <a:avLst/>
-          </a:prstGeom>
-          <a:noFill/>
-          <a:ln/>
-        </p:spPr>
-        <p:txBody>
-          <a:bodyPr wrap="square" lIns="50800" tIns="76200" rIns="101600" bIns="50800" rtlCol="0" anchor="ctr"/>
-          <a:lstStyle/>
-          <a:p>
-            <a:pPr algn="l" indent="0" marL="0">
-              <a:spcAft>
-                <a:spcPts val="200"/>
-              </a:spcAft>
-              <a:buNone/>
-            </a:pPr>
-            <a:r>
-              <a:rPr lang="pt-BR" sz="1200" b="1" dirty="0">
-                <a:solidFill>
-                  <a:srgbClr val="141414"/>
-                </a:solidFill>
-                <a:latin typeface="Arial" pitchFamily="34" charset="0"/>
-                <a:ea typeface="Arial" pitchFamily="34" charset="-122"/>
-                <a:cs typeface="Arial" pitchFamily="34" charset="-120"/>
-              </a:rPr>
-              <a:t>GUILHERME LOURENÇO</a:t>
-            </a:r>
-            <a:endParaRPr lang="pt-BR" sz="1200" dirty="0"/>
-          </a:p>
-          <a:p>
-            <a:pPr algn="l" indent="0" marL="0">
-              <a:spcAft>
-                <a:spcPts val="200"/>
-              </a:spcAft>
-              <a:buNone/>
-            </a:pPr>
-            <a:r>
-              <a:rPr lang="pt-BR" sz="1200" dirty="0">
-                <a:solidFill>
-                  <a:srgbClr val="5E5E5E"/>
-                </a:solidFill>
-                <a:latin typeface="Arial" pitchFamily="34" charset="0"/>
-                <a:ea typeface="Arial" pitchFamily="34" charset="-122"/>
-                <a:cs typeface="Arial" pitchFamily="34" charset="-120"/>
-              </a:rPr>
-              <a:t>D.A. freela · BR · Latam · LRSA</a:t>
-            </a:r>
-            <a:endParaRPr lang="pt-BR" sz="1200" dirty="0"/>
-          </a:p>
-        </p:txBody>
-      </p:sp>
-      <p:sp>
-        <p:nvSpPr>
-          <p:cNvPr id="32" name="Shape 32"/>
-          <p:cNvSpPr/>
-          <p:nvPr/>
-        </p:nvSpPr>
-        <p:spPr>
-          <a:xfrm>
-            <a:off x="4436533" y="4891024"/>
-            <a:ext cx="3433233" cy="521208"/>
-          </a:xfrm>
-          <a:prstGeom prst="rect">
-            <a:avLst/>
-          </a:prstGeom>
-          <a:solidFill>
-            <a:srgbClr val="FFFFFF"/>
-          </a:solidFill>
-          <a:ln w="12700">
-            <a:solidFill>
-              <a:srgbClr val="E3E1DE"/>
-            </a:solidFill>
-            <a:prstDash val="solid"/>
-          </a:ln>
-        </p:spPr>
-      </p:sp>
-      <p:sp>
-        <p:nvSpPr>
-          <p:cNvPr id="33" name="Text 33"/>
-          <p:cNvSpPr txBox="1"/>
-          <p:nvPr/>
-        </p:nvSpPr>
-        <p:spPr>
-          <a:xfrm>
-            <a:off x="4436533" y="4891024"/>
-            <a:ext cx="3433233" cy="521208"/>
-          </a:xfrm>
-          <a:prstGeom prst="rect">
-            <a:avLst/>
-          </a:prstGeom>
-          <a:noFill/>
-          <a:ln/>
-        </p:spPr>
-        <p:txBody>
-          <a:bodyPr wrap="square" lIns="50800" tIns="76200" rIns="101600" bIns="50800" rtlCol="0" anchor="ctr"/>
-          <a:lstStyle/>
-          <a:p>
-            <a:pPr algn="l" indent="0" marL="0">
-              <a:spcAft>
-                <a:spcPts val="200"/>
-              </a:spcAft>
-              <a:buNone/>
-            </a:pPr>
-            <a:r>
-              <a:rPr lang="pt-BR" sz="1200" b="1" dirty="0">
-                <a:solidFill>
-                  <a:srgbClr val="141414"/>
-                </a:solidFill>
-                <a:latin typeface="Arial" pitchFamily="34" charset="0"/>
-                <a:ea typeface="Arial" pitchFamily="34" charset="-122"/>
-                <a:cs typeface="Arial" pitchFamily="34" charset="-120"/>
-              </a:rPr>
-              <a:t>LUANA VIEIRA SILVEIRA</a:t>
-            </a:r>
-            <a:endParaRPr lang="pt-BR" sz="1200" dirty="0"/>
-          </a:p>
-          <a:p>
-            <a:pPr algn="l" indent="0" marL="0">
-              <a:spcAft>
-                <a:spcPts val="200"/>
-              </a:spcAft>
-              <a:buNone/>
-            </a:pPr>
-            <a:r>
-              <a:rPr lang="pt-BR" sz="1200" dirty="0">
-                <a:solidFill>
-                  <a:srgbClr val="5E5E5E"/>
-                </a:solidFill>
-                <a:latin typeface="Arial" pitchFamily="34" charset="0"/>
-                <a:ea typeface="Arial" pitchFamily="34" charset="-122"/>
-                <a:cs typeface="Arial" pitchFamily="34" charset="-120"/>
-              </a:rPr>
-              <a:t>Redatora sênior · BR · Latam · LRSA</a:t>
-            </a:r>
-            <a:endParaRPr lang="pt-BR" sz="1200" dirty="0"/>
-          </a:p>
-        </p:txBody>
-      </p:sp>
-      <p:sp>
-        <p:nvSpPr>
-          <p:cNvPr id="34" name="Shape 34"/>
-          <p:cNvSpPr/>
-          <p:nvPr/>
-        </p:nvSpPr>
-        <p:spPr>
-          <a:xfrm>
-            <a:off x="7945966" y="4891024"/>
-            <a:ext cx="3433233" cy="521208"/>
-          </a:xfrm>
-          <a:prstGeom prst="rect">
-            <a:avLst/>
-          </a:prstGeom>
-          <a:solidFill>
-            <a:srgbClr val="FFFFFF"/>
-          </a:solidFill>
-          <a:ln w="12700">
-            <a:solidFill>
-              <a:srgbClr val="E3E1DE"/>
-            </a:solidFill>
-            <a:prstDash val="solid"/>
-          </a:ln>
-        </p:spPr>
-      </p:sp>
-      <p:sp>
-        <p:nvSpPr>
-          <p:cNvPr id="35" name="Text 35"/>
-          <p:cNvSpPr txBox="1"/>
-          <p:nvPr/>
-        </p:nvSpPr>
-        <p:spPr>
-          <a:xfrm>
-            <a:off x="7945966" y="4891024"/>
-            <a:ext cx="3433233" cy="521208"/>
-          </a:xfrm>
-          <a:prstGeom prst="rect">
-            <a:avLst/>
-          </a:prstGeom>
-          <a:noFill/>
-          <a:ln/>
-        </p:spPr>
-        <p:txBody>
-          <a:bodyPr wrap="square" lIns="50800" tIns="76200" rIns="101600" bIns="50800" rtlCol="0" anchor="ctr"/>
-          <a:lstStyle/>
-          <a:p>
-            <a:pPr algn="l" indent="0" marL="0">
-              <a:spcAft>
-                <a:spcPts val="200"/>
-              </a:spcAft>
-              <a:buNone/>
-            </a:pPr>
-            <a:r>
-              <a:rPr lang="pt-BR" sz="1200" b="1" dirty="0">
-                <a:solidFill>
-                  <a:srgbClr val="141414"/>
-                </a:solidFill>
-                <a:latin typeface="Arial" pitchFamily="34" charset="0"/>
-                <a:ea typeface="Arial" pitchFamily="34" charset="-122"/>
-                <a:cs typeface="Arial" pitchFamily="34" charset="-120"/>
-              </a:rPr>
-              <a:t>ANA LIVIA MARCILIO</a:t>
-            </a:r>
-            <a:endParaRPr lang="pt-BR" sz="1200" dirty="0"/>
-          </a:p>
-          <a:p>
-            <a:pPr algn="l" indent="0" marL="0">
-              <a:spcAft>
-                <a:spcPts val="200"/>
-              </a:spcAft>
-              <a:buNone/>
-            </a:pPr>
-            <a:r>
-              <a:rPr lang="pt-BR" sz="1200" dirty="0">
-                <a:solidFill>
-                  <a:srgbClr val="5E5E5E"/>
-                </a:solidFill>
-                <a:latin typeface="Arial" pitchFamily="34" charset="0"/>
-                <a:ea typeface="Arial" pitchFamily="34" charset="-122"/>
-                <a:cs typeface="Arial" pitchFamily="34" charset="-120"/>
-              </a:rPr>
-              <a:t>Redatora plena · BR · Latam · LRSA</a:t>
-            </a:r>
-            <a:endParaRPr lang="pt-BR" sz="1200" dirty="0"/>
-          </a:p>
-        </p:txBody>
-      </p:sp>
-      <p:sp>
-        <p:nvSpPr>
-          <p:cNvPr id="36" name="Shape 36"/>
-          <p:cNvSpPr/>
-          <p:nvPr/>
-        </p:nvSpPr>
-        <p:spPr>
-          <a:xfrm>
-            <a:off x="4436533" y="5475732"/>
-            <a:ext cx="3433233" cy="521208"/>
-          </a:xfrm>
-          <a:prstGeom prst="rect">
-            <a:avLst/>
-          </a:prstGeom>
-          <a:solidFill>
-            <a:srgbClr val="FFFFFF"/>
-          </a:solidFill>
-          <a:ln w="12700">
-            <a:solidFill>
-              <a:srgbClr val="E3E1DE"/>
-            </a:solidFill>
-            <a:prstDash val="solid"/>
-          </a:ln>
-        </p:spPr>
-      </p:sp>
-      <p:sp>
-        <p:nvSpPr>
-          <p:cNvPr id="37" name="Text 37"/>
-          <p:cNvSpPr txBox="1"/>
-          <p:nvPr/>
-        </p:nvSpPr>
-        <p:spPr>
-          <a:xfrm>
-            <a:off x="4436533" y="5475732"/>
-            <a:ext cx="3433233" cy="521208"/>
-          </a:xfrm>
-          <a:prstGeom prst="rect">
-            <a:avLst/>
-          </a:prstGeom>
-          <a:noFill/>
-          <a:ln/>
-        </p:spPr>
-        <p:txBody>
-          <a:bodyPr wrap="square" lIns="50800" tIns="76200" rIns="101600" bIns="50800" rtlCol="0" anchor="ctr"/>
-          <a:lstStyle/>
-          <a:p>
-            <a:pPr algn="l" indent="0" marL="0">
-              <a:spcAft>
-                <a:spcPts val="200"/>
-              </a:spcAft>
-              <a:buNone/>
-            </a:pPr>
-            <a:r>
-              <a:rPr lang="pt-BR" sz="1200" b="1" dirty="0">
-                <a:solidFill>
-                  <a:srgbClr val="141414"/>
-                </a:solidFill>
-                <a:latin typeface="Arial" pitchFamily="34" charset="0"/>
-                <a:ea typeface="Arial" pitchFamily="34" charset="-122"/>
-                <a:cs typeface="Arial" pitchFamily="34" charset="-120"/>
-              </a:rPr>
-              <a:t>ANE FRANKE</a:t>
-            </a:r>
-            <a:endParaRPr lang="pt-BR" sz="1200" dirty="0"/>
-          </a:p>
-          <a:p>
-            <a:pPr algn="l" indent="0" marL="0">
-              <a:spcAft>
-                <a:spcPts val="200"/>
-              </a:spcAft>
-              <a:buNone/>
-            </a:pPr>
-            <a:r>
-              <a:rPr lang="pt-BR" sz="1200" dirty="0">
-                <a:solidFill>
-                  <a:srgbClr val="5E5E5E"/>
-                </a:solidFill>
-                <a:latin typeface="Arial" pitchFamily="34" charset="0"/>
-                <a:ea typeface="Arial" pitchFamily="34" charset="-122"/>
-                <a:cs typeface="Arial" pitchFamily="34" charset="-120"/>
-              </a:rPr>
-              <a:t>Redatora plena · BR · Latam</a:t>
-            </a:r>
-            <a:endParaRPr lang="pt-BR" sz="1200" dirty="0"/>
-          </a:p>
-        </p:txBody>
-      </p:sp>
-      <p:sp>
-        <p:nvSpPr>
-          <p:cNvPr id="38" name="Shape 38"/>
-          <p:cNvSpPr/>
-          <p:nvPr/>
-        </p:nvSpPr>
-        <p:spPr>
-          <a:xfrm>
-            <a:off x="7945966" y="5475732"/>
-            <a:ext cx="3433233" cy="521208"/>
-          </a:xfrm>
-          <a:prstGeom prst="rect">
-            <a:avLst/>
-          </a:prstGeom>
-          <a:solidFill>
-            <a:srgbClr val="FFFFFF"/>
-          </a:solidFill>
-          <a:ln w="12700">
-            <a:solidFill>
-              <a:srgbClr val="E3E1DE"/>
-            </a:solidFill>
-            <a:prstDash val="solid"/>
-          </a:ln>
-        </p:spPr>
-      </p:sp>
-      <p:sp>
-        <p:nvSpPr>
-          <p:cNvPr id="39" name="Text 39"/>
-          <p:cNvSpPr txBox="1"/>
-          <p:nvPr/>
-        </p:nvSpPr>
-        <p:spPr>
-          <a:xfrm>
-            <a:off x="7945966" y="5475732"/>
-            <a:ext cx="3433233" cy="521208"/>
-          </a:xfrm>
-          <a:prstGeom prst="rect">
-            <a:avLst/>
-          </a:prstGeom>
-          <a:noFill/>
-          <a:ln/>
-        </p:spPr>
-        <p:txBody>
-          <a:bodyPr wrap="square" lIns="50800" tIns="76200" rIns="101600" bIns="50800" rtlCol="0" anchor="ctr"/>
-          <a:lstStyle/>
-          <a:p>
-            <a:pPr algn="l" indent="0" marL="0">
-              <a:spcAft>
-                <a:spcPts val="200"/>
-              </a:spcAft>
-              <a:buNone/>
-            </a:pPr>
-            <a:r>
-              <a:rPr lang="pt-BR" sz="1200" b="1" dirty="0">
-                <a:solidFill>
-                  <a:srgbClr val="141414"/>
-                </a:solidFill>
-                <a:latin typeface="Arial" pitchFamily="34" charset="0"/>
-                <a:ea typeface="Arial" pitchFamily="34" charset="-122"/>
-                <a:cs typeface="Arial" pitchFamily="34" charset="-120"/>
-              </a:rPr>
-              <a:t>VANESSA ARAUJO</a:t>
-            </a:r>
-            <a:endParaRPr lang="pt-BR" sz="1200" dirty="0"/>
-          </a:p>
-          <a:p>
-            <a:pPr algn="l" indent="0" marL="0">
-              <a:spcAft>
-                <a:spcPts val="200"/>
-              </a:spcAft>
-              <a:buNone/>
-            </a:pPr>
-            <a:r>
-              <a:rPr lang="pt-BR" sz="1200" dirty="0">
-                <a:solidFill>
-                  <a:srgbClr val="5E5E5E"/>
-                </a:solidFill>
-                <a:latin typeface="Arial" pitchFamily="34" charset="0"/>
-                <a:ea typeface="Arial" pitchFamily="34" charset="-122"/>
-                <a:cs typeface="Arial" pitchFamily="34" charset="-120"/>
-              </a:rPr>
-              <a:t>Redatora júnior/plena · BR · Latam · LRSA</a:t>
-            </a:r>
-            <a:endParaRPr lang="pt-BR" sz="1200" dirty="0"/>
-          </a:p>
-        </p:txBody>
-      </p:sp>
-      <p:sp>
-        <p:nvSpPr>
-          <p:cNvPr id="40" name="Text 40"/>
-          <p:cNvSpPr txBox="1"/>
-          <p:nvPr/>
-        </p:nvSpPr>
-        <p:spPr>
-          <a:xfrm>
-            <a:off x="9474200" y="6311900"/>
-            <a:ext cx="1905000" cy="228600"/>
-          </a:xfrm>
-          <a:prstGeom prst="rect">
-            <a:avLst/>
-          </a:prstGeom>
-          <a:noFill/>
-          <a:ln/>
-        </p:spPr>
-        <p:txBody>
-          <a:bodyPr wrap="square" lIns="0" tIns="0" rIns="0" bIns="0" rtlCol="0" anchor="ctr"/>
-          <a:lstStyle/>
-          <a:p>
-            <a:pPr algn="l" indent="0" marL="0">
-              <a:buNone/>
-            </a:pPr>
-            <a:r>
-              <a:rPr lang="pt-BR" sz="1200" dirty="0">
-                <a:solidFill>
-                  <a:srgbClr val="141414"/>
-                </a:solidFill>
-                <a:latin typeface="Arial" pitchFamily="34" charset="0"/>
-                <a:ea typeface="Arial" pitchFamily="34" charset="-122"/>
-                <a:cs typeface="Arial" pitchFamily="34" charset="-120"/>
-              </a:rPr>
-              <a:t>Liderança (responde a)</a:t>
-            </a:r>
-            <a:endParaRPr lang="pt-BR" sz="1200" dirty="0"/>
-          </a:p>
-        </p:txBody>
-      </p:sp>
-      <p:sp>
-        <p:nvSpPr>
-          <p:cNvPr id="41" name="Shape 41"/>
-          <p:cNvSpPr/>
-          <p:nvPr/>
-        </p:nvSpPr>
-        <p:spPr>
-          <a:xfrm>
-            <a:off x="9042400" y="6426200"/>
-            <a:ext cx="355600" cy="0"/>
-          </a:xfrm>
-          <a:prstGeom prst="line">
-            <a:avLst/>
-          </a:prstGeom>
-          <a:noFill/>
-          <a:ln w="19050">
-            <a:solidFill>
-              <a:srgbClr val="141414"/>
-            </a:solidFill>
-            <a:prstDash val="solid"/>
-          </a:ln>
-        </p:spPr>
-      </p:sp>
-      <p:sp>
-        <p:nvSpPr>
-          <p:cNvPr id="42" name="Text 42"/>
+          <p:cNvPr id="26" name="Text 26"/>
           <p:cNvSpPr txBox="1"/>
           <p:nvPr/>
         </p:nvSpPr>
@@ -7910,6 +6011,2873 @@
 </file>
 
 <file path=ppt/slides/slide5.xml><?xml version="1.0" encoding="utf-8"?>
+<p:sld xmlns:a="http://schemas.openxmlformats.org/drawingml/2006/main" xmlns:r="http://schemas.openxmlformats.org/officeDocument/2006/relationships" xmlns:p="http://schemas.openxmlformats.org/presentationml/2006/main">
+  <p:cSld name="Slide 1">
+    <p:bg>
+      <p:bgPr>
+        <a:solidFill>
+          <a:srgbClr val="FCFBF9"/>
+        </a:solidFill>
+      </p:bgPr>
+    </p:bg>
+    <p:spTree>
+      <p:nvGrpSpPr>
+        <p:cNvPr id="1" name=""/>
+        <p:cNvGrpSpPr/>
+        <p:nvPr/>
+      </p:nvGrpSpPr>
+      <p:grpSpPr>
+        <a:xfrm>
+          <a:off x="0" y="0"/>
+          <a:ext cx="0" cy="0"/>
+          <a:chOff x="0" y="0"/>
+          <a:chExt cx="0" cy="0"/>
+        </a:xfrm>
+      </p:grpSpPr>
+      <p:sp>
+        <p:nvSpPr>
+          <p:cNvPr id="2" name="Text 0"/>
+          <p:cNvSpPr txBox="1"/>
+          <p:nvPr/>
+        </p:nvSpPr>
+        <p:spPr>
+          <a:xfrm>
+            <a:off x="812800" y="304800"/>
+            <a:ext cx="2794000" cy="228600"/>
+          </a:xfrm>
+          <a:prstGeom prst="rect">
+            <a:avLst/>
+          </a:prstGeom>
+          <a:noFill/>
+          <a:ln/>
+        </p:spPr>
+        <p:txBody>
+          <a:bodyPr wrap="square" lIns="0" tIns="0" rIns="0" bIns="0" rtlCol="0" anchor="ctr"/>
+          <a:lstStyle/>
+          <a:p>
+            <a:pPr indent="0" marL="0">
+              <a:buNone/>
+            </a:pPr>
+            <a:r>
+              <a:rPr lang="en-US" sz="1400" b="1" dirty="0">
+                <a:solidFill>
+                  <a:srgbClr val="141414"/>
+                </a:solidFill>
+                <a:latin typeface="Arial" pitchFamily="34" charset="0"/>
+                <a:ea typeface="Arial" pitchFamily="34" charset="-122"/>
+                <a:cs typeface="Arial" pitchFamily="34" charset="-120"/>
+              </a:rPr>
+              <a:t>PAIM</a:t>
+            </a:r>
+            <a:pPr indent="0" marL="0">
+              <a:buNone/>
+            </a:pPr>
+            <a:r>
+              <a:rPr lang="en-US" sz="1400" dirty="0">
+                <a:solidFill>
+                  <a:srgbClr val="EC6A3B"/>
+                </a:solidFill>
+                <a:latin typeface="Arial" pitchFamily="34" charset="0"/>
+                <a:ea typeface="Arial" pitchFamily="34" charset="-122"/>
+                <a:cs typeface="Arial" pitchFamily="34" charset="-120"/>
+              </a:rPr>
+              <a:t>●</a:t>
+            </a:r>
+            <a:pPr indent="0" marL="0">
+              <a:buNone/>
+            </a:pPr>
+            <a:r>
+              <a:rPr lang="en-US" sz="1400" b="1" dirty="0">
+                <a:solidFill>
+                  <a:srgbClr val="141414"/>
+                </a:solidFill>
+                <a:latin typeface="Arial" pitchFamily="34" charset="0"/>
+                <a:ea typeface="Arial" pitchFamily="34" charset="-122"/>
+                <a:cs typeface="Arial" pitchFamily="34" charset="-120"/>
+              </a:rPr>
+              <a:t>UNITED CREATORS</a:t>
+            </a:r>
+            <a:endParaRPr lang="en-US" sz="1400" dirty="0"/>
+          </a:p>
+        </p:txBody>
+      </p:sp>
+      <p:sp>
+        <p:nvSpPr>
+          <p:cNvPr id="3" name="Text 1"/>
+          <p:cNvSpPr txBox="1"/>
+          <p:nvPr/>
+        </p:nvSpPr>
+        <p:spPr>
+          <a:xfrm>
+            <a:off x="3937000" y="304800"/>
+            <a:ext cx="5080000" cy="228600"/>
+          </a:xfrm>
+          <a:prstGeom prst="rect">
+            <a:avLst/>
+          </a:prstGeom>
+          <a:noFill/>
+          <a:ln/>
+        </p:spPr>
+        <p:txBody>
+          <a:bodyPr wrap="square" lIns="0" tIns="0" rIns="0" bIns="0" rtlCol="0" anchor="ctr"/>
+          <a:lstStyle/>
+          <a:p>
+            <a:pPr indent="0" marL="0">
+              <a:buNone/>
+            </a:pPr>
+            <a:r>
+              <a:rPr lang="en-US" sz="1200" b="1" dirty="0">
+                <a:solidFill>
+                  <a:srgbClr val="141414"/>
+                </a:solidFill>
+                <a:latin typeface="Arial" pitchFamily="34" charset="0"/>
+                <a:ea typeface="Arial" pitchFamily="34" charset="-122"/>
+                <a:cs typeface="Arial" pitchFamily="34" charset="-120"/>
+              </a:rPr>
+              <a:t>O time de casa — Organograma time Renner</a:t>
+            </a:r>
+            <a:endParaRPr lang="en-US" sz="1200" dirty="0"/>
+          </a:p>
+        </p:txBody>
+      </p:sp>
+      <p:sp>
+        <p:nvSpPr>
+          <p:cNvPr id="4" name="Text 2"/>
+          <p:cNvSpPr txBox="1"/>
+          <p:nvPr/>
+        </p:nvSpPr>
+        <p:spPr>
+          <a:xfrm>
+            <a:off x="812800" y="609600"/>
+            <a:ext cx="10566400" cy="482600"/>
+          </a:xfrm>
+          <a:prstGeom prst="rect">
+            <a:avLst/>
+          </a:prstGeom>
+          <a:noFill/>
+          <a:ln/>
+        </p:spPr>
+        <p:txBody>
+          <a:bodyPr wrap="square" lIns="0" tIns="0" rIns="0" bIns="0" rtlCol="0" anchor="ctr"/>
+          <a:lstStyle/>
+          <a:p>
+            <a:pPr indent="0" marL="0">
+              <a:buNone/>
+            </a:pPr>
+            <a:r>
+              <a:rPr lang="en-US" sz="3200" b="1" dirty="0">
+                <a:solidFill>
+                  <a:srgbClr val="141414"/>
+                </a:solidFill>
+                <a:latin typeface="Arial" pitchFamily="34" charset="0"/>
+                <a:ea typeface="Arial" pitchFamily="34" charset="-122"/>
+                <a:cs typeface="Arial" pitchFamily="34" charset="-120"/>
+              </a:rPr>
+              <a:t>RENNER · ANALYTICS E CRM</a:t>
+            </a:r>
+            <a:endParaRPr lang="en-US" sz="3200" dirty="0"/>
+          </a:p>
+        </p:txBody>
+      </p:sp>
+      <p:sp>
+        <p:nvSpPr>
+          <p:cNvPr id="5" name="Shape 5"/>
+          <p:cNvSpPr/>
+          <p:nvPr/>
+        </p:nvSpPr>
+        <p:spPr>
+          <a:xfrm>
+            <a:off x="3733800" y="1168400"/>
+            <a:ext cx="4724400" cy="558800"/>
+          </a:xfrm>
+          <a:prstGeom prst="rect">
+            <a:avLst/>
+          </a:prstGeom>
+          <a:solidFill>
+            <a:srgbClr val="EC6A3B"/>
+          </a:solidFill>
+          <a:ln/>
+        </p:spPr>
+      </p:sp>
+      <p:sp>
+        <p:nvSpPr>
+          <p:cNvPr id="6" name="Text 6"/>
+          <p:cNvSpPr txBox="1"/>
+          <p:nvPr/>
+        </p:nvSpPr>
+        <p:spPr>
+          <a:xfrm>
+            <a:off x="3733800" y="1168400"/>
+            <a:ext cx="4724400" cy="558800"/>
+          </a:xfrm>
+          <a:prstGeom prst="rect">
+            <a:avLst/>
+          </a:prstGeom>
+          <a:noFill/>
+          <a:ln/>
+        </p:spPr>
+        <p:txBody>
+          <a:bodyPr wrap="square" lIns="50800" tIns="76200" rIns="101600" bIns="50800" rtlCol="0" anchor="ctr"/>
+          <a:lstStyle/>
+          <a:p>
+            <a:pPr algn="ctr" indent="0" marL="0">
+              <a:spcAft>
+                <a:spcPts val="200"/>
+              </a:spcAft>
+              <a:buNone/>
+            </a:pPr>
+            <a:r>
+              <a:rPr lang="pt-BR" sz="1300" b="1" dirty="0">
+                <a:solidFill>
+                  <a:srgbClr val="FFFFFF"/>
+                </a:solidFill>
+                <a:latin typeface="Arial" pitchFamily="34" charset="0"/>
+                <a:ea typeface="Arial" pitchFamily="34" charset="-122"/>
+                <a:cs typeface="Arial" pitchFamily="34" charset="-120"/>
+              </a:rPr>
+              <a:t>DIREÇÃO DE ANALYTICS E CRM · LUCAS DINIZ</a:t>
+            </a:r>
+            <a:endParaRPr lang="pt-BR" sz="1300" dirty="0"/>
+          </a:p>
+          <a:p>
+            <a:pPr algn="ctr" indent="0" marL="0">
+              <a:spcAft>
+                <a:spcPts val="200"/>
+              </a:spcAft>
+              <a:buNone/>
+            </a:pPr>
+            <a:r>
+              <a:rPr lang="pt-BR" sz="1200" dirty="0">
+                <a:solidFill>
+                  <a:srgbClr val="FFFFFF"/>
+                </a:solidFill>
+                <a:latin typeface="Arial" pitchFamily="34" charset="0"/>
+                <a:ea typeface="Arial" pitchFamily="34" charset="-122"/>
+                <a:cs typeface="Arial" pitchFamily="34" charset="-120"/>
+              </a:rPr>
+              <a:t>Renner BR · Renner Latam · LRSA</a:t>
+            </a:r>
+            <a:endParaRPr lang="pt-BR" sz="1200" dirty="0"/>
+          </a:p>
+        </p:txBody>
+      </p:sp>
+      <p:sp>
+        <p:nvSpPr>
+          <p:cNvPr id="7" name="Shape 7"/>
+          <p:cNvSpPr/>
+          <p:nvPr/>
+        </p:nvSpPr>
+        <p:spPr>
+          <a:xfrm>
+            <a:off x="6096000" y="1727200"/>
+            <a:ext cx="0" cy="101600"/>
+          </a:xfrm>
+          <a:prstGeom prst="line">
+            <a:avLst/>
+          </a:prstGeom>
+          <a:noFill/>
+          <a:ln w="19050">
+            <a:solidFill>
+              <a:srgbClr val="141414"/>
+            </a:solidFill>
+            <a:prstDash val="solid"/>
+          </a:ln>
+        </p:spPr>
+      </p:sp>
+      <p:sp>
+        <p:nvSpPr>
+          <p:cNvPr id="8" name="Shape 8"/>
+          <p:cNvSpPr/>
+          <p:nvPr/>
+        </p:nvSpPr>
+        <p:spPr>
+          <a:xfrm>
+            <a:off x="4445000" y="1828800"/>
+            <a:ext cx="3302000" cy="558800"/>
+          </a:xfrm>
+          <a:prstGeom prst="rect">
+            <a:avLst/>
+          </a:prstGeom>
+          <a:solidFill>
+            <a:srgbClr val="EFEEEC"/>
+          </a:solidFill>
+          <a:ln/>
+        </p:spPr>
+      </p:sp>
+      <p:sp>
+        <p:nvSpPr>
+          <p:cNvPr id="9" name="Text 9"/>
+          <p:cNvSpPr txBox="1"/>
+          <p:nvPr/>
+        </p:nvSpPr>
+        <p:spPr>
+          <a:xfrm>
+            <a:off x="4445000" y="1828800"/>
+            <a:ext cx="3302000" cy="558800"/>
+          </a:xfrm>
+          <a:prstGeom prst="rect">
+            <a:avLst/>
+          </a:prstGeom>
+          <a:noFill/>
+          <a:ln/>
+        </p:spPr>
+        <p:txBody>
+          <a:bodyPr wrap="square" lIns="50800" tIns="76200" rIns="101600" bIns="50800" rtlCol="0" anchor="ctr"/>
+          <a:lstStyle/>
+          <a:p>
+            <a:pPr algn="ctr" indent="0" marL="0">
+              <a:spcAft>
+                <a:spcPts val="200"/>
+              </a:spcAft>
+              <a:buNone/>
+            </a:pPr>
+            <a:r>
+              <a:rPr lang="pt-BR" sz="1300" b="1" dirty="0">
+                <a:solidFill>
+                  <a:srgbClr val="141414"/>
+                </a:solidFill>
+                <a:latin typeface="Arial" pitchFamily="34" charset="0"/>
+                <a:ea typeface="Arial" pitchFamily="34" charset="-122"/>
+                <a:cs typeface="Arial" pitchFamily="34" charset="-120"/>
+              </a:rPr>
+              <a:t>JOÃO MALOSSI</a:t>
+            </a:r>
+            <a:endParaRPr lang="pt-BR" sz="1300" dirty="0"/>
+          </a:p>
+          <a:p>
+            <a:pPr algn="ctr" indent="0" marL="0">
+              <a:spcAft>
+                <a:spcPts val="200"/>
+              </a:spcAft>
+              <a:buNone/>
+            </a:pPr>
+            <a:r>
+              <a:rPr lang="pt-BR" sz="1200" dirty="0">
+                <a:solidFill>
+                  <a:srgbClr val="5E5E5E"/>
+                </a:solidFill>
+                <a:latin typeface="Arial" pitchFamily="34" charset="0"/>
+                <a:ea typeface="Arial" pitchFamily="34" charset="-122"/>
+                <a:cs typeface="Arial" pitchFamily="34" charset="-120"/>
+              </a:rPr>
+              <a:t>Head de BI · BR · Latam</a:t>
+            </a:r>
+            <a:endParaRPr lang="pt-BR" sz="1200" dirty="0"/>
+          </a:p>
+        </p:txBody>
+      </p:sp>
+      <p:sp>
+        <p:nvSpPr>
+          <p:cNvPr id="10" name="Shape 10"/>
+          <p:cNvSpPr/>
+          <p:nvPr/>
+        </p:nvSpPr>
+        <p:spPr>
+          <a:xfrm>
+            <a:off x="6096000" y="2387600"/>
+            <a:ext cx="0" cy="127000"/>
+          </a:xfrm>
+          <a:prstGeom prst="line">
+            <a:avLst/>
+          </a:prstGeom>
+          <a:noFill/>
+          <a:ln w="19050">
+            <a:solidFill>
+              <a:srgbClr val="141414"/>
+            </a:solidFill>
+            <a:prstDash val="solid"/>
+          </a:ln>
+        </p:spPr>
+      </p:sp>
+      <p:sp>
+        <p:nvSpPr>
+          <p:cNvPr id="11" name="Shape 11"/>
+          <p:cNvSpPr/>
+          <p:nvPr/>
+        </p:nvSpPr>
+        <p:spPr>
+          <a:xfrm>
+            <a:off x="6096000" y="2514600"/>
+            <a:ext cx="0" cy="0"/>
+          </a:xfrm>
+          <a:prstGeom prst="line">
+            <a:avLst/>
+          </a:prstGeom>
+          <a:noFill/>
+          <a:ln w="19050">
+            <a:solidFill>
+              <a:srgbClr val="141414"/>
+            </a:solidFill>
+            <a:prstDash val="solid"/>
+          </a:ln>
+        </p:spPr>
+      </p:sp>
+      <p:sp>
+        <p:nvSpPr>
+          <p:cNvPr id="12" name="Shape 12"/>
+          <p:cNvSpPr/>
+          <p:nvPr/>
+        </p:nvSpPr>
+        <p:spPr>
+          <a:xfrm>
+            <a:off x="6096000" y="2514600"/>
+            <a:ext cx="0" cy="127000"/>
+          </a:xfrm>
+          <a:prstGeom prst="line">
+            <a:avLst/>
+          </a:prstGeom>
+          <a:noFill/>
+          <a:ln w="19050">
+            <a:solidFill>
+              <a:srgbClr val="141414"/>
+            </a:solidFill>
+            <a:prstDash val="solid"/>
+          </a:ln>
+        </p:spPr>
+      </p:sp>
+      <p:sp>
+        <p:nvSpPr>
+          <p:cNvPr id="13" name="Text 13"/>
+          <p:cNvSpPr txBox="1"/>
+          <p:nvPr/>
+        </p:nvSpPr>
+        <p:spPr>
+          <a:xfrm>
+            <a:off x="812800" y="2641600"/>
+            <a:ext cx="10566400" cy="419100"/>
+          </a:xfrm>
+          <a:prstGeom prst="rect">
+            <a:avLst/>
+          </a:prstGeom>
+          <a:solidFill>
+            <a:srgbClr val="141414"/>
+          </a:solidFill>
+          <a:ln/>
+        </p:spPr>
+        <p:txBody>
+          <a:bodyPr wrap="square" lIns="50800" tIns="50800" rIns="50800" bIns="50800" rtlCol="0" anchor="ctr"/>
+          <a:lstStyle/>
+          <a:p>
+            <a:pPr algn="ctr" indent="0" marL="0">
+              <a:buNone/>
+            </a:pPr>
+            <a:r>
+              <a:rPr lang="pt-BR" sz="1600" b="1" dirty="0">
+                <a:solidFill>
+                  <a:srgbClr val="FFFFFF"/>
+                </a:solidFill>
+                <a:latin typeface="Arial" pitchFamily="34" charset="0"/>
+                <a:ea typeface="Arial" pitchFamily="34" charset="-122"/>
+                <a:cs typeface="Arial" pitchFamily="34" charset="-120"/>
+              </a:rPr>
+              <a:t>BI E ANALYTICS</a:t>
+            </a:r>
+            <a:endParaRPr lang="pt-BR" sz="1600" dirty="0"/>
+          </a:p>
+        </p:txBody>
+      </p:sp>
+      <p:sp>
+        <p:nvSpPr>
+          <p:cNvPr id="14" name="Shape 14"/>
+          <p:cNvSpPr/>
+          <p:nvPr/>
+        </p:nvSpPr>
+        <p:spPr>
+          <a:xfrm>
+            <a:off x="812800" y="3136900"/>
+            <a:ext cx="10566400" cy="521208"/>
+          </a:xfrm>
+          <a:prstGeom prst="rect">
+            <a:avLst/>
+          </a:prstGeom>
+          <a:solidFill>
+            <a:srgbClr val="FFFFFF"/>
+          </a:solidFill>
+          <a:ln w="19050">
+            <a:solidFill>
+              <a:srgbClr val="141414"/>
+            </a:solidFill>
+            <a:prstDash val="solid"/>
+          </a:ln>
+        </p:spPr>
+      </p:sp>
+      <p:sp>
+        <p:nvSpPr>
+          <p:cNvPr id="15" name="Text 15"/>
+          <p:cNvSpPr txBox="1"/>
+          <p:nvPr/>
+        </p:nvSpPr>
+        <p:spPr>
+          <a:xfrm>
+            <a:off x="812800" y="3136900"/>
+            <a:ext cx="10566400" cy="521208"/>
+          </a:xfrm>
+          <a:prstGeom prst="rect">
+            <a:avLst/>
+          </a:prstGeom>
+          <a:noFill/>
+          <a:ln/>
+        </p:spPr>
+        <p:txBody>
+          <a:bodyPr wrap="square" lIns="50800" tIns="76200" rIns="101600" bIns="50800" rtlCol="0" anchor="ctr"/>
+          <a:lstStyle/>
+          <a:p>
+            <a:pPr algn="ctr" indent="0" marL="0">
+              <a:spcAft>
+                <a:spcPts val="200"/>
+              </a:spcAft>
+              <a:buNone/>
+            </a:pPr>
+            <a:r>
+              <a:rPr lang="pt-BR" sz="1200" b="1" dirty="0">
+                <a:solidFill>
+                  <a:srgbClr val="141414"/>
+                </a:solidFill>
+                <a:latin typeface="Arial" pitchFamily="34" charset="0"/>
+                <a:ea typeface="Arial" pitchFamily="34" charset="-122"/>
+                <a:cs typeface="Arial" pitchFamily="34" charset="-120"/>
+              </a:rPr>
+              <a:t>EDUARDA FRIEDRICH</a:t>
+            </a:r>
+            <a:endParaRPr lang="pt-BR" sz="1200" dirty="0"/>
+          </a:p>
+          <a:p>
+            <a:pPr algn="ctr" indent="0" marL="0">
+              <a:spcAft>
+                <a:spcPts val="200"/>
+              </a:spcAft>
+              <a:buNone/>
+            </a:pPr>
+            <a:r>
+              <a:rPr lang="pt-BR" sz="1200" dirty="0">
+                <a:solidFill>
+                  <a:srgbClr val="5E5E5E"/>
+                </a:solidFill>
+                <a:latin typeface="Arial" pitchFamily="34" charset="0"/>
+                <a:ea typeface="Arial" pitchFamily="34" charset="-122"/>
+                <a:cs typeface="Arial" pitchFamily="34" charset="-120"/>
+              </a:rPr>
+              <a:t>Líder de BI · BR · Latam · LRSA</a:t>
+            </a:r>
+            <a:endParaRPr lang="pt-BR" sz="1200" dirty="0"/>
+          </a:p>
+        </p:txBody>
+      </p:sp>
+      <p:sp>
+        <p:nvSpPr>
+          <p:cNvPr id="16" name="Shape 16"/>
+          <p:cNvSpPr/>
+          <p:nvPr/>
+        </p:nvSpPr>
+        <p:spPr>
+          <a:xfrm>
+            <a:off x="812800" y="3721608"/>
+            <a:ext cx="3471333" cy="699516"/>
+          </a:xfrm>
+          <a:prstGeom prst="rect">
+            <a:avLst/>
+          </a:prstGeom>
+          <a:solidFill>
+            <a:srgbClr val="FFFFFF"/>
+          </a:solidFill>
+          <a:ln w="12700">
+            <a:solidFill>
+              <a:srgbClr val="E3E1DE"/>
+            </a:solidFill>
+            <a:prstDash val="solid"/>
+          </a:ln>
+        </p:spPr>
+      </p:sp>
+      <p:sp>
+        <p:nvSpPr>
+          <p:cNvPr id="17" name="Text 17"/>
+          <p:cNvSpPr txBox="1"/>
+          <p:nvPr/>
+        </p:nvSpPr>
+        <p:spPr>
+          <a:xfrm>
+            <a:off x="812800" y="3721608"/>
+            <a:ext cx="3471333" cy="699516"/>
+          </a:xfrm>
+          <a:prstGeom prst="rect">
+            <a:avLst/>
+          </a:prstGeom>
+          <a:noFill/>
+          <a:ln/>
+        </p:spPr>
+        <p:txBody>
+          <a:bodyPr wrap="square" lIns="50800" tIns="76200" rIns="101600" bIns="50800" rtlCol="0" anchor="ctr"/>
+          <a:lstStyle/>
+          <a:p>
+            <a:pPr algn="l" indent="0" marL="0">
+              <a:spcAft>
+                <a:spcPts val="200"/>
+              </a:spcAft>
+              <a:buNone/>
+            </a:pPr>
+            <a:r>
+              <a:rPr lang="pt-BR" sz="1200" b="1" dirty="0">
+                <a:solidFill>
+                  <a:srgbClr val="141414"/>
+                </a:solidFill>
+                <a:latin typeface="Arial" pitchFamily="34" charset="0"/>
+                <a:ea typeface="Arial" pitchFamily="34" charset="-122"/>
+                <a:cs typeface="Arial" pitchFamily="34" charset="-120"/>
+              </a:rPr>
+              <a:t>THAMARA BASTOS OLIVEIRA</a:t>
+            </a:r>
+            <a:endParaRPr lang="pt-BR" sz="1200" dirty="0"/>
+          </a:p>
+          <a:p>
+            <a:pPr algn="l" indent="0" marL="0">
+              <a:spcAft>
+                <a:spcPts val="200"/>
+              </a:spcAft>
+              <a:buNone/>
+            </a:pPr>
+            <a:r>
+              <a:rPr lang="pt-BR" sz="1200" dirty="0">
+                <a:solidFill>
+                  <a:srgbClr val="5E5E5E"/>
+                </a:solidFill>
+                <a:latin typeface="Arial" pitchFamily="34" charset="0"/>
+                <a:ea typeface="Arial" pitchFamily="34" charset="-122"/>
+                <a:cs typeface="Arial" pitchFamily="34" charset="-120"/>
+              </a:rPr>
+              <a:t>Especialista de analytics · BR · Latam · LRSA</a:t>
+            </a:r>
+            <a:endParaRPr lang="pt-BR" sz="1200" dirty="0"/>
+          </a:p>
+        </p:txBody>
+      </p:sp>
+      <p:sp>
+        <p:nvSpPr>
+          <p:cNvPr id="18" name="Shape 18"/>
+          <p:cNvSpPr/>
+          <p:nvPr/>
+        </p:nvSpPr>
+        <p:spPr>
+          <a:xfrm>
+            <a:off x="4360333" y="3721608"/>
+            <a:ext cx="3471333" cy="699516"/>
+          </a:xfrm>
+          <a:prstGeom prst="rect">
+            <a:avLst/>
+          </a:prstGeom>
+          <a:solidFill>
+            <a:srgbClr val="FFFFFF"/>
+          </a:solidFill>
+          <a:ln w="12700">
+            <a:solidFill>
+              <a:srgbClr val="E3E1DE"/>
+            </a:solidFill>
+            <a:prstDash val="solid"/>
+          </a:ln>
+        </p:spPr>
+      </p:sp>
+      <p:sp>
+        <p:nvSpPr>
+          <p:cNvPr id="19" name="Text 19"/>
+          <p:cNvSpPr txBox="1"/>
+          <p:nvPr/>
+        </p:nvSpPr>
+        <p:spPr>
+          <a:xfrm>
+            <a:off x="4360333" y="3721608"/>
+            <a:ext cx="3471333" cy="699516"/>
+          </a:xfrm>
+          <a:prstGeom prst="rect">
+            <a:avLst/>
+          </a:prstGeom>
+          <a:noFill/>
+          <a:ln/>
+        </p:spPr>
+        <p:txBody>
+          <a:bodyPr wrap="square" lIns="50800" tIns="76200" rIns="101600" bIns="50800" rtlCol="0" anchor="ctr"/>
+          <a:lstStyle/>
+          <a:p>
+            <a:pPr algn="l" indent="0" marL="0">
+              <a:spcAft>
+                <a:spcPts val="200"/>
+              </a:spcAft>
+              <a:buNone/>
+            </a:pPr>
+            <a:r>
+              <a:rPr lang="pt-BR" sz="1200" b="1" dirty="0">
+                <a:solidFill>
+                  <a:srgbClr val="141414"/>
+                </a:solidFill>
+                <a:latin typeface="Arial" pitchFamily="34" charset="0"/>
+                <a:ea typeface="Arial" pitchFamily="34" charset="-122"/>
+                <a:cs typeface="Arial" pitchFamily="34" charset="-120"/>
+              </a:rPr>
+              <a:t>KEVI PEGORARO</a:t>
+            </a:r>
+            <a:endParaRPr lang="pt-BR" sz="1200" dirty="0"/>
+          </a:p>
+          <a:p>
+            <a:pPr algn="l" indent="0" marL="0">
+              <a:spcAft>
+                <a:spcPts val="200"/>
+              </a:spcAft>
+              <a:buNone/>
+            </a:pPr>
+            <a:r>
+              <a:rPr lang="pt-BR" sz="1200" dirty="0">
+                <a:solidFill>
+                  <a:srgbClr val="5E5E5E"/>
+                </a:solidFill>
+                <a:latin typeface="Arial" pitchFamily="34" charset="0"/>
+                <a:ea typeface="Arial" pitchFamily="34" charset="-122"/>
+                <a:cs typeface="Arial" pitchFamily="34" charset="-120"/>
+              </a:rPr>
+              <a:t>Cientista de dados · BR · Latam</a:t>
+            </a:r>
+            <a:endParaRPr lang="pt-BR" sz="1200" dirty="0"/>
+          </a:p>
+        </p:txBody>
+      </p:sp>
+      <p:sp>
+        <p:nvSpPr>
+          <p:cNvPr id="20" name="Shape 20"/>
+          <p:cNvSpPr/>
+          <p:nvPr/>
+        </p:nvSpPr>
+        <p:spPr>
+          <a:xfrm>
+            <a:off x="7907866" y="3721608"/>
+            <a:ext cx="3471333" cy="699516"/>
+          </a:xfrm>
+          <a:prstGeom prst="rect">
+            <a:avLst/>
+          </a:prstGeom>
+          <a:solidFill>
+            <a:srgbClr val="FFFFFF"/>
+          </a:solidFill>
+          <a:ln w="12700">
+            <a:solidFill>
+              <a:srgbClr val="E3E1DE"/>
+            </a:solidFill>
+            <a:prstDash val="solid"/>
+          </a:ln>
+        </p:spPr>
+      </p:sp>
+      <p:sp>
+        <p:nvSpPr>
+          <p:cNvPr id="21" name="Text 21"/>
+          <p:cNvSpPr txBox="1"/>
+          <p:nvPr/>
+        </p:nvSpPr>
+        <p:spPr>
+          <a:xfrm>
+            <a:off x="7907866" y="3721608"/>
+            <a:ext cx="3471333" cy="699516"/>
+          </a:xfrm>
+          <a:prstGeom prst="rect">
+            <a:avLst/>
+          </a:prstGeom>
+          <a:noFill/>
+          <a:ln/>
+        </p:spPr>
+        <p:txBody>
+          <a:bodyPr wrap="square" lIns="50800" tIns="76200" rIns="101600" bIns="50800" rtlCol="0" anchor="ctr"/>
+          <a:lstStyle/>
+          <a:p>
+            <a:pPr algn="l" indent="0" marL="0">
+              <a:spcAft>
+                <a:spcPts val="200"/>
+              </a:spcAft>
+              <a:buNone/>
+            </a:pPr>
+            <a:r>
+              <a:rPr lang="pt-BR" sz="1200" b="1" dirty="0">
+                <a:solidFill>
+                  <a:srgbClr val="141414"/>
+                </a:solidFill>
+                <a:latin typeface="Arial" pitchFamily="34" charset="0"/>
+                <a:ea typeface="Arial" pitchFamily="34" charset="-122"/>
+                <a:cs typeface="Arial" pitchFamily="34" charset="-120"/>
+              </a:rPr>
+              <a:t>ISABELA CANAL</a:t>
+            </a:r>
+            <a:endParaRPr lang="pt-BR" sz="1200" dirty="0"/>
+          </a:p>
+          <a:p>
+            <a:pPr algn="l" indent="0" marL="0">
+              <a:spcAft>
+                <a:spcPts val="200"/>
+              </a:spcAft>
+              <a:buNone/>
+            </a:pPr>
+            <a:r>
+              <a:rPr lang="pt-BR" sz="1200" dirty="0">
+                <a:solidFill>
+                  <a:srgbClr val="5E5E5E"/>
+                </a:solidFill>
+                <a:latin typeface="Arial" pitchFamily="34" charset="0"/>
+                <a:ea typeface="Arial" pitchFamily="34" charset="-122"/>
+                <a:cs typeface="Arial" pitchFamily="34" charset="-120"/>
+              </a:rPr>
+              <a:t>Analista de BI · BR · Latam</a:t>
+            </a:r>
+            <a:endParaRPr lang="pt-BR" sz="1200" dirty="0"/>
+          </a:p>
+        </p:txBody>
+      </p:sp>
+      <p:sp>
+        <p:nvSpPr>
+          <p:cNvPr id="22" name="Shape 22"/>
+          <p:cNvSpPr/>
+          <p:nvPr/>
+        </p:nvSpPr>
+        <p:spPr>
+          <a:xfrm>
+            <a:off x="812800" y="4484624"/>
+            <a:ext cx="3471333" cy="521208"/>
+          </a:xfrm>
+          <a:prstGeom prst="rect">
+            <a:avLst/>
+          </a:prstGeom>
+          <a:solidFill>
+            <a:srgbClr val="FFFFFF"/>
+          </a:solidFill>
+          <a:ln w="12700">
+            <a:solidFill>
+              <a:srgbClr val="E3E1DE"/>
+            </a:solidFill>
+            <a:prstDash val="solid"/>
+          </a:ln>
+        </p:spPr>
+      </p:sp>
+      <p:sp>
+        <p:nvSpPr>
+          <p:cNvPr id="23" name="Text 23"/>
+          <p:cNvSpPr txBox="1"/>
+          <p:nvPr/>
+        </p:nvSpPr>
+        <p:spPr>
+          <a:xfrm>
+            <a:off x="812800" y="4484624"/>
+            <a:ext cx="3471333" cy="521208"/>
+          </a:xfrm>
+          <a:prstGeom prst="rect">
+            <a:avLst/>
+          </a:prstGeom>
+          <a:noFill/>
+          <a:ln/>
+        </p:spPr>
+        <p:txBody>
+          <a:bodyPr wrap="square" lIns="50800" tIns="76200" rIns="101600" bIns="50800" rtlCol="0" anchor="ctr"/>
+          <a:lstStyle/>
+          <a:p>
+            <a:pPr algn="l" indent="0" marL="0">
+              <a:spcAft>
+                <a:spcPts val="200"/>
+              </a:spcAft>
+              <a:buNone/>
+            </a:pPr>
+            <a:r>
+              <a:rPr lang="pt-BR" sz="1200" b="1" dirty="0">
+                <a:solidFill>
+                  <a:srgbClr val="141414"/>
+                </a:solidFill>
+                <a:latin typeface="Arial" pitchFamily="34" charset="0"/>
+                <a:ea typeface="Arial" pitchFamily="34" charset="-122"/>
+                <a:cs typeface="Arial" pitchFamily="34" charset="-120"/>
+              </a:rPr>
+              <a:t>AMANDA OLIVEIRA</a:t>
+            </a:r>
+            <a:endParaRPr lang="pt-BR" sz="1200" dirty="0"/>
+          </a:p>
+          <a:p>
+            <a:pPr algn="l" indent="0" marL="0">
+              <a:spcAft>
+                <a:spcPts val="200"/>
+              </a:spcAft>
+              <a:buNone/>
+            </a:pPr>
+            <a:r>
+              <a:rPr lang="pt-BR" sz="1200" dirty="0">
+                <a:solidFill>
+                  <a:srgbClr val="5E5E5E"/>
+                </a:solidFill>
+                <a:latin typeface="Arial" pitchFamily="34" charset="0"/>
+                <a:ea typeface="Arial" pitchFamily="34" charset="-122"/>
+                <a:cs typeface="Arial" pitchFamily="34" charset="-120"/>
+              </a:rPr>
+              <a:t>Analista de BI · BR · Latam</a:t>
+            </a:r>
+            <a:endParaRPr lang="pt-BR" sz="1200" dirty="0"/>
+          </a:p>
+        </p:txBody>
+      </p:sp>
+      <p:sp>
+        <p:nvSpPr>
+          <p:cNvPr id="24" name="Shape 24"/>
+          <p:cNvSpPr/>
+          <p:nvPr/>
+        </p:nvSpPr>
+        <p:spPr>
+          <a:xfrm>
+            <a:off x="4360333" y="4484624"/>
+            <a:ext cx="3471333" cy="521208"/>
+          </a:xfrm>
+          <a:prstGeom prst="rect">
+            <a:avLst/>
+          </a:prstGeom>
+          <a:solidFill>
+            <a:srgbClr val="FFFFFF"/>
+          </a:solidFill>
+          <a:ln w="12700">
+            <a:solidFill>
+              <a:srgbClr val="E3E1DE"/>
+            </a:solidFill>
+            <a:prstDash val="solid"/>
+          </a:ln>
+        </p:spPr>
+      </p:sp>
+      <p:sp>
+        <p:nvSpPr>
+          <p:cNvPr id="25" name="Text 25"/>
+          <p:cNvSpPr txBox="1"/>
+          <p:nvPr/>
+        </p:nvSpPr>
+        <p:spPr>
+          <a:xfrm>
+            <a:off x="4360333" y="4484624"/>
+            <a:ext cx="3471333" cy="521208"/>
+          </a:xfrm>
+          <a:prstGeom prst="rect">
+            <a:avLst/>
+          </a:prstGeom>
+          <a:noFill/>
+          <a:ln/>
+        </p:spPr>
+        <p:txBody>
+          <a:bodyPr wrap="square" lIns="50800" tIns="76200" rIns="101600" bIns="50800" rtlCol="0" anchor="ctr"/>
+          <a:lstStyle/>
+          <a:p>
+            <a:pPr algn="l" indent="0" marL="0">
+              <a:spcAft>
+                <a:spcPts val="200"/>
+              </a:spcAft>
+              <a:buNone/>
+            </a:pPr>
+            <a:r>
+              <a:rPr lang="pt-BR" sz="1200" b="1" dirty="0">
+                <a:solidFill>
+                  <a:srgbClr val="141414"/>
+                </a:solidFill>
+                <a:latin typeface="Arial" pitchFamily="34" charset="0"/>
+                <a:ea typeface="Arial" pitchFamily="34" charset="-122"/>
+                <a:cs typeface="Arial" pitchFamily="34" charset="-120"/>
+              </a:rPr>
+              <a:t>JÚLIA DIAS</a:t>
+            </a:r>
+            <a:endParaRPr lang="pt-BR" sz="1200" dirty="0"/>
+          </a:p>
+          <a:p>
+            <a:pPr algn="l" indent="0" marL="0">
+              <a:spcAft>
+                <a:spcPts val="200"/>
+              </a:spcAft>
+              <a:buNone/>
+            </a:pPr>
+            <a:r>
+              <a:rPr lang="pt-BR" sz="1200" dirty="0">
+                <a:solidFill>
+                  <a:srgbClr val="5E5E5E"/>
+                </a:solidFill>
+                <a:latin typeface="Arial" pitchFamily="34" charset="0"/>
+                <a:ea typeface="Arial" pitchFamily="34" charset="-122"/>
+                <a:cs typeface="Arial" pitchFamily="34" charset="-120"/>
+              </a:rPr>
+              <a:t>Assistente de BI · BR · Latam</a:t>
+            </a:r>
+            <a:endParaRPr lang="pt-BR" sz="1200" dirty="0"/>
+          </a:p>
+        </p:txBody>
+      </p:sp>
+      <p:sp>
+        <p:nvSpPr>
+          <p:cNvPr id="26" name="Shape 26"/>
+          <p:cNvSpPr/>
+          <p:nvPr/>
+        </p:nvSpPr>
+        <p:spPr>
+          <a:xfrm>
+            <a:off x="7907866" y="4484624"/>
+            <a:ext cx="3471333" cy="521208"/>
+          </a:xfrm>
+          <a:prstGeom prst="rect">
+            <a:avLst/>
+          </a:prstGeom>
+          <a:solidFill>
+            <a:srgbClr val="FFFFFF"/>
+          </a:solidFill>
+          <a:ln w="12700">
+            <a:solidFill>
+              <a:srgbClr val="E3E1DE"/>
+            </a:solidFill>
+            <a:prstDash val="solid"/>
+          </a:ln>
+        </p:spPr>
+      </p:sp>
+      <p:sp>
+        <p:nvSpPr>
+          <p:cNvPr id="27" name="Text 27"/>
+          <p:cNvSpPr txBox="1"/>
+          <p:nvPr/>
+        </p:nvSpPr>
+        <p:spPr>
+          <a:xfrm>
+            <a:off x="7907866" y="4484624"/>
+            <a:ext cx="3471333" cy="521208"/>
+          </a:xfrm>
+          <a:prstGeom prst="rect">
+            <a:avLst/>
+          </a:prstGeom>
+          <a:noFill/>
+          <a:ln/>
+        </p:spPr>
+        <p:txBody>
+          <a:bodyPr wrap="square" lIns="50800" tIns="76200" rIns="101600" bIns="50800" rtlCol="0" anchor="ctr"/>
+          <a:lstStyle/>
+          <a:p>
+            <a:pPr algn="l" indent="0" marL="0">
+              <a:spcAft>
+                <a:spcPts val="200"/>
+              </a:spcAft>
+              <a:buNone/>
+            </a:pPr>
+            <a:r>
+              <a:rPr lang="pt-BR" sz="1200" b="1" dirty="0">
+                <a:solidFill>
+                  <a:srgbClr val="141414"/>
+                </a:solidFill>
+                <a:latin typeface="Arial" pitchFamily="34" charset="0"/>
+                <a:ea typeface="Arial" pitchFamily="34" charset="-122"/>
+                <a:cs typeface="Arial" pitchFamily="34" charset="-120"/>
+              </a:rPr>
+              <a:t>EDUARDO SCHOTKIS</a:t>
+            </a:r>
+            <a:endParaRPr lang="pt-BR" sz="1200" dirty="0"/>
+          </a:p>
+          <a:p>
+            <a:pPr algn="l" indent="0" marL="0">
+              <a:spcAft>
+                <a:spcPts val="200"/>
+              </a:spcAft>
+              <a:buNone/>
+            </a:pPr>
+            <a:r>
+              <a:rPr lang="pt-BR" sz="1200" dirty="0">
+                <a:solidFill>
+                  <a:srgbClr val="5E5E5E"/>
+                </a:solidFill>
+                <a:latin typeface="Arial" pitchFamily="34" charset="0"/>
+                <a:ea typeface="Arial" pitchFamily="34" charset="-122"/>
+                <a:cs typeface="Arial" pitchFamily="34" charset="-120"/>
+              </a:rPr>
+              <a:t>Assistente de BI · BR · Latam</a:t>
+            </a:r>
+            <a:endParaRPr lang="pt-BR" sz="1200" dirty="0"/>
+          </a:p>
+        </p:txBody>
+      </p:sp>
+      <p:sp>
+        <p:nvSpPr>
+          <p:cNvPr id="28" name="Text 28"/>
+          <p:cNvSpPr txBox="1"/>
+          <p:nvPr/>
+        </p:nvSpPr>
+        <p:spPr>
+          <a:xfrm>
+            <a:off x="9474200" y="6311900"/>
+            <a:ext cx="1905000" cy="228600"/>
+          </a:xfrm>
+          <a:prstGeom prst="rect">
+            <a:avLst/>
+          </a:prstGeom>
+          <a:noFill/>
+          <a:ln/>
+        </p:spPr>
+        <p:txBody>
+          <a:bodyPr wrap="square" lIns="0" tIns="0" rIns="0" bIns="0" rtlCol="0" anchor="ctr"/>
+          <a:lstStyle/>
+          <a:p>
+            <a:pPr algn="l" indent="0" marL="0">
+              <a:buNone/>
+            </a:pPr>
+            <a:r>
+              <a:rPr lang="pt-BR" sz="1200" dirty="0">
+                <a:solidFill>
+                  <a:srgbClr val="141414"/>
+                </a:solidFill>
+                <a:latin typeface="Arial" pitchFamily="34" charset="0"/>
+                <a:ea typeface="Arial" pitchFamily="34" charset="-122"/>
+                <a:cs typeface="Arial" pitchFamily="34" charset="-120"/>
+              </a:rPr>
+              <a:t>Liderança (responde a)</a:t>
+            </a:r>
+            <a:endParaRPr lang="pt-BR" sz="1200" dirty="0"/>
+          </a:p>
+        </p:txBody>
+      </p:sp>
+      <p:sp>
+        <p:nvSpPr>
+          <p:cNvPr id="29" name="Shape 29"/>
+          <p:cNvSpPr/>
+          <p:nvPr/>
+        </p:nvSpPr>
+        <p:spPr>
+          <a:xfrm>
+            <a:off x="9042400" y="6426200"/>
+            <a:ext cx="355600" cy="0"/>
+          </a:xfrm>
+          <a:prstGeom prst="line">
+            <a:avLst/>
+          </a:prstGeom>
+          <a:noFill/>
+          <a:ln w="19050">
+            <a:solidFill>
+              <a:srgbClr val="141414"/>
+            </a:solidFill>
+            <a:prstDash val="solid"/>
+          </a:ln>
+        </p:spPr>
+      </p:sp>
+      <p:sp>
+        <p:nvSpPr>
+          <p:cNvPr id="30" name="Text 30"/>
+          <p:cNvSpPr txBox="1"/>
+          <p:nvPr/>
+        </p:nvSpPr>
+        <p:spPr>
+          <a:xfrm>
+            <a:off x="812800" y="6311900"/>
+            <a:ext cx="7924800" cy="228600"/>
+          </a:xfrm>
+          <a:prstGeom prst="rect">
+            <a:avLst/>
+          </a:prstGeom>
+          <a:noFill/>
+          <a:ln/>
+        </p:spPr>
+        <p:txBody>
+          <a:bodyPr wrap="square" lIns="0" tIns="0" rIns="0" bIns="0" rtlCol="0" anchor="ctr"/>
+          <a:lstStyle/>
+          <a:p>
+            <a:pPr algn="l" indent="0" marL="0">
+              <a:buNone/>
+            </a:pPr>
+            <a:r>
+              <a:rPr lang="pt-BR" sz="1100" dirty="0">
+                <a:solidFill>
+                  <a:srgbClr val="5E5E5E"/>
+                </a:solidFill>
+                <a:latin typeface="Arial" pitchFamily="34" charset="0"/>
+                <a:ea typeface="Arial" pitchFamily="34" charset="-122"/>
+                <a:cs typeface="Arial" pitchFamily="34" charset="-120"/>
+              </a:rPr>
+              <a:t>Após o cargo: frentes de atuação (Renner BR, Renner Latam, LRSA, Conteúdo)</a:t>
+            </a:r>
+            <a:endParaRPr lang="pt-BR" sz="1100" dirty="0"/>
+          </a:p>
+        </p:txBody>
+      </p:sp>
+    </p:spTree>
+  </p:cSld>
+  <p:clrMapOvr>
+    <a:masterClrMapping/>
+  </p:clrMapOvr>
+</p:sld>
+</file>
+
+<file path=ppt/slides/slide6.xml><?xml version="1.0" encoding="utf-8"?>
+<p:sld xmlns:a="http://schemas.openxmlformats.org/drawingml/2006/main" xmlns:r="http://schemas.openxmlformats.org/officeDocument/2006/relationships" xmlns:p="http://schemas.openxmlformats.org/presentationml/2006/main">
+  <p:cSld name="Slide 1">
+    <p:bg>
+      <p:bgPr>
+        <a:solidFill>
+          <a:srgbClr val="FCFBF9"/>
+        </a:solidFill>
+      </p:bgPr>
+    </p:bg>
+    <p:spTree>
+      <p:nvGrpSpPr>
+        <p:cNvPr id="1" name=""/>
+        <p:cNvGrpSpPr/>
+        <p:nvPr/>
+      </p:nvGrpSpPr>
+      <p:grpSpPr>
+        <a:xfrm>
+          <a:off x="0" y="0"/>
+          <a:ext cx="0" cy="0"/>
+          <a:chOff x="0" y="0"/>
+          <a:chExt cx="0" cy="0"/>
+        </a:xfrm>
+      </p:grpSpPr>
+      <p:sp>
+        <p:nvSpPr>
+          <p:cNvPr id="2" name="Text 0"/>
+          <p:cNvSpPr txBox="1"/>
+          <p:nvPr/>
+        </p:nvSpPr>
+        <p:spPr>
+          <a:xfrm>
+            <a:off x="812800" y="304800"/>
+            <a:ext cx="2794000" cy="228600"/>
+          </a:xfrm>
+          <a:prstGeom prst="rect">
+            <a:avLst/>
+          </a:prstGeom>
+          <a:noFill/>
+          <a:ln/>
+        </p:spPr>
+        <p:txBody>
+          <a:bodyPr wrap="square" lIns="0" tIns="0" rIns="0" bIns="0" rtlCol="0" anchor="ctr"/>
+          <a:lstStyle/>
+          <a:p>
+            <a:pPr indent="0" marL="0">
+              <a:buNone/>
+            </a:pPr>
+            <a:r>
+              <a:rPr lang="en-US" sz="1400" b="1" dirty="0">
+                <a:solidFill>
+                  <a:srgbClr val="141414"/>
+                </a:solidFill>
+                <a:latin typeface="Arial" pitchFamily="34" charset="0"/>
+                <a:ea typeface="Arial" pitchFamily="34" charset="-122"/>
+                <a:cs typeface="Arial" pitchFamily="34" charset="-120"/>
+              </a:rPr>
+              <a:t>PAIM</a:t>
+            </a:r>
+            <a:pPr indent="0" marL="0">
+              <a:buNone/>
+            </a:pPr>
+            <a:r>
+              <a:rPr lang="en-US" sz="1400" dirty="0">
+                <a:solidFill>
+                  <a:srgbClr val="EC6A3B"/>
+                </a:solidFill>
+                <a:latin typeface="Arial" pitchFamily="34" charset="0"/>
+                <a:ea typeface="Arial" pitchFamily="34" charset="-122"/>
+                <a:cs typeface="Arial" pitchFamily="34" charset="-120"/>
+              </a:rPr>
+              <a:t>●</a:t>
+            </a:r>
+            <a:pPr indent="0" marL="0">
+              <a:buNone/>
+            </a:pPr>
+            <a:r>
+              <a:rPr lang="en-US" sz="1400" b="1" dirty="0">
+                <a:solidFill>
+                  <a:srgbClr val="141414"/>
+                </a:solidFill>
+                <a:latin typeface="Arial" pitchFamily="34" charset="0"/>
+                <a:ea typeface="Arial" pitchFamily="34" charset="-122"/>
+                <a:cs typeface="Arial" pitchFamily="34" charset="-120"/>
+              </a:rPr>
+              <a:t>UNITED CREATORS</a:t>
+            </a:r>
+            <a:endParaRPr lang="en-US" sz="1400" dirty="0"/>
+          </a:p>
+        </p:txBody>
+      </p:sp>
+      <p:sp>
+        <p:nvSpPr>
+          <p:cNvPr id="3" name="Text 1"/>
+          <p:cNvSpPr txBox="1"/>
+          <p:nvPr/>
+        </p:nvSpPr>
+        <p:spPr>
+          <a:xfrm>
+            <a:off x="3937000" y="304800"/>
+            <a:ext cx="5080000" cy="228600"/>
+          </a:xfrm>
+          <a:prstGeom prst="rect">
+            <a:avLst/>
+          </a:prstGeom>
+          <a:noFill/>
+          <a:ln/>
+        </p:spPr>
+        <p:txBody>
+          <a:bodyPr wrap="square" lIns="0" tIns="0" rIns="0" bIns="0" rtlCol="0" anchor="ctr"/>
+          <a:lstStyle/>
+          <a:p>
+            <a:pPr indent="0" marL="0">
+              <a:buNone/>
+            </a:pPr>
+            <a:r>
+              <a:rPr lang="en-US" sz="1200" b="1" dirty="0">
+                <a:solidFill>
+                  <a:srgbClr val="141414"/>
+                </a:solidFill>
+                <a:latin typeface="Arial" pitchFamily="34" charset="0"/>
+                <a:ea typeface="Arial" pitchFamily="34" charset="-122"/>
+                <a:cs typeface="Arial" pitchFamily="34" charset="-120"/>
+              </a:rPr>
+              <a:t>O time de casa — Organograma time Renner</a:t>
+            </a:r>
+            <a:endParaRPr lang="en-US" sz="1200" dirty="0"/>
+          </a:p>
+        </p:txBody>
+      </p:sp>
+      <p:sp>
+        <p:nvSpPr>
+          <p:cNvPr id="4" name="Text 2"/>
+          <p:cNvSpPr txBox="1"/>
+          <p:nvPr/>
+        </p:nvSpPr>
+        <p:spPr>
+          <a:xfrm>
+            <a:off x="812800" y="609600"/>
+            <a:ext cx="10566400" cy="482600"/>
+          </a:xfrm>
+          <a:prstGeom prst="rect">
+            <a:avLst/>
+          </a:prstGeom>
+          <a:noFill/>
+          <a:ln/>
+        </p:spPr>
+        <p:txBody>
+          <a:bodyPr wrap="square" lIns="0" tIns="0" rIns="0" bIns="0" rtlCol="0" anchor="ctr"/>
+          <a:lstStyle/>
+          <a:p>
+            <a:pPr indent="0" marL="0">
+              <a:buNone/>
+            </a:pPr>
+            <a:r>
+              <a:rPr lang="en-US" sz="3200" b="1" dirty="0">
+                <a:solidFill>
+                  <a:srgbClr val="141414"/>
+                </a:solidFill>
+                <a:latin typeface="Arial" pitchFamily="34" charset="0"/>
+                <a:ea typeface="Arial" pitchFamily="34" charset="-122"/>
+                <a:cs typeface="Arial" pitchFamily="34" charset="-120"/>
+              </a:rPr>
+              <a:t>RENNER · CRIAÇÃO</a:t>
+            </a:r>
+            <a:endParaRPr lang="en-US" sz="3200" dirty="0"/>
+          </a:p>
+        </p:txBody>
+      </p:sp>
+      <p:sp>
+        <p:nvSpPr>
+          <p:cNvPr id="5" name="Shape 5"/>
+          <p:cNvSpPr/>
+          <p:nvPr/>
+        </p:nvSpPr>
+        <p:spPr>
+          <a:xfrm>
+            <a:off x="4333113" y="1168400"/>
+            <a:ext cx="3525774" cy="558800"/>
+          </a:xfrm>
+          <a:prstGeom prst="rect">
+            <a:avLst/>
+          </a:prstGeom>
+          <a:solidFill>
+            <a:srgbClr val="EC6A3B"/>
+          </a:solidFill>
+          <a:ln/>
+        </p:spPr>
+      </p:sp>
+      <p:sp>
+        <p:nvSpPr>
+          <p:cNvPr id="6" name="Text 6"/>
+          <p:cNvSpPr txBox="1"/>
+          <p:nvPr/>
+        </p:nvSpPr>
+        <p:spPr>
+          <a:xfrm>
+            <a:off x="4333113" y="1168400"/>
+            <a:ext cx="3525774" cy="558800"/>
+          </a:xfrm>
+          <a:prstGeom prst="rect">
+            <a:avLst/>
+          </a:prstGeom>
+          <a:noFill/>
+          <a:ln/>
+        </p:spPr>
+        <p:txBody>
+          <a:bodyPr wrap="square" lIns="50800" tIns="76200" rIns="101600" bIns="50800" rtlCol="0" anchor="ctr"/>
+          <a:lstStyle/>
+          <a:p>
+            <a:pPr algn="ctr" indent="0" marL="0">
+              <a:spcAft>
+                <a:spcPts val="200"/>
+              </a:spcAft>
+              <a:buNone/>
+            </a:pPr>
+            <a:r>
+              <a:rPr lang="pt-BR" sz="1300" b="1" dirty="0">
+                <a:solidFill>
+                  <a:srgbClr val="FFFFFF"/>
+                </a:solidFill>
+                <a:latin typeface="Arial" pitchFamily="34" charset="0"/>
+                <a:ea typeface="Arial" pitchFamily="34" charset="-122"/>
+                <a:cs typeface="Arial" pitchFamily="34" charset="-120"/>
+              </a:rPr>
+              <a:t>VP DE CRIAÇÃO · RODRIGO PINTO</a:t>
+            </a:r>
+            <a:endParaRPr lang="pt-BR" sz="1300" dirty="0"/>
+          </a:p>
+          <a:p>
+            <a:pPr algn="ctr" indent="0" marL="0">
+              <a:spcAft>
+                <a:spcPts val="200"/>
+              </a:spcAft>
+              <a:buNone/>
+            </a:pPr>
+            <a:r>
+              <a:rPr lang="pt-BR" sz="1200" dirty="0">
+                <a:solidFill>
+                  <a:srgbClr val="FFFFFF"/>
+                </a:solidFill>
+                <a:latin typeface="Arial" pitchFamily="34" charset="0"/>
+                <a:ea typeface="Arial" pitchFamily="34" charset="-122"/>
+                <a:cs typeface="Arial" pitchFamily="34" charset="-120"/>
+              </a:rPr>
+              <a:t>BR · Latam · LRSA</a:t>
+            </a:r>
+            <a:endParaRPr lang="pt-BR" sz="1200" dirty="0"/>
+          </a:p>
+        </p:txBody>
+      </p:sp>
+      <p:sp>
+        <p:nvSpPr>
+          <p:cNvPr id="7" name="Shape 7"/>
+          <p:cNvSpPr/>
+          <p:nvPr/>
+        </p:nvSpPr>
+        <p:spPr>
+          <a:xfrm>
+            <a:off x="6096000" y="1727200"/>
+            <a:ext cx="0" cy="101600"/>
+          </a:xfrm>
+          <a:prstGeom prst="line">
+            <a:avLst/>
+          </a:prstGeom>
+          <a:noFill/>
+          <a:ln w="19050">
+            <a:solidFill>
+              <a:srgbClr val="141414"/>
+            </a:solidFill>
+            <a:prstDash val="solid"/>
+          </a:ln>
+        </p:spPr>
+      </p:sp>
+      <p:sp>
+        <p:nvSpPr>
+          <p:cNvPr id="8" name="Shape 8"/>
+          <p:cNvSpPr/>
+          <p:nvPr/>
+        </p:nvSpPr>
+        <p:spPr>
+          <a:xfrm>
+            <a:off x="3931920" y="1828800"/>
+            <a:ext cx="4328160" cy="558800"/>
+          </a:xfrm>
+          <a:prstGeom prst="rect">
+            <a:avLst/>
+          </a:prstGeom>
+          <a:solidFill>
+            <a:srgbClr val="EFEEEC"/>
+          </a:solidFill>
+          <a:ln/>
+        </p:spPr>
+      </p:sp>
+      <p:sp>
+        <p:nvSpPr>
+          <p:cNvPr id="9" name="Text 9"/>
+          <p:cNvSpPr txBox="1"/>
+          <p:nvPr/>
+        </p:nvSpPr>
+        <p:spPr>
+          <a:xfrm>
+            <a:off x="3931920" y="1828800"/>
+            <a:ext cx="4328160" cy="558800"/>
+          </a:xfrm>
+          <a:prstGeom prst="rect">
+            <a:avLst/>
+          </a:prstGeom>
+          <a:noFill/>
+          <a:ln/>
+        </p:spPr>
+        <p:txBody>
+          <a:bodyPr wrap="square" lIns="50800" tIns="76200" rIns="101600" bIns="50800" rtlCol="0" anchor="ctr"/>
+          <a:lstStyle/>
+          <a:p>
+            <a:pPr algn="ctr" indent="0" marL="0">
+              <a:spcAft>
+                <a:spcPts val="200"/>
+              </a:spcAft>
+              <a:buNone/>
+            </a:pPr>
+            <a:r>
+              <a:rPr lang="pt-BR" sz="1300" b="1" dirty="0">
+                <a:solidFill>
+                  <a:srgbClr val="141414"/>
+                </a:solidFill>
+                <a:latin typeface="Arial" pitchFamily="34" charset="0"/>
+                <a:ea typeface="Arial" pitchFamily="34" charset="-122"/>
+                <a:cs typeface="Arial" pitchFamily="34" charset="-120"/>
+              </a:rPr>
+              <a:t>DEH BASTOS</a:t>
+            </a:r>
+            <a:endParaRPr lang="pt-BR" sz="1300" dirty="0"/>
+          </a:p>
+          <a:p>
+            <a:pPr algn="ctr" indent="0" marL="0">
+              <a:spcAft>
+                <a:spcPts val="200"/>
+              </a:spcAft>
+              <a:buNone/>
+            </a:pPr>
+            <a:r>
+              <a:rPr lang="pt-BR" sz="1200" dirty="0">
+                <a:solidFill>
+                  <a:srgbClr val="5E5E5E"/>
+                </a:solidFill>
+                <a:latin typeface="Arial" pitchFamily="34" charset="0"/>
+                <a:ea typeface="Arial" pitchFamily="34" charset="-122"/>
+                <a:cs typeface="Arial" pitchFamily="34" charset="-120"/>
+              </a:rPr>
+              <a:t>Diretora de criação e conteúdo · BR · Latam · LRSA</a:t>
+            </a:r>
+            <a:endParaRPr lang="pt-BR" sz="1200" dirty="0"/>
+          </a:p>
+        </p:txBody>
+      </p:sp>
+      <p:sp>
+        <p:nvSpPr>
+          <p:cNvPr id="10" name="Shape 10"/>
+          <p:cNvSpPr/>
+          <p:nvPr/>
+        </p:nvSpPr>
+        <p:spPr>
+          <a:xfrm>
+            <a:off x="6096000" y="2387600"/>
+            <a:ext cx="0" cy="127000"/>
+          </a:xfrm>
+          <a:prstGeom prst="line">
+            <a:avLst/>
+          </a:prstGeom>
+          <a:noFill/>
+          <a:ln w="19050">
+            <a:solidFill>
+              <a:srgbClr val="141414"/>
+            </a:solidFill>
+            <a:prstDash val="solid"/>
+          </a:ln>
+        </p:spPr>
+      </p:sp>
+      <p:sp>
+        <p:nvSpPr>
+          <p:cNvPr id="11" name="Shape 11"/>
+          <p:cNvSpPr/>
+          <p:nvPr/>
+        </p:nvSpPr>
+        <p:spPr>
+          <a:xfrm>
+            <a:off x="2548466" y="2514600"/>
+            <a:ext cx="5359400" cy="0"/>
+          </a:xfrm>
+          <a:prstGeom prst="line">
+            <a:avLst/>
+          </a:prstGeom>
+          <a:noFill/>
+          <a:ln w="19050">
+            <a:solidFill>
+              <a:srgbClr val="141414"/>
+            </a:solidFill>
+            <a:prstDash val="solid"/>
+          </a:ln>
+        </p:spPr>
+      </p:sp>
+      <p:sp>
+        <p:nvSpPr>
+          <p:cNvPr id="12" name="Shape 12"/>
+          <p:cNvSpPr/>
+          <p:nvPr/>
+        </p:nvSpPr>
+        <p:spPr>
+          <a:xfrm>
+            <a:off x="2548466" y="2514600"/>
+            <a:ext cx="0" cy="127000"/>
+          </a:xfrm>
+          <a:prstGeom prst="line">
+            <a:avLst/>
+          </a:prstGeom>
+          <a:noFill/>
+          <a:ln w="19050">
+            <a:solidFill>
+              <a:srgbClr val="141414"/>
+            </a:solidFill>
+            <a:prstDash val="solid"/>
+          </a:ln>
+        </p:spPr>
+      </p:sp>
+      <p:sp>
+        <p:nvSpPr>
+          <p:cNvPr id="13" name="Shape 13"/>
+          <p:cNvSpPr/>
+          <p:nvPr/>
+        </p:nvSpPr>
+        <p:spPr>
+          <a:xfrm>
+            <a:off x="7907866" y="2514600"/>
+            <a:ext cx="0" cy="127000"/>
+          </a:xfrm>
+          <a:prstGeom prst="line">
+            <a:avLst/>
+          </a:prstGeom>
+          <a:noFill/>
+          <a:ln w="19050">
+            <a:solidFill>
+              <a:srgbClr val="141414"/>
+            </a:solidFill>
+            <a:prstDash val="solid"/>
+          </a:ln>
+        </p:spPr>
+      </p:sp>
+      <p:sp>
+        <p:nvSpPr>
+          <p:cNvPr id="14" name="Text 14"/>
+          <p:cNvSpPr txBox="1"/>
+          <p:nvPr/>
+        </p:nvSpPr>
+        <p:spPr>
+          <a:xfrm>
+            <a:off x="812800" y="2641600"/>
+            <a:ext cx="3471333" cy="419100"/>
+          </a:xfrm>
+          <a:prstGeom prst="rect">
+            <a:avLst/>
+          </a:prstGeom>
+          <a:solidFill>
+            <a:srgbClr val="141414"/>
+          </a:solidFill>
+          <a:ln/>
+        </p:spPr>
+        <p:txBody>
+          <a:bodyPr wrap="square" lIns="50800" tIns="50800" rIns="50800" bIns="50800" rtlCol="0" anchor="ctr"/>
+          <a:lstStyle/>
+          <a:p>
+            <a:pPr algn="ctr" indent="0" marL="0">
+              <a:buNone/>
+            </a:pPr>
+            <a:r>
+              <a:rPr lang="pt-BR" sz="1600" b="1" dirty="0">
+                <a:solidFill>
+                  <a:srgbClr val="FFFFFF"/>
+                </a:solidFill>
+                <a:latin typeface="Arial" pitchFamily="34" charset="0"/>
+                <a:ea typeface="Arial" pitchFamily="34" charset="-122"/>
+                <a:cs typeface="Arial" pitchFamily="34" charset="-120"/>
+              </a:rPr>
+              <a:t>PDVX</a:t>
+            </a:r>
+            <a:endParaRPr lang="pt-BR" sz="1600" dirty="0"/>
+          </a:p>
+        </p:txBody>
+      </p:sp>
+      <p:sp>
+        <p:nvSpPr>
+          <p:cNvPr id="15" name="Shape 15"/>
+          <p:cNvSpPr/>
+          <p:nvPr/>
+        </p:nvSpPr>
+        <p:spPr>
+          <a:xfrm>
+            <a:off x="812800" y="3136900"/>
+            <a:ext cx="3471333" cy="521208"/>
+          </a:xfrm>
+          <a:prstGeom prst="rect">
+            <a:avLst/>
+          </a:prstGeom>
+          <a:solidFill>
+            <a:srgbClr val="FFFFFF"/>
+          </a:solidFill>
+          <a:ln w="19050">
+            <a:solidFill>
+              <a:srgbClr val="141414"/>
+            </a:solidFill>
+            <a:prstDash val="solid"/>
+          </a:ln>
+        </p:spPr>
+      </p:sp>
+      <p:sp>
+        <p:nvSpPr>
+          <p:cNvPr id="16" name="Text 16"/>
+          <p:cNvSpPr txBox="1"/>
+          <p:nvPr/>
+        </p:nvSpPr>
+        <p:spPr>
+          <a:xfrm>
+            <a:off x="812800" y="3136900"/>
+            <a:ext cx="3471333" cy="521208"/>
+          </a:xfrm>
+          <a:prstGeom prst="rect">
+            <a:avLst/>
+          </a:prstGeom>
+          <a:noFill/>
+          <a:ln/>
+        </p:spPr>
+        <p:txBody>
+          <a:bodyPr wrap="square" lIns="50800" tIns="76200" rIns="101600" bIns="50800" rtlCol="0" anchor="ctr"/>
+          <a:lstStyle/>
+          <a:p>
+            <a:pPr algn="ctr" indent="0" marL="0">
+              <a:spcAft>
+                <a:spcPts val="200"/>
+              </a:spcAft>
+              <a:buNone/>
+            </a:pPr>
+            <a:r>
+              <a:rPr lang="pt-BR" sz="1200" b="1" dirty="0">
+                <a:solidFill>
+                  <a:srgbClr val="141414"/>
+                </a:solidFill>
+                <a:latin typeface="Arial" pitchFamily="34" charset="0"/>
+                <a:ea typeface="Arial" pitchFamily="34" charset="-122"/>
+                <a:cs typeface="Arial" pitchFamily="34" charset="-120"/>
+              </a:rPr>
+              <a:t>ISMAEL GOLI</a:t>
+            </a:r>
+            <a:endParaRPr lang="pt-BR" sz="1200" dirty="0"/>
+          </a:p>
+          <a:p>
+            <a:pPr algn="ctr" indent="0" marL="0">
+              <a:spcAft>
+                <a:spcPts val="200"/>
+              </a:spcAft>
+              <a:buNone/>
+            </a:pPr>
+            <a:r>
+              <a:rPr lang="pt-BR" sz="1200" dirty="0">
+                <a:solidFill>
+                  <a:srgbClr val="5E5E5E"/>
+                </a:solidFill>
+                <a:latin typeface="Arial" pitchFamily="34" charset="0"/>
+                <a:ea typeface="Arial" pitchFamily="34" charset="-122"/>
+                <a:cs typeface="Arial" pitchFamily="34" charset="-120"/>
+              </a:rPr>
+              <a:t>Head de PDVX · BR · Latam</a:t>
+            </a:r>
+            <a:endParaRPr lang="pt-BR" sz="1200" dirty="0"/>
+          </a:p>
+        </p:txBody>
+      </p:sp>
+      <p:sp>
+        <p:nvSpPr>
+          <p:cNvPr id="17" name="Shape 17"/>
+          <p:cNvSpPr/>
+          <p:nvPr/>
+        </p:nvSpPr>
+        <p:spPr>
+          <a:xfrm>
+            <a:off x="812800" y="3721608"/>
+            <a:ext cx="3471333" cy="521208"/>
+          </a:xfrm>
+          <a:prstGeom prst="rect">
+            <a:avLst/>
+          </a:prstGeom>
+          <a:solidFill>
+            <a:srgbClr val="FFFFFF"/>
+          </a:solidFill>
+          <a:ln w="12700">
+            <a:solidFill>
+              <a:srgbClr val="E3E1DE"/>
+            </a:solidFill>
+            <a:prstDash val="solid"/>
+          </a:ln>
+        </p:spPr>
+      </p:sp>
+      <p:sp>
+        <p:nvSpPr>
+          <p:cNvPr id="18" name="Text 18"/>
+          <p:cNvSpPr txBox="1"/>
+          <p:nvPr/>
+        </p:nvSpPr>
+        <p:spPr>
+          <a:xfrm>
+            <a:off x="812800" y="3721608"/>
+            <a:ext cx="3471333" cy="521208"/>
+          </a:xfrm>
+          <a:prstGeom prst="rect">
+            <a:avLst/>
+          </a:prstGeom>
+          <a:noFill/>
+          <a:ln/>
+        </p:spPr>
+        <p:txBody>
+          <a:bodyPr wrap="square" lIns="50800" tIns="76200" rIns="101600" bIns="50800" rtlCol="0" anchor="ctr"/>
+          <a:lstStyle/>
+          <a:p>
+            <a:pPr algn="l" indent="0" marL="0">
+              <a:spcAft>
+                <a:spcPts val="200"/>
+              </a:spcAft>
+              <a:buNone/>
+            </a:pPr>
+            <a:r>
+              <a:rPr lang="pt-BR" sz="1200" b="1" dirty="0">
+                <a:solidFill>
+                  <a:srgbClr val="141414"/>
+                </a:solidFill>
+                <a:latin typeface="Arial" pitchFamily="34" charset="0"/>
+                <a:ea typeface="Arial" pitchFamily="34" charset="-122"/>
+                <a:cs typeface="Arial" pitchFamily="34" charset="-120"/>
+              </a:rPr>
+              <a:t>BIANCA JANOWSKI</a:t>
+            </a:r>
+            <a:endParaRPr lang="pt-BR" sz="1200" dirty="0"/>
+          </a:p>
+          <a:p>
+            <a:pPr algn="l" indent="0" marL="0">
+              <a:spcAft>
+                <a:spcPts val="200"/>
+              </a:spcAft>
+              <a:buNone/>
+            </a:pPr>
+            <a:r>
+              <a:rPr lang="pt-BR" sz="1200" dirty="0">
+                <a:solidFill>
+                  <a:srgbClr val="5E5E5E"/>
+                </a:solidFill>
+                <a:latin typeface="Arial" pitchFamily="34" charset="0"/>
+                <a:ea typeface="Arial" pitchFamily="34" charset="-122"/>
+                <a:cs typeface="Arial" pitchFamily="34" charset="-120"/>
+              </a:rPr>
+              <a:t>Designer sênior · BR · Latam</a:t>
+            </a:r>
+            <a:endParaRPr lang="pt-BR" sz="1200" dirty="0"/>
+          </a:p>
+        </p:txBody>
+      </p:sp>
+      <p:sp>
+        <p:nvSpPr>
+          <p:cNvPr id="19" name="Shape 19"/>
+          <p:cNvSpPr/>
+          <p:nvPr/>
+        </p:nvSpPr>
+        <p:spPr>
+          <a:xfrm>
+            <a:off x="812800" y="4306316"/>
+            <a:ext cx="3471333" cy="521208"/>
+          </a:xfrm>
+          <a:prstGeom prst="rect">
+            <a:avLst/>
+          </a:prstGeom>
+          <a:solidFill>
+            <a:srgbClr val="FFFFFF"/>
+          </a:solidFill>
+          <a:ln w="12700">
+            <a:solidFill>
+              <a:srgbClr val="E3E1DE"/>
+            </a:solidFill>
+            <a:prstDash val="solid"/>
+          </a:ln>
+        </p:spPr>
+      </p:sp>
+      <p:sp>
+        <p:nvSpPr>
+          <p:cNvPr id="20" name="Text 20"/>
+          <p:cNvSpPr txBox="1"/>
+          <p:nvPr/>
+        </p:nvSpPr>
+        <p:spPr>
+          <a:xfrm>
+            <a:off x="812800" y="4306316"/>
+            <a:ext cx="3471333" cy="521208"/>
+          </a:xfrm>
+          <a:prstGeom prst="rect">
+            <a:avLst/>
+          </a:prstGeom>
+          <a:noFill/>
+          <a:ln/>
+        </p:spPr>
+        <p:txBody>
+          <a:bodyPr wrap="square" lIns="50800" tIns="76200" rIns="101600" bIns="50800" rtlCol="0" anchor="ctr"/>
+          <a:lstStyle/>
+          <a:p>
+            <a:pPr algn="l" indent="0" marL="0">
+              <a:spcAft>
+                <a:spcPts val="200"/>
+              </a:spcAft>
+              <a:buNone/>
+            </a:pPr>
+            <a:r>
+              <a:rPr lang="pt-BR" sz="1200" b="1" dirty="0">
+                <a:solidFill>
+                  <a:srgbClr val="141414"/>
+                </a:solidFill>
+                <a:latin typeface="Arial" pitchFamily="34" charset="0"/>
+                <a:ea typeface="Arial" pitchFamily="34" charset="-122"/>
+                <a:cs typeface="Arial" pitchFamily="34" charset="-120"/>
+              </a:rPr>
+              <a:t>JOSÉ PORTELA</a:t>
+            </a:r>
+            <a:endParaRPr lang="pt-BR" sz="1200" dirty="0"/>
+          </a:p>
+          <a:p>
+            <a:pPr algn="l" indent="0" marL="0">
+              <a:spcAft>
+                <a:spcPts val="200"/>
+              </a:spcAft>
+              <a:buNone/>
+            </a:pPr>
+            <a:r>
+              <a:rPr lang="pt-BR" sz="1200" dirty="0">
+                <a:solidFill>
+                  <a:srgbClr val="5E5E5E"/>
+                </a:solidFill>
+                <a:latin typeface="Arial" pitchFamily="34" charset="0"/>
+                <a:ea typeface="Arial" pitchFamily="34" charset="-122"/>
+                <a:cs typeface="Arial" pitchFamily="34" charset="-120"/>
+              </a:rPr>
+              <a:t>Designer sênior · BR · Latam</a:t>
+            </a:r>
+            <a:endParaRPr lang="pt-BR" sz="1200" dirty="0"/>
+          </a:p>
+        </p:txBody>
+      </p:sp>
+      <p:sp>
+        <p:nvSpPr>
+          <p:cNvPr id="21" name="Text 21"/>
+          <p:cNvSpPr txBox="1"/>
+          <p:nvPr/>
+        </p:nvSpPr>
+        <p:spPr>
+          <a:xfrm>
+            <a:off x="4436533" y="2641600"/>
+            <a:ext cx="6942666" cy="419100"/>
+          </a:xfrm>
+          <a:prstGeom prst="rect">
+            <a:avLst/>
+          </a:prstGeom>
+          <a:solidFill>
+            <a:srgbClr val="EC6A3B"/>
+          </a:solidFill>
+          <a:ln/>
+        </p:spPr>
+        <p:txBody>
+          <a:bodyPr wrap="square" lIns="50800" tIns="50800" rIns="50800" bIns="50800" rtlCol="0" anchor="ctr"/>
+          <a:lstStyle/>
+          <a:p>
+            <a:pPr algn="ctr" indent="0" marL="0">
+              <a:buNone/>
+            </a:pPr>
+            <a:r>
+              <a:rPr lang="pt-BR" sz="1600" b="1" dirty="0">
+                <a:solidFill>
+                  <a:srgbClr val="FFFFFF"/>
+                </a:solidFill>
+                <a:latin typeface="Arial" pitchFamily="34" charset="0"/>
+                <a:ea typeface="Arial" pitchFamily="34" charset="-122"/>
+                <a:cs typeface="Arial" pitchFamily="34" charset="-120"/>
+              </a:rPr>
+              <a:t>CRIAÇÃO</a:t>
+            </a:r>
+            <a:endParaRPr lang="pt-BR" sz="1600" dirty="0"/>
+          </a:p>
+        </p:txBody>
+      </p:sp>
+      <p:sp>
+        <p:nvSpPr>
+          <p:cNvPr id="22" name="Shape 22"/>
+          <p:cNvSpPr/>
+          <p:nvPr/>
+        </p:nvSpPr>
+        <p:spPr>
+          <a:xfrm>
+            <a:off x="4436533" y="3136900"/>
+            <a:ext cx="6942666" cy="521208"/>
+          </a:xfrm>
+          <a:prstGeom prst="rect">
+            <a:avLst/>
+          </a:prstGeom>
+          <a:solidFill>
+            <a:srgbClr val="FFFFFF"/>
+          </a:solidFill>
+          <a:ln w="19050">
+            <a:solidFill>
+              <a:srgbClr val="EC6A3B"/>
+            </a:solidFill>
+            <a:prstDash val="solid"/>
+          </a:ln>
+        </p:spPr>
+      </p:sp>
+      <p:sp>
+        <p:nvSpPr>
+          <p:cNvPr id="23" name="Text 23"/>
+          <p:cNvSpPr txBox="1"/>
+          <p:nvPr/>
+        </p:nvSpPr>
+        <p:spPr>
+          <a:xfrm>
+            <a:off x="4436533" y="3136900"/>
+            <a:ext cx="6942666" cy="521208"/>
+          </a:xfrm>
+          <a:prstGeom prst="rect">
+            <a:avLst/>
+          </a:prstGeom>
+          <a:noFill/>
+          <a:ln/>
+        </p:spPr>
+        <p:txBody>
+          <a:bodyPr wrap="square" lIns="50800" tIns="76200" rIns="101600" bIns="50800" rtlCol="0" anchor="ctr"/>
+          <a:lstStyle/>
+          <a:p>
+            <a:pPr algn="ctr" indent="0" marL="0">
+              <a:spcAft>
+                <a:spcPts val="200"/>
+              </a:spcAft>
+              <a:buNone/>
+            </a:pPr>
+            <a:r>
+              <a:rPr lang="pt-BR" sz="1200" b="1" dirty="0">
+                <a:solidFill>
+                  <a:srgbClr val="141414"/>
+                </a:solidFill>
+                <a:latin typeface="Arial" pitchFamily="34" charset="0"/>
+                <a:ea typeface="Arial" pitchFamily="34" charset="-122"/>
+                <a:cs typeface="Arial" pitchFamily="34" charset="-120"/>
+              </a:rPr>
+              <a:t>RENATA MALINOSK</a:t>
+            </a:r>
+            <a:endParaRPr lang="pt-BR" sz="1200" dirty="0"/>
+          </a:p>
+          <a:p>
+            <a:pPr algn="ctr" indent="0" marL="0">
+              <a:spcAft>
+                <a:spcPts val="200"/>
+              </a:spcAft>
+              <a:buNone/>
+            </a:pPr>
+            <a:r>
+              <a:rPr lang="pt-BR" sz="1200" dirty="0">
+                <a:solidFill>
+                  <a:srgbClr val="5E5E5E"/>
+                </a:solidFill>
+                <a:latin typeface="Arial" pitchFamily="34" charset="0"/>
+                <a:ea typeface="Arial" pitchFamily="34" charset="-122"/>
+                <a:cs typeface="Arial" pitchFamily="34" charset="-120"/>
+              </a:rPr>
+              <a:t>Gerente de criação · BR · Latam · LRSA</a:t>
+            </a:r>
+            <a:endParaRPr lang="pt-BR" sz="1200" dirty="0"/>
+          </a:p>
+        </p:txBody>
+      </p:sp>
+      <p:sp>
+        <p:nvSpPr>
+          <p:cNvPr id="24" name="Shape 24"/>
+          <p:cNvSpPr/>
+          <p:nvPr/>
+        </p:nvSpPr>
+        <p:spPr>
+          <a:xfrm>
+            <a:off x="4436533" y="3721608"/>
+            <a:ext cx="3433233" cy="521208"/>
+          </a:xfrm>
+          <a:prstGeom prst="rect">
+            <a:avLst/>
+          </a:prstGeom>
+          <a:solidFill>
+            <a:srgbClr val="FFFFFF"/>
+          </a:solidFill>
+          <a:ln w="12700">
+            <a:solidFill>
+              <a:srgbClr val="E3E1DE"/>
+            </a:solidFill>
+            <a:prstDash val="solid"/>
+          </a:ln>
+        </p:spPr>
+      </p:sp>
+      <p:sp>
+        <p:nvSpPr>
+          <p:cNvPr id="25" name="Text 25"/>
+          <p:cNvSpPr txBox="1"/>
+          <p:nvPr/>
+        </p:nvSpPr>
+        <p:spPr>
+          <a:xfrm>
+            <a:off x="4436533" y="3721608"/>
+            <a:ext cx="3433233" cy="521208"/>
+          </a:xfrm>
+          <a:prstGeom prst="rect">
+            <a:avLst/>
+          </a:prstGeom>
+          <a:noFill/>
+          <a:ln/>
+        </p:spPr>
+        <p:txBody>
+          <a:bodyPr wrap="square" lIns="50800" tIns="76200" rIns="101600" bIns="50800" rtlCol="0" anchor="ctr"/>
+          <a:lstStyle/>
+          <a:p>
+            <a:pPr algn="l" indent="0" marL="0">
+              <a:spcAft>
+                <a:spcPts val="200"/>
+              </a:spcAft>
+              <a:buNone/>
+            </a:pPr>
+            <a:r>
+              <a:rPr lang="pt-BR" sz="1200" b="1" dirty="0">
+                <a:solidFill>
+                  <a:srgbClr val="141414"/>
+                </a:solidFill>
+                <a:latin typeface="Arial" pitchFamily="34" charset="0"/>
+                <a:ea typeface="Arial" pitchFamily="34" charset="-122"/>
+                <a:cs typeface="Arial" pitchFamily="34" charset="-120"/>
+              </a:rPr>
+              <a:t>PEDRO CORTELETTI</a:t>
+            </a:r>
+            <a:endParaRPr lang="pt-BR" sz="1200" dirty="0"/>
+          </a:p>
+          <a:p>
+            <a:pPr algn="l" indent="0" marL="0">
+              <a:spcAft>
+                <a:spcPts val="200"/>
+              </a:spcAft>
+              <a:buNone/>
+            </a:pPr>
+            <a:r>
+              <a:rPr lang="pt-BR" sz="1200" dirty="0">
+                <a:solidFill>
+                  <a:srgbClr val="5E5E5E"/>
+                </a:solidFill>
+                <a:latin typeface="Arial" pitchFamily="34" charset="0"/>
+                <a:ea typeface="Arial" pitchFamily="34" charset="-122"/>
+                <a:cs typeface="Arial" pitchFamily="34" charset="-120"/>
+              </a:rPr>
+              <a:t>D.A. sênior · BR · Latam · LRSA</a:t>
+            </a:r>
+            <a:endParaRPr lang="pt-BR" sz="1200" dirty="0"/>
+          </a:p>
+        </p:txBody>
+      </p:sp>
+      <p:sp>
+        <p:nvSpPr>
+          <p:cNvPr id="26" name="Shape 26"/>
+          <p:cNvSpPr/>
+          <p:nvPr/>
+        </p:nvSpPr>
+        <p:spPr>
+          <a:xfrm>
+            <a:off x="7945966" y="3721608"/>
+            <a:ext cx="3433233" cy="521208"/>
+          </a:xfrm>
+          <a:prstGeom prst="rect">
+            <a:avLst/>
+          </a:prstGeom>
+          <a:solidFill>
+            <a:srgbClr val="FFFFFF"/>
+          </a:solidFill>
+          <a:ln w="12700">
+            <a:solidFill>
+              <a:srgbClr val="E3E1DE"/>
+            </a:solidFill>
+            <a:prstDash val="solid"/>
+          </a:ln>
+        </p:spPr>
+      </p:sp>
+      <p:sp>
+        <p:nvSpPr>
+          <p:cNvPr id="27" name="Text 27"/>
+          <p:cNvSpPr txBox="1"/>
+          <p:nvPr/>
+        </p:nvSpPr>
+        <p:spPr>
+          <a:xfrm>
+            <a:off x="7945966" y="3721608"/>
+            <a:ext cx="3433233" cy="521208"/>
+          </a:xfrm>
+          <a:prstGeom prst="rect">
+            <a:avLst/>
+          </a:prstGeom>
+          <a:noFill/>
+          <a:ln/>
+        </p:spPr>
+        <p:txBody>
+          <a:bodyPr wrap="square" lIns="50800" tIns="76200" rIns="101600" bIns="50800" rtlCol="0" anchor="ctr"/>
+          <a:lstStyle/>
+          <a:p>
+            <a:pPr algn="l" indent="0" marL="0">
+              <a:spcAft>
+                <a:spcPts val="200"/>
+              </a:spcAft>
+              <a:buNone/>
+            </a:pPr>
+            <a:r>
+              <a:rPr lang="pt-BR" sz="1200" b="1" dirty="0">
+                <a:solidFill>
+                  <a:srgbClr val="141414"/>
+                </a:solidFill>
+                <a:latin typeface="Arial" pitchFamily="34" charset="0"/>
+                <a:ea typeface="Arial" pitchFamily="34" charset="-122"/>
+                <a:cs typeface="Arial" pitchFamily="34" charset="-120"/>
+              </a:rPr>
+              <a:t>SAMUEL SALAMON</a:t>
+            </a:r>
+            <a:endParaRPr lang="pt-BR" sz="1200" dirty="0"/>
+          </a:p>
+          <a:p>
+            <a:pPr algn="l" indent="0" marL="0">
+              <a:spcAft>
+                <a:spcPts val="200"/>
+              </a:spcAft>
+              <a:buNone/>
+            </a:pPr>
+            <a:r>
+              <a:rPr lang="pt-BR" sz="1200" dirty="0">
+                <a:solidFill>
+                  <a:srgbClr val="5E5E5E"/>
+                </a:solidFill>
+                <a:latin typeface="Arial" pitchFamily="34" charset="0"/>
+                <a:ea typeface="Arial" pitchFamily="34" charset="-122"/>
+                <a:cs typeface="Arial" pitchFamily="34" charset="-120"/>
+              </a:rPr>
+              <a:t>Motion / D.A. pleno · BR · Latam · LRSA</a:t>
+            </a:r>
+            <a:endParaRPr lang="pt-BR" sz="1200" dirty="0"/>
+          </a:p>
+        </p:txBody>
+      </p:sp>
+      <p:sp>
+        <p:nvSpPr>
+          <p:cNvPr id="28" name="Shape 28"/>
+          <p:cNvSpPr/>
+          <p:nvPr/>
+        </p:nvSpPr>
+        <p:spPr>
+          <a:xfrm>
+            <a:off x="4436533" y="4306316"/>
+            <a:ext cx="3433233" cy="521208"/>
+          </a:xfrm>
+          <a:prstGeom prst="rect">
+            <a:avLst/>
+          </a:prstGeom>
+          <a:solidFill>
+            <a:srgbClr val="FFFFFF"/>
+          </a:solidFill>
+          <a:ln w="12700">
+            <a:solidFill>
+              <a:srgbClr val="E3E1DE"/>
+            </a:solidFill>
+            <a:prstDash val="solid"/>
+          </a:ln>
+        </p:spPr>
+      </p:sp>
+      <p:sp>
+        <p:nvSpPr>
+          <p:cNvPr id="29" name="Text 29"/>
+          <p:cNvSpPr txBox="1"/>
+          <p:nvPr/>
+        </p:nvSpPr>
+        <p:spPr>
+          <a:xfrm>
+            <a:off x="4436533" y="4306316"/>
+            <a:ext cx="3433233" cy="521208"/>
+          </a:xfrm>
+          <a:prstGeom prst="rect">
+            <a:avLst/>
+          </a:prstGeom>
+          <a:noFill/>
+          <a:ln/>
+        </p:spPr>
+        <p:txBody>
+          <a:bodyPr wrap="square" lIns="50800" tIns="76200" rIns="101600" bIns="50800" rtlCol="0" anchor="ctr"/>
+          <a:lstStyle/>
+          <a:p>
+            <a:pPr algn="l" indent="0" marL="0">
+              <a:spcAft>
+                <a:spcPts val="200"/>
+              </a:spcAft>
+              <a:buNone/>
+            </a:pPr>
+            <a:r>
+              <a:rPr lang="pt-BR" sz="1200" b="1" dirty="0">
+                <a:solidFill>
+                  <a:srgbClr val="141414"/>
+                </a:solidFill>
+                <a:latin typeface="Arial" pitchFamily="34" charset="0"/>
+                <a:ea typeface="Arial" pitchFamily="34" charset="-122"/>
+                <a:cs typeface="Arial" pitchFamily="34" charset="-120"/>
+              </a:rPr>
+              <a:t>IAGO FRANCISCO</a:t>
+            </a:r>
+            <a:endParaRPr lang="pt-BR" sz="1200" dirty="0"/>
+          </a:p>
+          <a:p>
+            <a:pPr algn="l" indent="0" marL="0">
+              <a:spcAft>
+                <a:spcPts val="200"/>
+              </a:spcAft>
+              <a:buNone/>
+            </a:pPr>
+            <a:r>
+              <a:rPr lang="pt-BR" sz="1200" dirty="0">
+                <a:solidFill>
+                  <a:srgbClr val="5E5E5E"/>
+                </a:solidFill>
+                <a:latin typeface="Arial" pitchFamily="34" charset="0"/>
+                <a:ea typeface="Arial" pitchFamily="34" charset="-122"/>
+                <a:cs typeface="Arial" pitchFamily="34" charset="-120"/>
+              </a:rPr>
+              <a:t>D.A. freela · BR · Latam · LRSA</a:t>
+            </a:r>
+            <a:endParaRPr lang="pt-BR" sz="1200" dirty="0"/>
+          </a:p>
+        </p:txBody>
+      </p:sp>
+      <p:sp>
+        <p:nvSpPr>
+          <p:cNvPr id="30" name="Shape 30"/>
+          <p:cNvSpPr/>
+          <p:nvPr/>
+        </p:nvSpPr>
+        <p:spPr>
+          <a:xfrm>
+            <a:off x="7945966" y="4306316"/>
+            <a:ext cx="3433233" cy="521208"/>
+          </a:xfrm>
+          <a:prstGeom prst="rect">
+            <a:avLst/>
+          </a:prstGeom>
+          <a:solidFill>
+            <a:srgbClr val="FFFFFF"/>
+          </a:solidFill>
+          <a:ln w="12700">
+            <a:solidFill>
+              <a:srgbClr val="E3E1DE"/>
+            </a:solidFill>
+            <a:prstDash val="solid"/>
+          </a:ln>
+        </p:spPr>
+      </p:sp>
+      <p:sp>
+        <p:nvSpPr>
+          <p:cNvPr id="31" name="Text 31"/>
+          <p:cNvSpPr txBox="1"/>
+          <p:nvPr/>
+        </p:nvSpPr>
+        <p:spPr>
+          <a:xfrm>
+            <a:off x="7945966" y="4306316"/>
+            <a:ext cx="3433233" cy="521208"/>
+          </a:xfrm>
+          <a:prstGeom prst="rect">
+            <a:avLst/>
+          </a:prstGeom>
+          <a:noFill/>
+          <a:ln/>
+        </p:spPr>
+        <p:txBody>
+          <a:bodyPr wrap="square" lIns="50800" tIns="76200" rIns="101600" bIns="50800" rtlCol="0" anchor="ctr"/>
+          <a:lstStyle/>
+          <a:p>
+            <a:pPr algn="l" indent="0" marL="0">
+              <a:spcAft>
+                <a:spcPts val="200"/>
+              </a:spcAft>
+              <a:buNone/>
+            </a:pPr>
+            <a:r>
+              <a:rPr lang="pt-BR" sz="1200" b="1" dirty="0">
+                <a:solidFill>
+                  <a:srgbClr val="141414"/>
+                </a:solidFill>
+                <a:latin typeface="Arial" pitchFamily="34" charset="0"/>
+                <a:ea typeface="Arial" pitchFamily="34" charset="-122"/>
+                <a:cs typeface="Arial" pitchFamily="34" charset="-120"/>
+              </a:rPr>
+              <a:t>GUILHERME LOURENÇO</a:t>
+            </a:r>
+            <a:endParaRPr lang="pt-BR" sz="1200" dirty="0"/>
+          </a:p>
+          <a:p>
+            <a:pPr algn="l" indent="0" marL="0">
+              <a:spcAft>
+                <a:spcPts val="200"/>
+              </a:spcAft>
+              <a:buNone/>
+            </a:pPr>
+            <a:r>
+              <a:rPr lang="pt-BR" sz="1200" dirty="0">
+                <a:solidFill>
+                  <a:srgbClr val="5E5E5E"/>
+                </a:solidFill>
+                <a:latin typeface="Arial" pitchFamily="34" charset="0"/>
+                <a:ea typeface="Arial" pitchFamily="34" charset="-122"/>
+                <a:cs typeface="Arial" pitchFamily="34" charset="-120"/>
+              </a:rPr>
+              <a:t>D.A. freela · BR · Latam · LRSA</a:t>
+            </a:r>
+            <a:endParaRPr lang="pt-BR" sz="1200" dirty="0"/>
+          </a:p>
+        </p:txBody>
+      </p:sp>
+      <p:sp>
+        <p:nvSpPr>
+          <p:cNvPr id="32" name="Shape 32"/>
+          <p:cNvSpPr/>
+          <p:nvPr/>
+        </p:nvSpPr>
+        <p:spPr>
+          <a:xfrm>
+            <a:off x="4436533" y="4891024"/>
+            <a:ext cx="3433233" cy="521208"/>
+          </a:xfrm>
+          <a:prstGeom prst="rect">
+            <a:avLst/>
+          </a:prstGeom>
+          <a:solidFill>
+            <a:srgbClr val="FFFFFF"/>
+          </a:solidFill>
+          <a:ln w="12700">
+            <a:solidFill>
+              <a:srgbClr val="E3E1DE"/>
+            </a:solidFill>
+            <a:prstDash val="solid"/>
+          </a:ln>
+        </p:spPr>
+      </p:sp>
+      <p:sp>
+        <p:nvSpPr>
+          <p:cNvPr id="33" name="Text 33"/>
+          <p:cNvSpPr txBox="1"/>
+          <p:nvPr/>
+        </p:nvSpPr>
+        <p:spPr>
+          <a:xfrm>
+            <a:off x="4436533" y="4891024"/>
+            <a:ext cx="3433233" cy="521208"/>
+          </a:xfrm>
+          <a:prstGeom prst="rect">
+            <a:avLst/>
+          </a:prstGeom>
+          <a:noFill/>
+          <a:ln/>
+        </p:spPr>
+        <p:txBody>
+          <a:bodyPr wrap="square" lIns="50800" tIns="76200" rIns="101600" bIns="50800" rtlCol="0" anchor="ctr"/>
+          <a:lstStyle/>
+          <a:p>
+            <a:pPr algn="l" indent="0" marL="0">
+              <a:spcAft>
+                <a:spcPts val="200"/>
+              </a:spcAft>
+              <a:buNone/>
+            </a:pPr>
+            <a:r>
+              <a:rPr lang="pt-BR" sz="1200" b="1" dirty="0">
+                <a:solidFill>
+                  <a:srgbClr val="141414"/>
+                </a:solidFill>
+                <a:latin typeface="Arial" pitchFamily="34" charset="0"/>
+                <a:ea typeface="Arial" pitchFamily="34" charset="-122"/>
+                <a:cs typeface="Arial" pitchFamily="34" charset="-120"/>
+              </a:rPr>
+              <a:t>LUANA VIEIRA SILVEIRA</a:t>
+            </a:r>
+            <a:endParaRPr lang="pt-BR" sz="1200" dirty="0"/>
+          </a:p>
+          <a:p>
+            <a:pPr algn="l" indent="0" marL="0">
+              <a:spcAft>
+                <a:spcPts val="200"/>
+              </a:spcAft>
+              <a:buNone/>
+            </a:pPr>
+            <a:r>
+              <a:rPr lang="pt-BR" sz="1200" dirty="0">
+                <a:solidFill>
+                  <a:srgbClr val="5E5E5E"/>
+                </a:solidFill>
+                <a:latin typeface="Arial" pitchFamily="34" charset="0"/>
+                <a:ea typeface="Arial" pitchFamily="34" charset="-122"/>
+                <a:cs typeface="Arial" pitchFamily="34" charset="-120"/>
+              </a:rPr>
+              <a:t>Redatora sênior · BR · Latam · LRSA</a:t>
+            </a:r>
+            <a:endParaRPr lang="pt-BR" sz="1200" dirty="0"/>
+          </a:p>
+        </p:txBody>
+      </p:sp>
+      <p:sp>
+        <p:nvSpPr>
+          <p:cNvPr id="34" name="Shape 34"/>
+          <p:cNvSpPr/>
+          <p:nvPr/>
+        </p:nvSpPr>
+        <p:spPr>
+          <a:xfrm>
+            <a:off x="7945966" y="4891024"/>
+            <a:ext cx="3433233" cy="521208"/>
+          </a:xfrm>
+          <a:prstGeom prst="rect">
+            <a:avLst/>
+          </a:prstGeom>
+          <a:solidFill>
+            <a:srgbClr val="FFFFFF"/>
+          </a:solidFill>
+          <a:ln w="12700">
+            <a:solidFill>
+              <a:srgbClr val="E3E1DE"/>
+            </a:solidFill>
+            <a:prstDash val="solid"/>
+          </a:ln>
+        </p:spPr>
+      </p:sp>
+      <p:sp>
+        <p:nvSpPr>
+          <p:cNvPr id="35" name="Text 35"/>
+          <p:cNvSpPr txBox="1"/>
+          <p:nvPr/>
+        </p:nvSpPr>
+        <p:spPr>
+          <a:xfrm>
+            <a:off x="7945966" y="4891024"/>
+            <a:ext cx="3433233" cy="521208"/>
+          </a:xfrm>
+          <a:prstGeom prst="rect">
+            <a:avLst/>
+          </a:prstGeom>
+          <a:noFill/>
+          <a:ln/>
+        </p:spPr>
+        <p:txBody>
+          <a:bodyPr wrap="square" lIns="50800" tIns="76200" rIns="101600" bIns="50800" rtlCol="0" anchor="ctr"/>
+          <a:lstStyle/>
+          <a:p>
+            <a:pPr algn="l" indent="0" marL="0">
+              <a:spcAft>
+                <a:spcPts val="200"/>
+              </a:spcAft>
+              <a:buNone/>
+            </a:pPr>
+            <a:r>
+              <a:rPr lang="pt-BR" sz="1200" b="1" dirty="0">
+                <a:solidFill>
+                  <a:srgbClr val="141414"/>
+                </a:solidFill>
+                <a:latin typeface="Arial" pitchFamily="34" charset="0"/>
+                <a:ea typeface="Arial" pitchFamily="34" charset="-122"/>
+                <a:cs typeface="Arial" pitchFamily="34" charset="-120"/>
+              </a:rPr>
+              <a:t>ANA LIVIA MARCILIO</a:t>
+            </a:r>
+            <a:endParaRPr lang="pt-BR" sz="1200" dirty="0"/>
+          </a:p>
+          <a:p>
+            <a:pPr algn="l" indent="0" marL="0">
+              <a:spcAft>
+                <a:spcPts val="200"/>
+              </a:spcAft>
+              <a:buNone/>
+            </a:pPr>
+            <a:r>
+              <a:rPr lang="pt-BR" sz="1200" dirty="0">
+                <a:solidFill>
+                  <a:srgbClr val="5E5E5E"/>
+                </a:solidFill>
+                <a:latin typeface="Arial" pitchFamily="34" charset="0"/>
+                <a:ea typeface="Arial" pitchFamily="34" charset="-122"/>
+                <a:cs typeface="Arial" pitchFamily="34" charset="-120"/>
+              </a:rPr>
+              <a:t>Redatora plena · BR · Latam · LRSA</a:t>
+            </a:r>
+            <a:endParaRPr lang="pt-BR" sz="1200" dirty="0"/>
+          </a:p>
+        </p:txBody>
+      </p:sp>
+      <p:sp>
+        <p:nvSpPr>
+          <p:cNvPr id="36" name="Shape 36"/>
+          <p:cNvSpPr/>
+          <p:nvPr/>
+        </p:nvSpPr>
+        <p:spPr>
+          <a:xfrm>
+            <a:off x="4436533" y="5475732"/>
+            <a:ext cx="3433233" cy="521208"/>
+          </a:xfrm>
+          <a:prstGeom prst="rect">
+            <a:avLst/>
+          </a:prstGeom>
+          <a:solidFill>
+            <a:srgbClr val="FFFFFF"/>
+          </a:solidFill>
+          <a:ln w="12700">
+            <a:solidFill>
+              <a:srgbClr val="E3E1DE"/>
+            </a:solidFill>
+            <a:prstDash val="solid"/>
+          </a:ln>
+        </p:spPr>
+      </p:sp>
+      <p:sp>
+        <p:nvSpPr>
+          <p:cNvPr id="37" name="Text 37"/>
+          <p:cNvSpPr txBox="1"/>
+          <p:nvPr/>
+        </p:nvSpPr>
+        <p:spPr>
+          <a:xfrm>
+            <a:off x="4436533" y="5475732"/>
+            <a:ext cx="3433233" cy="521208"/>
+          </a:xfrm>
+          <a:prstGeom prst="rect">
+            <a:avLst/>
+          </a:prstGeom>
+          <a:noFill/>
+          <a:ln/>
+        </p:spPr>
+        <p:txBody>
+          <a:bodyPr wrap="square" lIns="50800" tIns="76200" rIns="101600" bIns="50800" rtlCol="0" anchor="ctr"/>
+          <a:lstStyle/>
+          <a:p>
+            <a:pPr algn="l" indent="0" marL="0">
+              <a:spcAft>
+                <a:spcPts val="200"/>
+              </a:spcAft>
+              <a:buNone/>
+            </a:pPr>
+            <a:r>
+              <a:rPr lang="pt-BR" sz="1200" b="1" dirty="0">
+                <a:solidFill>
+                  <a:srgbClr val="141414"/>
+                </a:solidFill>
+                <a:latin typeface="Arial" pitchFamily="34" charset="0"/>
+                <a:ea typeface="Arial" pitchFamily="34" charset="-122"/>
+                <a:cs typeface="Arial" pitchFamily="34" charset="-120"/>
+              </a:rPr>
+              <a:t>ANE FRANKE</a:t>
+            </a:r>
+            <a:endParaRPr lang="pt-BR" sz="1200" dirty="0"/>
+          </a:p>
+          <a:p>
+            <a:pPr algn="l" indent="0" marL="0">
+              <a:spcAft>
+                <a:spcPts val="200"/>
+              </a:spcAft>
+              <a:buNone/>
+            </a:pPr>
+            <a:r>
+              <a:rPr lang="pt-BR" sz="1200" dirty="0">
+                <a:solidFill>
+                  <a:srgbClr val="5E5E5E"/>
+                </a:solidFill>
+                <a:latin typeface="Arial" pitchFamily="34" charset="0"/>
+                <a:ea typeface="Arial" pitchFamily="34" charset="-122"/>
+                <a:cs typeface="Arial" pitchFamily="34" charset="-120"/>
+              </a:rPr>
+              <a:t>Redatora plena · BR · Latam</a:t>
+            </a:r>
+            <a:endParaRPr lang="pt-BR" sz="1200" dirty="0"/>
+          </a:p>
+        </p:txBody>
+      </p:sp>
+      <p:sp>
+        <p:nvSpPr>
+          <p:cNvPr id="38" name="Shape 38"/>
+          <p:cNvSpPr/>
+          <p:nvPr/>
+        </p:nvSpPr>
+        <p:spPr>
+          <a:xfrm>
+            <a:off x="7945966" y="5475732"/>
+            <a:ext cx="3433233" cy="521208"/>
+          </a:xfrm>
+          <a:prstGeom prst="rect">
+            <a:avLst/>
+          </a:prstGeom>
+          <a:solidFill>
+            <a:srgbClr val="FFFFFF"/>
+          </a:solidFill>
+          <a:ln w="12700">
+            <a:solidFill>
+              <a:srgbClr val="E3E1DE"/>
+            </a:solidFill>
+            <a:prstDash val="solid"/>
+          </a:ln>
+        </p:spPr>
+      </p:sp>
+      <p:sp>
+        <p:nvSpPr>
+          <p:cNvPr id="39" name="Text 39"/>
+          <p:cNvSpPr txBox="1"/>
+          <p:nvPr/>
+        </p:nvSpPr>
+        <p:spPr>
+          <a:xfrm>
+            <a:off x="7945966" y="5475732"/>
+            <a:ext cx="3433233" cy="521208"/>
+          </a:xfrm>
+          <a:prstGeom prst="rect">
+            <a:avLst/>
+          </a:prstGeom>
+          <a:noFill/>
+          <a:ln/>
+        </p:spPr>
+        <p:txBody>
+          <a:bodyPr wrap="square" lIns="50800" tIns="76200" rIns="101600" bIns="50800" rtlCol="0" anchor="ctr"/>
+          <a:lstStyle/>
+          <a:p>
+            <a:pPr algn="l" indent="0" marL="0">
+              <a:spcAft>
+                <a:spcPts val="200"/>
+              </a:spcAft>
+              <a:buNone/>
+            </a:pPr>
+            <a:r>
+              <a:rPr lang="pt-BR" sz="1200" b="1" dirty="0">
+                <a:solidFill>
+                  <a:srgbClr val="141414"/>
+                </a:solidFill>
+                <a:latin typeface="Arial" pitchFamily="34" charset="0"/>
+                <a:ea typeface="Arial" pitchFamily="34" charset="-122"/>
+                <a:cs typeface="Arial" pitchFamily="34" charset="-120"/>
+              </a:rPr>
+              <a:t>VANESSA ARAUJO</a:t>
+            </a:r>
+            <a:endParaRPr lang="pt-BR" sz="1200" dirty="0"/>
+          </a:p>
+          <a:p>
+            <a:pPr algn="l" indent="0" marL="0">
+              <a:spcAft>
+                <a:spcPts val="200"/>
+              </a:spcAft>
+              <a:buNone/>
+            </a:pPr>
+            <a:r>
+              <a:rPr lang="pt-BR" sz="1200" dirty="0">
+                <a:solidFill>
+                  <a:srgbClr val="5E5E5E"/>
+                </a:solidFill>
+                <a:latin typeface="Arial" pitchFamily="34" charset="0"/>
+                <a:ea typeface="Arial" pitchFamily="34" charset="-122"/>
+                <a:cs typeface="Arial" pitchFamily="34" charset="-120"/>
+              </a:rPr>
+              <a:t>Redatora júnior/plena · BR · Latam · LRSA</a:t>
+            </a:r>
+            <a:endParaRPr lang="pt-BR" sz="1200" dirty="0"/>
+          </a:p>
+        </p:txBody>
+      </p:sp>
+      <p:sp>
+        <p:nvSpPr>
+          <p:cNvPr id="40" name="Text 40"/>
+          <p:cNvSpPr txBox="1"/>
+          <p:nvPr/>
+        </p:nvSpPr>
+        <p:spPr>
+          <a:xfrm>
+            <a:off x="9474200" y="6311900"/>
+            <a:ext cx="1905000" cy="228600"/>
+          </a:xfrm>
+          <a:prstGeom prst="rect">
+            <a:avLst/>
+          </a:prstGeom>
+          <a:noFill/>
+          <a:ln/>
+        </p:spPr>
+        <p:txBody>
+          <a:bodyPr wrap="square" lIns="0" tIns="0" rIns="0" bIns="0" rtlCol="0" anchor="ctr"/>
+          <a:lstStyle/>
+          <a:p>
+            <a:pPr algn="l" indent="0" marL="0">
+              <a:buNone/>
+            </a:pPr>
+            <a:r>
+              <a:rPr lang="pt-BR" sz="1200" dirty="0">
+                <a:solidFill>
+                  <a:srgbClr val="141414"/>
+                </a:solidFill>
+                <a:latin typeface="Arial" pitchFamily="34" charset="0"/>
+                <a:ea typeface="Arial" pitchFamily="34" charset="-122"/>
+                <a:cs typeface="Arial" pitchFamily="34" charset="-120"/>
+              </a:rPr>
+              <a:t>Liderança (responde a)</a:t>
+            </a:r>
+            <a:endParaRPr lang="pt-BR" sz="1200" dirty="0"/>
+          </a:p>
+        </p:txBody>
+      </p:sp>
+      <p:sp>
+        <p:nvSpPr>
+          <p:cNvPr id="41" name="Shape 41"/>
+          <p:cNvSpPr/>
+          <p:nvPr/>
+        </p:nvSpPr>
+        <p:spPr>
+          <a:xfrm>
+            <a:off x="9042400" y="6426200"/>
+            <a:ext cx="355600" cy="0"/>
+          </a:xfrm>
+          <a:prstGeom prst="line">
+            <a:avLst/>
+          </a:prstGeom>
+          <a:noFill/>
+          <a:ln w="19050">
+            <a:solidFill>
+              <a:srgbClr val="141414"/>
+            </a:solidFill>
+            <a:prstDash val="solid"/>
+          </a:ln>
+        </p:spPr>
+      </p:sp>
+      <p:sp>
+        <p:nvSpPr>
+          <p:cNvPr id="42" name="Text 42"/>
+          <p:cNvSpPr txBox="1"/>
+          <p:nvPr/>
+        </p:nvSpPr>
+        <p:spPr>
+          <a:xfrm>
+            <a:off x="812800" y="6311900"/>
+            <a:ext cx="7924800" cy="228600"/>
+          </a:xfrm>
+          <a:prstGeom prst="rect">
+            <a:avLst/>
+          </a:prstGeom>
+          <a:noFill/>
+          <a:ln/>
+        </p:spPr>
+        <p:txBody>
+          <a:bodyPr wrap="square" lIns="0" tIns="0" rIns="0" bIns="0" rtlCol="0" anchor="ctr"/>
+          <a:lstStyle/>
+          <a:p>
+            <a:pPr algn="l" indent="0" marL="0">
+              <a:buNone/>
+            </a:pPr>
+            <a:r>
+              <a:rPr lang="pt-BR" sz="1100" dirty="0">
+                <a:solidFill>
+                  <a:srgbClr val="5E5E5E"/>
+                </a:solidFill>
+                <a:latin typeface="Arial" pitchFamily="34" charset="0"/>
+                <a:ea typeface="Arial" pitchFamily="34" charset="-122"/>
+                <a:cs typeface="Arial" pitchFamily="34" charset="-120"/>
+              </a:rPr>
+              <a:t>Após o cargo: frentes de atuação (Renner BR, Renner Latam, LRSA, Conteúdo)</a:t>
+            </a:r>
+            <a:endParaRPr lang="pt-BR" sz="1100" dirty="0"/>
+          </a:p>
+        </p:txBody>
+      </p:sp>
+    </p:spTree>
+  </p:cSld>
+  <p:clrMapOvr>
+    <a:masterClrMapping/>
+  </p:clrMapOvr>
+</p:sld>
+</file>
+
+<file path=ppt/slides/slide7.xml><?xml version="1.0" encoding="utf-8"?>
 <p:sld xmlns:a="http://schemas.openxmlformats.org/drawingml/2006/main" xmlns:r="http://schemas.openxmlformats.org/officeDocument/2006/relationships" xmlns:p="http://schemas.openxmlformats.org/presentationml/2006/main">
   <p:cSld name="Slide 1">
     <p:bg>
